--- a/docs/中期汇报ppt/计组中期_含仿真波形_三人答辩补充版_修复版.pptx
+++ b/docs/中期汇报ppt/计组中期_含仿真波形_三人答辩补充版_修复版.pptx
@@ -14154,7 +14154,7 @@
               <a:buNone/>
             </a:pPr>
             <a:r>
-              <a:rPr sz="1320">
+              <a:rPr sz="1320" dirty="0">
                 <a:solidFill>
                   <a:srgbClr val="F7FAFF"/>
                 </a:solidFill>
@@ -14162,9 +14162,20 @@
                 <a:ea typeface="Microsoft YaHei"/>
                 <a:cs typeface="Microsoft YaHei"/>
               </a:rPr>
-              <a:t>  RV32I 教学子集：27 条基础指令，覆盖算术逻辑、访存和控制转移</a:t>
-            </a:r>
-            <a:endParaRPr sz="1320"/>
+              <a:t>  RV32I 子集：27 </a:t>
+            </a:r>
+            <a:r>
+              <a:rPr sz="1320" dirty="0" err="1">
+                <a:solidFill>
+                  <a:srgbClr val="F7FAFF"/>
+                </a:solidFill>
+                <a:latin typeface="Microsoft YaHei"/>
+                <a:ea typeface="Microsoft YaHei"/>
+                <a:cs typeface="Microsoft YaHei"/>
+              </a:rPr>
+              <a:t>条基础指令，覆盖算术逻辑、访存和控制转移</a:t>
+            </a:r>
+            <a:endParaRPr sz="1320" dirty="0"/>
           </a:p>
         </p:txBody>
       </p:sp>

--- a/docs/中期汇报ppt/计组中期_含仿真波形_三人答辩补充版_修复版.pptx
+++ b/docs/中期汇报ppt/计组中期_含仿真波形_三人答辩补充版_修复版.pptx
@@ -15,10 +15,10 @@
     <p:sldId id="260" r:id="rId6"/>
     <p:sldId id="261" r:id="rId7"/>
     <p:sldId id="262" r:id="rId8"/>
-    <p:sldId id="263" r:id="rId9"/>
-    <p:sldId id="264" r:id="rId10"/>
-    <p:sldId id="265" r:id="rId11"/>
-    <p:sldId id="266" r:id="rId12"/>
+    <p:sldId id="265" r:id="rId9"/>
+    <p:sldId id="263" r:id="rId10"/>
+    <p:sldId id="266" r:id="rId11"/>
+    <p:sldId id="264" r:id="rId12"/>
     <p:sldId id="267" r:id="rId13"/>
     <p:sldId id="268" r:id="rId14"/>
     <p:sldId id="269" r:id="rId15"/>
@@ -433,7 +433,7 @@
           </a:p>
           <a:p>
             <a:r>
-              <a:t>程序先写入 x1=5、x2=7，随后立即执行 add x3,x1,x2。波形中 forward_a 为 01，表示从 MEM/WB 取得 x1；forward_b 为 10，表示从 EX/MEM 取得 x2。ALU 同周期得到 5 和 7，输出 12，说明两路源操作数能够同时前递。</a:t>
+              <a:t>这段程序让 lw x5 后立即执行 addi x6,x5,1。检测到 load-use 后，hold_frontend 保持 PC 与 IF/ID，bubble_id_ex 向执行级插入气泡。数据可用后流水线继续，最终 x6 等于 43。</a:t>
             </a:r>
           </a:p>
           <a:p>
@@ -448,7 +448,7 @@
           </a:p>
           <a:p>
             <a:r>
-              <a:t>- docs/仿真/tb_pipeline_hazard_双源前递.png</a:t>
+              <a:t>- docs/仿真/tb_pipeline_hazard_load_use.png</a:t>
             </a:r>
           </a:p>
         </p:txBody>
@@ -525,27 +525,12 @@
           <a:lstStyle/>
           <a:p>
             <a:r>
-              <a:t>逐页讲稿：</a:t>
-            </a:r>
-          </a:p>
-          <a:p>
-            <a:r>
-              <a:t>这段程序让 lw x5 后立即执行 addi x6,x5,1。检测到 load-use 后，hold_frontend 保持 PC 与 IF/ID，bubble_id_ex 向执行级插入气泡。数据可用后流水线继续，最终 x6 等于 43。</a:t>
-            </a:r>
-          </a:p>
-          <a:p>
-            <a:r>
-              <a:t>内容依据：</a:t>
-            </a:r>
-          </a:p>
-          <a:p>
-            <a:r>
-              <a:t>- sim/system/tb_pipeline_hazard.sv</a:t>
-            </a:r>
-          </a:p>
-          <a:p>
-            <a:r>
-              <a:t>- docs/仿真/tb_pipeline_hazard_load_use.png</a:t>
+              <a:t>逐页讲稿：
+分支和跳转在 EX 级得到真实方向与目标。若需要重定向，控制器把 PC 切到目标地址，并清除 IF/ID 与 ID/EX 中两条年轻指令。分支本身继续向后完成。图中的 XX 表示被作废的错误路径指令，它们的 valid 已清零，因此不能产生寄存器、存储器或 MMIO 副作用。
+内容依据：
+- docs/核心设计文档/06-五级流水完整数据通路图.md §4
+- rtl/core/pipeline_ctrl.sv
+- sim/system/tb_cpu_core.sv</a:t>
             </a:r>
           </a:p>
         </p:txBody>
@@ -1460,12 +1445,27 @@
           <a:lstStyle/>
           <a:p>
             <a:r>
-              <a:t>逐页讲稿：
-load-use 不能只靠普通 EX 前递，因为加载数据要到 MEM 之后才产生。检测到相邻消费者后，PC 和 IF/ID 保持一个周期，同时向 ID/EX 插入气泡。存储器等待则冻结后端并保持请求，MEM/WB 插入气泡，避免同一条旧指令重复退休。ready 到达后请求只提交一次。
-内容依据：
-- docs/核心设计文档/06-五级流水完整数据通路图.md §4
-- rtl/core/pipeline_ctrl.sv
-- rtl/core/cpu_core.sv</a:t>
+              <a:t>逐页讲稿：</a:t>
+            </a:r>
+          </a:p>
+          <a:p>
+            <a:r>
+              <a:t>程序先写入 x1=5、x2=7，随后立即执行 add x3,x1,x2。波形中 forward_a 为 01，表示从 MEM/WB 取得 x1；forward_b 为 10，表示从 EX/MEM 取得 x2。ALU 同周期得到 5 和 7，输出 12，说明两路源操作数能够同时前递。</a:t>
+            </a:r>
+          </a:p>
+          <a:p>
+            <a:r>
+              <a:t>内容依据：</a:t>
+            </a:r>
+          </a:p>
+          <a:p>
+            <a:r>
+              <a:t>- sim/system/tb_pipeline_hazard.sv</a:t>
+            </a:r>
+          </a:p>
+          <a:p>
+            <a:r>
+              <a:t>- docs/仿真/tb_pipeline_hazard_双源前递.png</a:t>
             </a:r>
           </a:p>
         </p:txBody>
@@ -1543,11 +1543,11 @@
           <a:p>
             <a:r>
               <a:t>逐页讲稿：
-分支和跳转在 EX 级得到真实方向与目标。若需要重定向，控制器把 PC 切到目标地址，并清除 IF/ID 与 ID/EX 中两条年轻指令。分支本身继续向后完成。图中的 XX 表示被作废的错误路径指令，它们的 valid 已清零，因此不能产生寄存器、存储器或 MMIO 副作用。
+load-use 不能只靠普通 EX 前递，因为加载数据要到 MEM 之后才产生。检测到相邻消费者后，PC 和 IF/ID 保持一个周期，同时向 ID/EX 插入气泡。存储器等待则冻结后端并保持请求，MEM/WB 插入气泡，避免同一条旧指令重复退休。ready 到达后请求只提交一次。
 内容依据：
 - docs/核心设计文档/06-五级流水完整数据通路图.md §4
 - rtl/core/pipeline_ctrl.sv
-- sim/system/tb_cpu_core.sv</a:t>
+- rtl/core/cpu_core.sv</a:t>
             </a:r>
           </a:p>
         </p:txBody>
@@ -3250,7 +3250,7 @@
                 <a:ea typeface="Microsoft YaHei"/>
                 <a:cs typeface="Microsoft YaHei"/>
               </a:rPr>
-              <a:t>双源前递仿真</a:t>
+              <a:t>load-use 停顿仿真</a:t>
             </a:r>
             <a:endParaRPr sz="2400"/>
           </a:p>
@@ -3298,7 +3298,7 @@
                 <a:ea typeface="Microsoft YaHei"/>
                 <a:cs typeface="Microsoft YaHei"/>
               </a:rPr>
-              <a:t>两个源操作数分别从 MEM/WB 与 EX/MEM 取得最新值</a:t>
+              <a:t>加载结果尚未可用时，保持前端并向 ID/EX 插入一个气泡</a:t>
             </a:r>
             <a:endParaRPr sz="1150"/>
           </a:p>
@@ -3336,7 +3336,7 @@
               <a:buNone/>
             </a:pPr>
             <a:r>
-              <a:rPr sz="1000" b="1">
+              <a:rPr lang="en-US" sz="1000" b="1" dirty="0">
                 <a:solidFill>
                   <a:srgbClr val="8392B7"/>
                 </a:solidFill>
@@ -3346,7 +3346,7 @@
               </a:rPr>
               <a:t>10</a:t>
             </a:r>
-            <a:endParaRPr sz="1000"/>
+            <a:endParaRPr sz="1000" dirty="0"/>
           </a:p>
         </p:txBody>
       </p:sp>
@@ -4563,7 +4563,7 @@
           <p:cNvPr id="29" name="矩形 28">
             <a:extLst>
               <a:ext uri="{FF2B5EF4-FFF2-40B4-BE49-F238E27FC236}">
-                <a16:creationId xmlns:a16="http://schemas.microsoft.com/office/drawing/2014/main" id="{22B28248-3DC5-4CB6-9CA0-ABDA643B88D3}"/>
+                <a16:creationId xmlns:a16="http://schemas.microsoft.com/office/drawing/2014/main" id="{D2A319F5-D857-4334-B0DB-90583DE68CF9}"/>
               </a:ext>
             </a:extLst>
           </p:cNvPr>
@@ -4591,45 +4591,23 @@
           </a:ln>
         </p:spPr>
       </p:sp>
-      <p:pic>
-        <p:nvPicPr>
-          <p:cNvPr id="31" name="图片 61"/>
-          <p:cNvPicPr>
-            <a:picLocks noChangeAspect="1"/>
-          </p:cNvPicPr>
-          <p:nvPr/>
-        </p:nvPicPr>
-        <p:blipFill>
-          <a:blip r:embed="rId3"/>
-          <a:stretch/>
-        </p:blipFill>
-        <p:spPr>
-          <a:xfrm>
-            <a:off x="2814904" y="1666875"/>
-            <a:ext cx="6562193" cy="3876675"/>
-          </a:xfrm>
-          <a:prstGeom prst="rect">
-            <a:avLst/>
-          </a:prstGeom>
-        </p:spPr>
-      </p:pic>
-      <p:sp>
-        <p:nvSpPr>
-          <p:cNvPr id="32" name="矩形 31">
-            <a:extLst>
-              <a:ext uri="{FF2B5EF4-FFF2-40B4-BE49-F238E27FC236}">
-                <a16:creationId xmlns:a16="http://schemas.microsoft.com/office/drawing/2014/main" id="{73E8607B-9AEE-408B-8F5F-1C8ECC8E72A7}"/>
-              </a:ext>
-            </a:extLst>
-          </p:cNvPr>
-          <p:cNvSpPr>
-            <a:spLocks noGrp="1"/>
-          </p:cNvSpPr>
-          <p:nvPr/>
-        </p:nvSpPr>
-        <p:spPr>
-          <a:xfrm>
-            <a:off x="1123950" y="5715000"/>
+      <p:sp>
+        <p:nvSpPr>
+          <p:cNvPr id="31" name="矩形 31">
+            <a:extLst>
+              <a:ext uri="{FF2B5EF4-FFF2-40B4-BE49-F238E27FC236}">
+                <a16:creationId xmlns:a16="http://schemas.microsoft.com/office/drawing/2014/main" id="{9C758A0C-10DE-4D31-A85C-FF5A91A9E24D}"/>
+              </a:ext>
+            </a:extLst>
+          </p:cNvPr>
+          <p:cNvSpPr>
+            <a:spLocks noGrp="1"/>
+          </p:cNvSpPr>
+          <p:nvPr/>
+        </p:nvSpPr>
+        <p:spPr>
+          <a:xfrm>
+            <a:off x="-1172070" y="6042745"/>
             <a:ext cx="9944100" cy="323850"/>
           </a:xfrm>
           <a:prstGeom prst="rect">
@@ -4658,7 +4636,7 @@
               </a:defRPr>
             </a:pPr>
             <a:r>
-              <a:rPr sz="1275" b="1">
+              <a:rPr sz="1275" b="1" dirty="0" err="1">
                 <a:solidFill>
                   <a:srgbClr val="F4F7FF"/>
                 </a:solidFill>
@@ -4666,8 +4644,274 @@
                 <a:ea typeface="Microsoft YaHei"/>
                 <a:cs typeface="Microsoft YaHei"/>
               </a:rPr>
-              <a:t>forward_a=01，forward_b=10，ALU 输入为 5 和 7，结果为 12；相关指令无需等待写回</a:t>
-            </a:r>
+              <a:t>load_use、hold_frontend、bubble_id_ex</a:t>
+            </a:r>
+            <a:r>
+              <a:rPr sz="1275" b="1" dirty="0">
+                <a:solidFill>
+                  <a:srgbClr val="F4F7FF"/>
+                </a:solidFill>
+                <a:latin typeface="Microsoft YaHei"/>
+                <a:ea typeface="Microsoft YaHei"/>
+                <a:cs typeface="Microsoft YaHei"/>
+              </a:rPr>
+              <a:t> </a:t>
+            </a:r>
+            <a:r>
+              <a:rPr sz="1275" b="1" dirty="0" err="1">
+                <a:solidFill>
+                  <a:srgbClr val="F4F7FF"/>
+                </a:solidFill>
+                <a:latin typeface="Microsoft YaHei"/>
+                <a:ea typeface="Microsoft YaHei"/>
+                <a:cs typeface="Microsoft YaHei"/>
+              </a:rPr>
+              <a:t>同时有效；停顿计数增加</a:t>
+            </a:r>
+            <a:r>
+              <a:rPr sz="1275" b="1" dirty="0">
+                <a:solidFill>
+                  <a:srgbClr val="F4F7FF"/>
+                </a:solidFill>
+                <a:latin typeface="Microsoft YaHei"/>
+                <a:ea typeface="Microsoft YaHei"/>
+                <a:cs typeface="Microsoft YaHei"/>
+              </a:rPr>
+              <a:t> 1，恢复后 x6=43</a:t>
+            </a:r>
+          </a:p>
+        </p:txBody>
+      </p:sp>
+      <p:pic>
+        <p:nvPicPr>
+          <p:cNvPr id="32" name="图片 31">
+            <a:extLst>
+              <a:ext uri="{FF2B5EF4-FFF2-40B4-BE49-F238E27FC236}">
+                <a16:creationId xmlns:a16="http://schemas.microsoft.com/office/drawing/2014/main" id="{6135C26E-0952-E985-D78F-453E373C71EC}"/>
+              </a:ext>
+            </a:extLst>
+          </p:cNvPr>
+          <p:cNvPicPr>
+            <a:picLocks noChangeAspect="1"/>
+          </p:cNvPicPr>
+          <p:nvPr/>
+        </p:nvPicPr>
+        <p:blipFill>
+          <a:blip r:embed="rId3">
+            <a:extLst>
+              <a:ext uri="{28A0092B-C50C-407E-A947-70E740481C1C}">
+                <a14:useLocalDpi xmlns:a14="http://schemas.microsoft.com/office/drawing/2010/main" val="0"/>
+              </a:ext>
+            </a:extLst>
+          </a:blip>
+          <a:stretch>
+            <a:fillRect/>
+          </a:stretch>
+        </p:blipFill>
+        <p:spPr>
+          <a:xfrm>
+            <a:off x="530352" y="1389888"/>
+            <a:ext cx="8241678" cy="4683546"/>
+          </a:xfrm>
+          <a:prstGeom prst="rect">
+            <a:avLst/>
+          </a:prstGeom>
+        </p:spPr>
+      </p:pic>
+      <p:sp>
+        <p:nvSpPr>
+          <p:cNvPr id="34" name="矩形 33">
+            <a:extLst>
+              <a:ext uri="{FF2B5EF4-FFF2-40B4-BE49-F238E27FC236}">
+                <a16:creationId xmlns:a16="http://schemas.microsoft.com/office/drawing/2014/main" id="{5545A370-7E78-757B-4235-4F5B569DBD2B}"/>
+              </a:ext>
+            </a:extLst>
+          </p:cNvPr>
+          <p:cNvSpPr>
+            <a:spLocks noGrp="1"/>
+          </p:cNvSpPr>
+          <p:nvPr/>
+        </p:nvSpPr>
+        <p:spPr>
+          <a:xfrm>
+            <a:off x="8845183" y="1389887"/>
+            <a:ext cx="3032874" cy="4632495"/>
+          </a:xfrm>
+          <a:prstGeom prst="rect">
+            <a:avLst/>
+          </a:prstGeom>
+          <a:noFill/>
+          <a:ln w="0">
+            <a:noFill/>
+            <a:prstDash val="solid"/>
+          </a:ln>
+        </p:spPr>
+        <p:txBody>
+          <a:bodyPr>
+            <a:normAutofit/>
+          </a:bodyPr>
+          <a:lstStyle/>
+          <a:p>
+            <a:pPr algn="ctr">
+              <a:defRPr sz="1275" b="1">
+                <a:solidFill>
+                  <a:srgbClr val="F4F7FF"/>
+                </a:solidFill>
+                <a:latin typeface="Microsoft YaHei"/>
+                <a:ea typeface="Microsoft YaHei"/>
+                <a:cs typeface="Microsoft YaHei"/>
+              </a:defRPr>
+            </a:pPr>
+            <a:endParaRPr lang="en-US" sz="1400" b="1" dirty="0">
+              <a:solidFill>
+                <a:srgbClr val="F4F7FF"/>
+              </a:solidFill>
+              <a:latin typeface="Microsoft YaHei"/>
+              <a:ea typeface="Microsoft YaHei"/>
+              <a:cs typeface="Microsoft YaHei"/>
+            </a:endParaRPr>
+          </a:p>
+          <a:p>
+            <a:pPr lvl="1"/>
+            <a:endParaRPr lang="en-US" altLang="zh-CN" sz="1400" b="1" dirty="0">
+              <a:solidFill>
+                <a:srgbClr val="F4F7FF"/>
+              </a:solidFill>
+              <a:latin typeface="Microsoft YaHei"/>
+              <a:ea typeface="Microsoft YaHei"/>
+            </a:endParaRPr>
+          </a:p>
+          <a:p>
+            <a:pPr lvl="1"/>
+            <a:endParaRPr lang="en-US" altLang="zh-CN" sz="1400" b="1" dirty="0">
+              <a:solidFill>
+                <a:srgbClr val="F4F7FF"/>
+              </a:solidFill>
+              <a:latin typeface="Microsoft YaHei"/>
+              <a:ea typeface="Microsoft YaHei"/>
+            </a:endParaRPr>
+          </a:p>
+          <a:p>
+            <a:pPr lvl="1"/>
+            <a:endParaRPr lang="en-US" altLang="zh-CN" sz="1400" b="1" dirty="0">
+              <a:solidFill>
+                <a:srgbClr val="F4F7FF"/>
+              </a:solidFill>
+              <a:latin typeface="Microsoft YaHei"/>
+              <a:ea typeface="Microsoft YaHei"/>
+            </a:endParaRPr>
+          </a:p>
+          <a:p>
+            <a:pPr lvl="1"/>
+            <a:r>
+              <a:rPr lang="en-US" altLang="zh-CN" sz="1400" b="1" dirty="0" err="1">
+                <a:solidFill>
+                  <a:srgbClr val="F4F7FF"/>
+                </a:solidFill>
+                <a:ea typeface="Microsoft YaHei"/>
+              </a:rPr>
+              <a:t>addi</a:t>
+            </a:r>
+            <a:r>
+              <a:rPr lang="en-US" altLang="zh-CN" sz="1400" b="1" dirty="0">
+                <a:solidFill>
+                  <a:srgbClr val="F4F7FF"/>
+                </a:solidFill>
+                <a:ea typeface="Microsoft YaHei"/>
+              </a:rPr>
+              <a:t> x4, x0, 42     </a:t>
+            </a:r>
+          </a:p>
+          <a:p>
+            <a:pPr lvl="1"/>
+            <a:r>
+              <a:rPr lang="en-US" altLang="zh-CN" sz="1400" b="1" dirty="0" err="1">
+                <a:solidFill>
+                  <a:srgbClr val="F4F7FF"/>
+                </a:solidFill>
+                <a:ea typeface="Microsoft YaHei"/>
+              </a:rPr>
+              <a:t>sw</a:t>
+            </a:r>
+            <a:r>
+              <a:rPr lang="en-US" altLang="zh-CN" sz="1400" b="1" dirty="0">
+                <a:solidFill>
+                  <a:srgbClr val="F4F7FF"/>
+                </a:solidFill>
+                <a:ea typeface="Microsoft YaHei"/>
+              </a:rPr>
+              <a:t>    x4, 0(x10) </a:t>
+            </a:r>
+          </a:p>
+          <a:p>
+            <a:pPr lvl="1"/>
+            <a:r>
+              <a:rPr lang="en-US" altLang="zh-CN" sz="1400" b="1" dirty="0" err="1">
+                <a:solidFill>
+                  <a:srgbClr val="F4F7FF"/>
+                </a:solidFill>
+                <a:ea typeface="Microsoft YaHei"/>
+              </a:rPr>
+              <a:t>lw</a:t>
+            </a:r>
+            <a:r>
+              <a:rPr lang="en-US" altLang="zh-CN" sz="1400" b="1" dirty="0">
+                <a:solidFill>
+                  <a:srgbClr val="F4F7FF"/>
+                </a:solidFill>
+                <a:ea typeface="Microsoft YaHei"/>
+              </a:rPr>
+              <a:t>     x5, 0(x10) </a:t>
+            </a:r>
+          </a:p>
+          <a:p>
+            <a:pPr lvl="1"/>
+            <a:r>
+              <a:rPr lang="en-US" altLang="zh-CN" sz="1400" b="1" dirty="0" err="1">
+                <a:solidFill>
+                  <a:srgbClr val="F4F7FF"/>
+                </a:solidFill>
+                <a:ea typeface="Microsoft YaHei"/>
+              </a:rPr>
+              <a:t>addi</a:t>
+            </a:r>
+            <a:r>
+              <a:rPr lang="en-US" altLang="zh-CN" sz="1400" b="1" dirty="0">
+                <a:solidFill>
+                  <a:srgbClr val="F4F7FF"/>
+                </a:solidFill>
+                <a:ea typeface="Microsoft YaHei"/>
+              </a:rPr>
+              <a:t> x6, x5, 1</a:t>
+            </a:r>
+            <a:endParaRPr lang="en-US" sz="1400" b="1" dirty="0">
+              <a:solidFill>
+                <a:srgbClr val="F4F7FF"/>
+              </a:solidFill>
+              <a:latin typeface="Microsoft YaHei"/>
+              <a:ea typeface="Microsoft YaHei"/>
+              <a:cs typeface="Microsoft YaHei"/>
+            </a:endParaRPr>
+          </a:p>
+          <a:p>
+            <a:pPr algn="ctr">
+              <a:defRPr sz="1275" b="1">
+                <a:solidFill>
+                  <a:srgbClr val="F4F7FF"/>
+                </a:solidFill>
+                <a:latin typeface="Microsoft YaHei"/>
+                <a:ea typeface="Microsoft YaHei"/>
+                <a:cs typeface="Microsoft YaHei"/>
+              </a:defRPr>
+            </a:pPr>
+            <a:endParaRPr lang="en-US" sz="1400" b="1" dirty="0">
+              <a:solidFill>
+                <a:srgbClr val="F4F7FF"/>
+              </a:solidFill>
+              <a:latin typeface="Microsoft YaHei"/>
+              <a:ea typeface="Microsoft YaHei"/>
+              <a:cs typeface="Microsoft YaHei"/>
+            </a:endParaRPr>
           </a:p>
         </p:txBody>
       </p:sp>
@@ -4714,7 +4958,7 @@
           <p:cNvPr id="2" name="Text 0">
             <a:extLst>
               <a:ext uri="{FF2B5EF4-FFF2-40B4-BE49-F238E27FC236}">
-                <a16:creationId xmlns:a16="http://schemas.microsoft.com/office/drawing/2014/main" id="{C7F3C7D6-B64A-473B-8BDA-180C12B2A208}"/>
+                <a16:creationId xmlns:a16="http://schemas.microsoft.com/office/drawing/2014/main" id="{FFAEC3B8-BD3E-4655-926F-46FF73DA6628}"/>
               </a:ext>
             </a:extLst>
           </p:cNvPr>
@@ -4751,7 +4995,7 @@
                 <a:ea typeface="Microsoft YaHei"/>
                 <a:cs typeface="Microsoft YaHei"/>
               </a:rPr>
-              <a:t>定向仿真</a:t>
+              <a:t>分支与跳转</a:t>
             </a:r>
             <a:endParaRPr sz="850"/>
           </a:p>
@@ -4762,7 +5006,7 @@
           <p:cNvPr id="3" name="Text 1">
             <a:extLst>
               <a:ext uri="{FF2B5EF4-FFF2-40B4-BE49-F238E27FC236}">
-                <a16:creationId xmlns:a16="http://schemas.microsoft.com/office/drawing/2014/main" id="{E63C0FCF-7925-45EB-A8F7-F4C4FC448EF0}"/>
+                <a16:creationId xmlns:a16="http://schemas.microsoft.com/office/drawing/2014/main" id="{75042E01-CC49-42F1-A892-39CC9B6B5B7D}"/>
               </a:ext>
             </a:extLst>
           </p:cNvPr>
@@ -4799,7 +5043,7 @@
                 <a:ea typeface="Microsoft YaHei"/>
                 <a:cs typeface="Microsoft YaHei"/>
               </a:rPr>
-              <a:t>load-use 停顿仿真</a:t>
+              <a:t>控制相关解决方案</a:t>
             </a:r>
             <a:endParaRPr sz="2400"/>
           </a:p>
@@ -4810,7 +5054,7 @@
           <p:cNvPr id="4" name="Text 2">
             <a:extLst>
               <a:ext uri="{FF2B5EF4-FFF2-40B4-BE49-F238E27FC236}">
-                <a16:creationId xmlns:a16="http://schemas.microsoft.com/office/drawing/2014/main" id="{D7D3FA3F-F9AE-4568-8F4D-1E5E777B740A}"/>
+                <a16:creationId xmlns:a16="http://schemas.microsoft.com/office/drawing/2014/main" id="{715958F3-3CD7-439E-8914-8A4EB22ED94D}"/>
               </a:ext>
             </a:extLst>
           </p:cNvPr>
@@ -4847,7 +5091,7 @@
                 <a:ea typeface="Microsoft YaHei"/>
                 <a:cs typeface="Microsoft YaHei"/>
               </a:rPr>
-              <a:t>加载结果尚未可用时，保持前端并向 ID/EX 插入一个气泡</a:t>
+              <a:t>EX 级确认方向后，PC 重定向并作废两条年轻错误路径指令</a:t>
             </a:r>
             <a:endParaRPr sz="1150"/>
           </a:p>
@@ -4858,7 +5102,7 @@
           <p:cNvPr id="5" name="Text 3">
             <a:extLst>
               <a:ext uri="{FF2B5EF4-FFF2-40B4-BE49-F238E27FC236}">
-                <a16:creationId xmlns:a16="http://schemas.microsoft.com/office/drawing/2014/main" id="{150759C2-1DA8-464B-A5FB-2A6E87F706DF}"/>
+                <a16:creationId xmlns:a16="http://schemas.microsoft.com/office/drawing/2014/main" id="{8D73DDF9-5B65-4AD8-A36C-AF0C97C9AC87}"/>
               </a:ext>
             </a:extLst>
           </p:cNvPr>
@@ -4885,7 +5129,7 @@
               <a:buNone/>
             </a:pPr>
             <a:r>
-              <a:rPr sz="1000" b="1">
+              <a:rPr lang="en-US" sz="1000" b="1" dirty="0">
                 <a:solidFill>
                   <a:srgbClr val="8392B7"/>
                 </a:solidFill>
@@ -4895,7 +5139,7 @@
               </a:rPr>
               <a:t>11</a:t>
             </a:r>
-            <a:endParaRPr sz="1000"/>
+            <a:endParaRPr sz="1000" dirty="0"/>
           </a:p>
         </p:txBody>
       </p:sp>
@@ -4904,7 +5148,7 @@
           <p:cNvPr id="6" name="Shape 4">
             <a:extLst>
               <a:ext uri="{FF2B5EF4-FFF2-40B4-BE49-F238E27FC236}">
-                <a16:creationId xmlns:a16="http://schemas.microsoft.com/office/drawing/2014/main" id="{345F7127-82E6-4DA2-9752-6B981C7A8701}"/>
+                <a16:creationId xmlns:a16="http://schemas.microsoft.com/office/drawing/2014/main" id="{5488BDE7-D686-42F5-B49A-4A621D48B300}"/>
               </a:ext>
             </a:extLst>
           </p:cNvPr>
@@ -4937,7 +5181,7 @@
           <p:cNvPr id="7" name="Shape 5">
             <a:extLst>
               <a:ext uri="{FF2B5EF4-FFF2-40B4-BE49-F238E27FC236}">
-                <a16:creationId xmlns:a16="http://schemas.microsoft.com/office/drawing/2014/main" id="{129B6E9C-8A40-46B8-AF3D-DA35A1311E80}"/>
+                <a16:creationId xmlns:a16="http://schemas.microsoft.com/office/drawing/2014/main" id="{3BE6A8E9-3863-484D-A274-AD03EB8815DF}"/>
               </a:ext>
             </a:extLst>
           </p:cNvPr>
@@ -4965,28 +5209,127 @@
       </p:sp>
       <p:sp>
         <p:nvSpPr>
-          <p:cNvPr id="8" name="Text 6">
-            <a:extLst>
-              <a:ext uri="{FF2B5EF4-FFF2-40B4-BE49-F238E27FC236}">
-                <a16:creationId xmlns:a16="http://schemas.microsoft.com/office/drawing/2014/main" id="{A2AE9773-8BB2-49A2-9F86-1E224F0CA7AA}"/>
-              </a:ext>
-            </a:extLst>
-          </p:cNvPr>
-          <p:cNvSpPr>
-            <a:spLocks noGrp="1"/>
-          </p:cNvSpPr>
-          <p:nvPr/>
-        </p:nvSpPr>
-        <p:spPr>
-          <a:xfrm>
-            <a:off x="786384" y="1783080"/>
-            <a:ext cx="2011680" cy="640080"/>
+          <p:cNvPr id="8" name="Shape 6">
+            <a:extLst>
+              <a:ext uri="{FF2B5EF4-FFF2-40B4-BE49-F238E27FC236}">
+                <a16:creationId xmlns:a16="http://schemas.microsoft.com/office/drawing/2014/main" id="{2F2B2B9E-3622-41B5-BCC0-61391E74DECC}"/>
+              </a:ext>
+            </a:extLst>
+          </p:cNvPr>
+          <p:cNvSpPr>
+            <a:spLocks noGrp="1"/>
+          </p:cNvSpPr>
+          <p:nvPr/>
+        </p:nvSpPr>
+        <p:spPr>
+          <a:xfrm>
+            <a:off x="2743200" y="2176272"/>
+            <a:ext cx="713232" cy="0"/>
+          </a:xfrm>
+          <a:prstGeom prst="line">
+            <a:avLst/>
+          </a:prstGeom>
+          <a:noFill/>
+          <a:ln w="16510">
+            <a:solidFill>
+              <a:srgbClr val="22D3EE"/>
+            </a:solidFill>
+            <a:prstDash val="solid"/>
+            <a:headEnd type="none"/>
+            <a:tailEnd type="triangle"/>
+          </a:ln>
+        </p:spPr>
+      </p:sp>
+      <p:sp>
+        <p:nvSpPr>
+          <p:cNvPr id="9" name="Shape 7">
+            <a:extLst>
+              <a:ext uri="{FF2B5EF4-FFF2-40B4-BE49-F238E27FC236}">
+                <a16:creationId xmlns:a16="http://schemas.microsoft.com/office/drawing/2014/main" id="{C7C8501A-4AFF-4E57-A2BB-D2B23A78EA68}"/>
+              </a:ext>
+            </a:extLst>
+          </p:cNvPr>
+          <p:cNvSpPr>
+            <a:spLocks noGrp="1"/>
+          </p:cNvSpPr>
+          <p:nvPr/>
+        </p:nvSpPr>
+        <p:spPr>
+          <a:xfrm>
+            <a:off x="5440680" y="2176272"/>
+            <a:ext cx="713232" cy="0"/>
+          </a:xfrm>
+          <a:prstGeom prst="line">
+            <a:avLst/>
+          </a:prstGeom>
+          <a:noFill/>
+          <a:ln w="16510">
+            <a:solidFill>
+              <a:srgbClr val="22D3EE"/>
+            </a:solidFill>
+            <a:prstDash val="solid"/>
+            <a:headEnd type="none"/>
+            <a:tailEnd type="triangle"/>
+          </a:ln>
+        </p:spPr>
+      </p:sp>
+      <p:sp>
+        <p:nvSpPr>
+          <p:cNvPr id="10" name="Shape 8">
+            <a:extLst>
+              <a:ext uri="{FF2B5EF4-FFF2-40B4-BE49-F238E27FC236}">
+                <a16:creationId xmlns:a16="http://schemas.microsoft.com/office/drawing/2014/main" id="{E6DB3879-99F0-4D11-A0F6-87565EAE1D6D}"/>
+              </a:ext>
+            </a:extLst>
+          </p:cNvPr>
+          <p:cNvSpPr>
+            <a:spLocks noGrp="1"/>
+          </p:cNvSpPr>
+          <p:nvPr/>
+        </p:nvSpPr>
+        <p:spPr>
+          <a:xfrm>
+            <a:off x="8138160" y="2176272"/>
+            <a:ext cx="713232" cy="0"/>
+          </a:xfrm>
+          <a:prstGeom prst="line">
+            <a:avLst/>
+          </a:prstGeom>
+          <a:noFill/>
+          <a:ln w="16510">
+            <a:solidFill>
+              <a:srgbClr val="22D3EE"/>
+            </a:solidFill>
+            <a:prstDash val="solid"/>
+            <a:headEnd type="none"/>
+            <a:tailEnd type="triangle"/>
+          </a:ln>
+        </p:spPr>
+      </p:sp>
+      <p:sp>
+        <p:nvSpPr>
+          <p:cNvPr id="11" name="Text 9">
+            <a:extLst>
+              <a:ext uri="{FF2B5EF4-FFF2-40B4-BE49-F238E27FC236}">
+                <a16:creationId xmlns:a16="http://schemas.microsoft.com/office/drawing/2014/main" id="{15B5FC59-E8FB-4D7D-ADA6-B50570B27A68}"/>
+              </a:ext>
+            </a:extLst>
+          </p:cNvPr>
+          <p:cNvSpPr>
+            <a:spLocks noGrp="1"/>
+          </p:cNvSpPr>
+          <p:nvPr/>
+        </p:nvSpPr>
+        <p:spPr>
+          <a:xfrm>
+            <a:off x="868680" y="1847088"/>
+            <a:ext cx="1828800" cy="658368"/>
           </a:xfrm>
           <a:prstGeom prst="rect">
             <a:avLst/>
           </a:prstGeom>
           <a:solidFill>
-            <a:srgbClr val="121A2D"/>
+            <a:srgbClr val="19233B"/>
           </a:solidFill>
           <a:ln w="15240">
             <a:solidFill>
@@ -4995,7 +5338,7 @@
           </a:ln>
         </p:spPr>
         <p:txBody>
-          <a:bodyPr wrap="square" lIns="1016" tIns="1016" rIns="1016" bIns="1016" anchor="ctr">
+          <a:bodyPr wrap="square" lIns="1270" tIns="1270" rIns="1270" bIns="1270" anchor="ctr">
             <a:normAutofit/>
           </a:bodyPr>
           <a:lstStyle/>
@@ -5004,7 +5347,7 @@
               <a:buNone/>
             </a:pPr>
             <a:r>
-              <a:rPr sz="1070" b="1">
+              <a:rPr sz="1020" b="1">
                 <a:solidFill>
                   <a:srgbClr val="F7FAFF"/>
                 </a:solidFill>
@@ -5012,16 +5355,16 @@
                 <a:ea typeface="Microsoft YaHei"/>
                 <a:cs typeface="Microsoft YaHei"/>
               </a:rPr>
-              <a:t>ALU 前递</a:t>
-            </a:r>
-            <a:endParaRPr sz="1070"/>
+              <a:t>BEQ / JAL</a:t>
+            </a:r>
+            <a:endParaRPr sz="1020"/>
           </a:p>
           <a:p>
             <a:pPr marL="0" indent="0" algn="ctr">
               <a:buNone/>
             </a:pPr>
             <a:r>
-              <a:rPr sz="1070" b="1">
+              <a:rPr sz="1020" b="1">
                 <a:solidFill>
                   <a:srgbClr val="F7FAFF"/>
                 </a:solidFill>
@@ -5029,45 +5372,254 @@
                 <a:ea typeface="Microsoft YaHei"/>
                 <a:cs typeface="Microsoft YaHei"/>
               </a:rPr>
-              <a:t>forward_a / forward_b</a:t>
-            </a:r>
-            <a:endParaRPr sz="1070"/>
-          </a:p>
-        </p:txBody>
-      </p:sp>
-      <p:sp>
-        <p:nvSpPr>
-          <p:cNvPr id="9" name="Text 7">
-            <a:extLst>
-              <a:ext uri="{FF2B5EF4-FFF2-40B4-BE49-F238E27FC236}">
-                <a16:creationId xmlns:a16="http://schemas.microsoft.com/office/drawing/2014/main" id="{73FC4BE2-ABE8-4EE0-8EDE-482C67C56F06}"/>
-              </a:ext>
-            </a:extLst>
-          </p:cNvPr>
-          <p:cNvSpPr>
-            <a:spLocks noGrp="1"/>
-          </p:cNvSpPr>
-          <p:nvPr/>
-        </p:nvSpPr>
-        <p:spPr>
-          <a:xfrm>
-            <a:off x="2962656" y="1783080"/>
-            <a:ext cx="3703320" cy="640080"/>
+              <a:t>EX 判定 taken</a:t>
+            </a:r>
+            <a:endParaRPr sz="1020"/>
+          </a:p>
+        </p:txBody>
+      </p:sp>
+      <p:sp>
+        <p:nvSpPr>
+          <p:cNvPr id="12" name="Text 10">
+            <a:extLst>
+              <a:ext uri="{FF2B5EF4-FFF2-40B4-BE49-F238E27FC236}">
+                <a16:creationId xmlns:a16="http://schemas.microsoft.com/office/drawing/2014/main" id="{0A1302F8-245B-436C-B954-7206B97D9202}"/>
+              </a:ext>
+            </a:extLst>
+          </p:cNvPr>
+          <p:cNvSpPr>
+            <a:spLocks noGrp="1"/>
+          </p:cNvSpPr>
+          <p:nvPr/>
+        </p:nvSpPr>
+        <p:spPr>
+          <a:xfrm>
+            <a:off x="3566160" y="1847088"/>
+            <a:ext cx="1828800" cy="658368"/>
           </a:xfrm>
           <a:prstGeom prst="rect">
             <a:avLst/>
           </a:prstGeom>
           <a:solidFill>
-            <a:srgbClr val="10172A"/>
+            <a:srgbClr val="19233B"/>
           </a:solidFill>
-          <a:ln w="12700">
+          <a:ln w="15240">
             <a:solidFill>
-              <a:srgbClr val="2C3D61"/>
+              <a:srgbClr val="3B82F6"/>
             </a:solidFill>
           </a:ln>
         </p:spPr>
         <p:txBody>
-          <a:bodyPr wrap="square" lIns="1143" tIns="1143" rIns="1143" bIns="1143" anchor="ctr">
+          <a:bodyPr wrap="square" lIns="1270" tIns="1270" rIns="1270" bIns="1270" anchor="ctr">
+            <a:normAutofit/>
+          </a:bodyPr>
+          <a:lstStyle/>
+          <a:p>
+            <a:pPr marL="0" indent="0" algn="ctr">
+              <a:buNone/>
+            </a:pPr>
+            <a:r>
+              <a:rPr sz="1020" b="1">
+                <a:solidFill>
+                  <a:srgbClr val="F7FAFF"/>
+                </a:solidFill>
+                <a:latin typeface="Microsoft YaHei"/>
+                <a:ea typeface="Microsoft YaHei"/>
+                <a:cs typeface="Microsoft YaHei"/>
+              </a:rPr>
+              <a:t>redirect</a:t>
+            </a:r>
+            <a:endParaRPr sz="1020"/>
+          </a:p>
+          <a:p>
+            <a:pPr marL="0" indent="0" algn="ctr">
+              <a:buNone/>
+            </a:pPr>
+            <a:r>
+              <a:rPr sz="1020" b="1">
+                <a:solidFill>
+                  <a:srgbClr val="F7FAFF"/>
+                </a:solidFill>
+                <a:latin typeface="Microsoft YaHei"/>
+                <a:ea typeface="Microsoft YaHei"/>
+                <a:cs typeface="Microsoft YaHei"/>
+              </a:rPr>
+              <a:t>计算真实目标 PC</a:t>
+            </a:r>
+            <a:endParaRPr sz="1020"/>
+          </a:p>
+        </p:txBody>
+      </p:sp>
+      <p:sp>
+        <p:nvSpPr>
+          <p:cNvPr id="13" name="Text 11">
+            <a:extLst>
+              <a:ext uri="{FF2B5EF4-FFF2-40B4-BE49-F238E27FC236}">
+                <a16:creationId xmlns:a16="http://schemas.microsoft.com/office/drawing/2014/main" id="{0B3358AB-44F7-4966-87EB-36957E66A8EF}"/>
+              </a:ext>
+            </a:extLst>
+          </p:cNvPr>
+          <p:cNvSpPr>
+            <a:spLocks noGrp="1"/>
+          </p:cNvSpPr>
+          <p:nvPr/>
+        </p:nvSpPr>
+        <p:spPr>
+          <a:xfrm>
+            <a:off x="6263640" y="1847088"/>
+            <a:ext cx="1828800" cy="658368"/>
+          </a:xfrm>
+          <a:prstGeom prst="rect">
+            <a:avLst/>
+          </a:prstGeom>
+          <a:solidFill>
+            <a:srgbClr val="19233B"/>
+          </a:solidFill>
+          <a:ln w="15240">
+            <a:solidFill>
+              <a:srgbClr val="F87171"/>
+            </a:solidFill>
+          </a:ln>
+        </p:spPr>
+        <p:txBody>
+          <a:bodyPr wrap="square" lIns="1270" tIns="1270" rIns="1270" bIns="1270" anchor="ctr">
+            <a:normAutofit/>
+          </a:bodyPr>
+          <a:lstStyle/>
+          <a:p>
+            <a:pPr marL="0" indent="0" algn="ctr">
+              <a:buNone/>
+            </a:pPr>
+            <a:r>
+              <a:rPr sz="1020" b="1">
+                <a:solidFill>
+                  <a:srgbClr val="F7FAFF"/>
+                </a:solidFill>
+                <a:latin typeface="Microsoft YaHei"/>
+                <a:ea typeface="Microsoft YaHei"/>
+                <a:cs typeface="Microsoft YaHei"/>
+              </a:rPr>
+              <a:t>flush</a:t>
+            </a:r>
+            <a:endParaRPr sz="1020"/>
+          </a:p>
+          <a:p>
+            <a:pPr marL="0" indent="0" algn="ctr">
+              <a:buNone/>
+            </a:pPr>
+            <a:r>
+              <a:rPr sz="1020" b="1">
+                <a:solidFill>
+                  <a:srgbClr val="F7FAFF"/>
+                </a:solidFill>
+                <a:latin typeface="Microsoft YaHei"/>
+                <a:ea typeface="Microsoft YaHei"/>
+                <a:cs typeface="Microsoft YaHei"/>
+              </a:rPr>
+              <a:t>IF/ID 与 ID/EX 清 valid</a:t>
+            </a:r>
+            <a:endParaRPr sz="1020"/>
+          </a:p>
+        </p:txBody>
+      </p:sp>
+      <p:sp>
+        <p:nvSpPr>
+          <p:cNvPr id="14" name="Text 12">
+            <a:extLst>
+              <a:ext uri="{FF2B5EF4-FFF2-40B4-BE49-F238E27FC236}">
+                <a16:creationId xmlns:a16="http://schemas.microsoft.com/office/drawing/2014/main" id="{B2EC0468-6FC9-4901-96FC-0287A3E93F73}"/>
+              </a:ext>
+            </a:extLst>
+          </p:cNvPr>
+          <p:cNvSpPr>
+            <a:spLocks noGrp="1"/>
+          </p:cNvSpPr>
+          <p:nvPr/>
+        </p:nvSpPr>
+        <p:spPr>
+          <a:xfrm>
+            <a:off x="8961120" y="1847088"/>
+            <a:ext cx="1828800" cy="658368"/>
+          </a:xfrm>
+          <a:prstGeom prst="rect">
+            <a:avLst/>
+          </a:prstGeom>
+          <a:solidFill>
+            <a:srgbClr val="19233B"/>
+          </a:solidFill>
+          <a:ln w="15240">
+            <a:solidFill>
+              <a:srgbClr val="22D3EE"/>
+            </a:solidFill>
+          </a:ln>
+        </p:spPr>
+        <p:txBody>
+          <a:bodyPr wrap="square" lIns="1270" tIns="1270" rIns="1270" bIns="1270" anchor="ctr">
+            <a:normAutofit/>
+          </a:bodyPr>
+          <a:lstStyle/>
+          <a:p>
+            <a:pPr marL="0" indent="0" algn="ctr">
+              <a:buNone/>
+            </a:pPr>
+            <a:r>
+              <a:rPr sz="1020" b="1">
+                <a:solidFill>
+                  <a:srgbClr val="F7FAFF"/>
+                </a:solidFill>
+                <a:latin typeface="Microsoft YaHei"/>
+                <a:ea typeface="Microsoft YaHei"/>
+                <a:cs typeface="Microsoft YaHei"/>
+              </a:rPr>
+              <a:t>目标取指</a:t>
+            </a:r>
+            <a:endParaRPr sz="1020"/>
+          </a:p>
+          <a:p>
+            <a:pPr marL="0" indent="0" algn="ctr">
+              <a:buNone/>
+            </a:pPr>
+            <a:r>
+              <a:rPr sz="1020" b="1">
+                <a:solidFill>
+                  <a:srgbClr val="F7FAFF"/>
+                </a:solidFill>
+                <a:latin typeface="Microsoft YaHei"/>
+                <a:ea typeface="Microsoft YaHei"/>
+                <a:cs typeface="Microsoft YaHei"/>
+              </a:rPr>
+              <a:t>下一周期重新填充</a:t>
+            </a:r>
+            <a:endParaRPr sz="1020"/>
+          </a:p>
+        </p:txBody>
+      </p:sp>
+      <p:sp>
+        <p:nvSpPr>
+          <p:cNvPr id="15" name="Text 13">
+            <a:extLst>
+              <a:ext uri="{FF2B5EF4-FFF2-40B4-BE49-F238E27FC236}">
+                <a16:creationId xmlns:a16="http://schemas.microsoft.com/office/drawing/2014/main" id="{0A68C36D-400D-43EE-A7CA-A55AD4F252B8}"/>
+              </a:ext>
+            </a:extLst>
+          </p:cNvPr>
+          <p:cNvSpPr>
+            <a:spLocks noGrp="1"/>
+          </p:cNvSpPr>
+          <p:nvPr/>
+        </p:nvSpPr>
+        <p:spPr>
+          <a:xfrm>
+            <a:off x="841248" y="3218688"/>
+            <a:ext cx="1645920" cy="210312"/>
+          </a:xfrm>
+          <a:prstGeom prst="rect">
+            <a:avLst/>
+          </a:prstGeom>
+          <a:noFill/>
+        </p:spPr>
+        <p:txBody>
+          <a:bodyPr wrap="square" lIns="0" tIns="0" rIns="0" bIns="0" anchor="t">
             <a:normAutofit/>
           </a:bodyPr>
           <a:lstStyle/>
@@ -5076,7 +5628,55 @@
               <a:buNone/>
             </a:pPr>
             <a:r>
-              <a:rPr sz="1080">
+              <a:rPr sz="950" b="1">
+                <a:solidFill>
+                  <a:srgbClr val="22D3EE"/>
+                </a:solidFill>
+                <a:latin typeface="Microsoft YaHei"/>
+                <a:ea typeface="Microsoft YaHei"/>
+                <a:cs typeface="Microsoft YaHei"/>
+              </a:rPr>
+              <a:t>分支冲刷时序示意</a:t>
+            </a:r>
+            <a:endParaRPr sz="950"/>
+          </a:p>
+        </p:txBody>
+      </p:sp>
+      <p:sp>
+        <p:nvSpPr>
+          <p:cNvPr id="16" name="Text 14">
+            <a:extLst>
+              <a:ext uri="{FF2B5EF4-FFF2-40B4-BE49-F238E27FC236}">
+                <a16:creationId xmlns:a16="http://schemas.microsoft.com/office/drawing/2014/main" id="{A09A2EA1-B6B4-4002-BED5-161B4F97374E}"/>
+              </a:ext>
+            </a:extLst>
+          </p:cNvPr>
+          <p:cNvSpPr>
+            <a:spLocks noGrp="1"/>
+          </p:cNvSpPr>
+          <p:nvPr/>
+        </p:nvSpPr>
+        <p:spPr>
+          <a:xfrm>
+            <a:off x="822960" y="3611880"/>
+            <a:ext cx="1051560" cy="182880"/>
+          </a:xfrm>
+          <a:prstGeom prst="rect">
+            <a:avLst/>
+          </a:prstGeom>
+          <a:noFill/>
+        </p:spPr>
+        <p:txBody>
+          <a:bodyPr wrap="square" lIns="0" tIns="0" rIns="0" bIns="0" anchor="t">
+            <a:normAutofit/>
+          </a:bodyPr>
+          <a:lstStyle/>
+          <a:p>
+            <a:pPr marL="0" indent="0" algn="l">
+              <a:buNone/>
+            </a:pPr>
+            <a:r>
+              <a:rPr sz="900">
                 <a:solidFill>
                   <a:srgbClr val="B9C8E6"/>
                 </a:solidFill>
@@ -5084,29 +5684,29 @@
                 <a:ea typeface="Microsoft YaHei"/>
                 <a:cs typeface="Microsoft YaHei"/>
               </a:rPr>
-              <a:t>  EX/MEM 命中时直接送入 ALU，后继指令无需等待写回</a:t>
-            </a:r>
-            <a:endParaRPr sz="1080"/>
-          </a:p>
-        </p:txBody>
-      </p:sp>
-      <p:sp>
-        <p:nvSpPr>
-          <p:cNvPr id="10" name="Text 8">
-            <a:extLst>
-              <a:ext uri="{FF2B5EF4-FFF2-40B4-BE49-F238E27FC236}">
-                <a16:creationId xmlns:a16="http://schemas.microsoft.com/office/drawing/2014/main" id="{3304DBFD-CC5C-4CEA-8034-149795372FA3}"/>
-              </a:ext>
-            </a:extLst>
-          </p:cNvPr>
-          <p:cNvSpPr>
-            <a:spLocks noGrp="1"/>
-          </p:cNvSpPr>
-          <p:nvPr/>
-        </p:nvSpPr>
-        <p:spPr>
-          <a:xfrm>
-            <a:off x="6995160" y="1984248"/>
+              <a:t>BEQ(taken)</a:t>
+            </a:r>
+            <a:endParaRPr sz="900"/>
+          </a:p>
+        </p:txBody>
+      </p:sp>
+      <p:sp>
+        <p:nvSpPr>
+          <p:cNvPr id="17" name="Text 15">
+            <a:extLst>
+              <a:ext uri="{FF2B5EF4-FFF2-40B4-BE49-F238E27FC236}">
+                <a16:creationId xmlns:a16="http://schemas.microsoft.com/office/drawing/2014/main" id="{E3C77CC2-0CC2-42A8-A9A9-6F01EF69686C}"/>
+              </a:ext>
+            </a:extLst>
+          </p:cNvPr>
+          <p:cNvSpPr>
+            <a:spLocks noGrp="1"/>
+          </p:cNvSpPr>
+          <p:nvPr/>
+        </p:nvSpPr>
+        <p:spPr>
+          <a:xfrm>
+            <a:off x="1920240" y="3566160"/>
             <a:ext cx="640080" cy="237744"/>
           </a:xfrm>
           <a:prstGeom prst="rect">
@@ -5139,7 +5739,7 @@
                 <a:ea typeface="Microsoft YaHei"/>
                 <a:cs typeface="Microsoft YaHei"/>
               </a:rPr>
-              <a:t>REG</a:t>
+              <a:t>IF</a:t>
             </a:r>
             <a:endParaRPr sz="900"/>
           </a:p>
@@ -5147,21 +5747,289 @@
       </p:sp>
       <p:sp>
         <p:nvSpPr>
-          <p:cNvPr id="11" name="Text 9">
-            <a:extLst>
-              <a:ext uri="{FF2B5EF4-FFF2-40B4-BE49-F238E27FC236}">
-                <a16:creationId xmlns:a16="http://schemas.microsoft.com/office/drawing/2014/main" id="{3DA9D26B-42FB-4A96-BC57-FC528FD89A2D}"/>
-              </a:ext>
-            </a:extLst>
-          </p:cNvPr>
-          <p:cNvSpPr>
-            <a:spLocks noGrp="1"/>
-          </p:cNvSpPr>
-          <p:nvPr/>
-        </p:nvSpPr>
-        <p:spPr>
-          <a:xfrm>
-            <a:off x="8001000" y="1984248"/>
+          <p:cNvPr id="18" name="Text 16">
+            <a:extLst>
+              <a:ext uri="{FF2B5EF4-FFF2-40B4-BE49-F238E27FC236}">
+                <a16:creationId xmlns:a16="http://schemas.microsoft.com/office/drawing/2014/main" id="{3CC47474-B16D-40C3-B46D-797097001621}"/>
+              </a:ext>
+            </a:extLst>
+          </p:cNvPr>
+          <p:cNvSpPr>
+            <a:spLocks noGrp="1"/>
+          </p:cNvSpPr>
+          <p:nvPr/>
+        </p:nvSpPr>
+        <p:spPr>
+          <a:xfrm>
+            <a:off x="3154680" y="3566160"/>
+            <a:ext cx="640080" cy="237744"/>
+          </a:xfrm>
+          <a:prstGeom prst="rect">
+            <a:avLst/>
+          </a:prstGeom>
+          <a:solidFill>
+            <a:srgbClr val="34D399"/>
+          </a:solidFill>
+          <a:ln>
+            <a:solidFill>
+              <a:srgbClr val="34D399"/>
+            </a:solidFill>
+          </a:ln>
+        </p:spPr>
+        <p:txBody>
+          <a:bodyPr wrap="square" lIns="0" tIns="0" rIns="0" bIns="0" anchor="ctr">
+            <a:normAutofit/>
+          </a:bodyPr>
+          <a:lstStyle/>
+          <a:p>
+            <a:pPr marL="0" indent="0" algn="ctr">
+              <a:buNone/>
+            </a:pPr>
+            <a:r>
+              <a:rPr sz="900" b="1">
+                <a:solidFill>
+                  <a:srgbClr val="0B1020"/>
+                </a:solidFill>
+                <a:latin typeface="Microsoft YaHei"/>
+                <a:ea typeface="Microsoft YaHei"/>
+                <a:cs typeface="Microsoft YaHei"/>
+              </a:rPr>
+              <a:t>ID</a:t>
+            </a:r>
+            <a:endParaRPr sz="900"/>
+          </a:p>
+        </p:txBody>
+      </p:sp>
+      <p:sp>
+        <p:nvSpPr>
+          <p:cNvPr id="19" name="Text 17">
+            <a:extLst>
+              <a:ext uri="{FF2B5EF4-FFF2-40B4-BE49-F238E27FC236}">
+                <a16:creationId xmlns:a16="http://schemas.microsoft.com/office/drawing/2014/main" id="{9713BA38-DE5A-432F-B4DB-CE027E925CE8}"/>
+              </a:ext>
+            </a:extLst>
+          </p:cNvPr>
+          <p:cNvSpPr>
+            <a:spLocks noGrp="1"/>
+          </p:cNvSpPr>
+          <p:nvPr/>
+        </p:nvSpPr>
+        <p:spPr>
+          <a:xfrm>
+            <a:off x="4389120" y="3566160"/>
+            <a:ext cx="640080" cy="237744"/>
+          </a:xfrm>
+          <a:prstGeom prst="rect">
+            <a:avLst/>
+          </a:prstGeom>
+          <a:solidFill>
+            <a:srgbClr val="F59E0B"/>
+          </a:solidFill>
+          <a:ln>
+            <a:solidFill>
+              <a:srgbClr val="F59E0B"/>
+            </a:solidFill>
+          </a:ln>
+        </p:spPr>
+        <p:txBody>
+          <a:bodyPr wrap="square" lIns="0" tIns="0" rIns="0" bIns="0" anchor="ctr">
+            <a:normAutofit/>
+          </a:bodyPr>
+          <a:lstStyle/>
+          <a:p>
+            <a:pPr marL="0" indent="0" algn="ctr">
+              <a:buNone/>
+            </a:pPr>
+            <a:r>
+              <a:rPr sz="900" b="1">
+                <a:solidFill>
+                  <a:srgbClr val="0B1020"/>
+                </a:solidFill>
+                <a:latin typeface="Microsoft YaHei"/>
+                <a:ea typeface="Microsoft YaHei"/>
+                <a:cs typeface="Microsoft YaHei"/>
+              </a:rPr>
+              <a:t>EX</a:t>
+            </a:r>
+            <a:endParaRPr sz="900"/>
+          </a:p>
+        </p:txBody>
+      </p:sp>
+      <p:sp>
+        <p:nvSpPr>
+          <p:cNvPr id="20" name="Text 18">
+            <a:extLst>
+              <a:ext uri="{FF2B5EF4-FFF2-40B4-BE49-F238E27FC236}">
+                <a16:creationId xmlns:a16="http://schemas.microsoft.com/office/drawing/2014/main" id="{867A8C8B-9CB5-43DE-9798-2A6C94609AEC}"/>
+              </a:ext>
+            </a:extLst>
+          </p:cNvPr>
+          <p:cNvSpPr>
+            <a:spLocks noGrp="1"/>
+          </p:cNvSpPr>
+          <p:nvPr/>
+        </p:nvSpPr>
+        <p:spPr>
+          <a:xfrm>
+            <a:off x="5623560" y="3566160"/>
+            <a:ext cx="640080" cy="237744"/>
+          </a:xfrm>
+          <a:prstGeom prst="rect">
+            <a:avLst/>
+          </a:prstGeom>
+          <a:solidFill>
+            <a:srgbClr val="A78BFA"/>
+          </a:solidFill>
+          <a:ln>
+            <a:solidFill>
+              <a:srgbClr val="A78BFA"/>
+            </a:solidFill>
+          </a:ln>
+        </p:spPr>
+        <p:txBody>
+          <a:bodyPr wrap="square" lIns="0" tIns="0" rIns="0" bIns="0" anchor="ctr">
+            <a:normAutofit/>
+          </a:bodyPr>
+          <a:lstStyle/>
+          <a:p>
+            <a:pPr marL="0" indent="0" algn="ctr">
+              <a:buNone/>
+            </a:pPr>
+            <a:r>
+              <a:rPr sz="900" b="1">
+                <a:solidFill>
+                  <a:srgbClr val="0B1020"/>
+                </a:solidFill>
+                <a:latin typeface="Microsoft YaHei"/>
+                <a:ea typeface="Microsoft YaHei"/>
+                <a:cs typeface="Microsoft YaHei"/>
+              </a:rPr>
+              <a:t>MEM</a:t>
+            </a:r>
+            <a:endParaRPr sz="900"/>
+          </a:p>
+        </p:txBody>
+      </p:sp>
+      <p:sp>
+        <p:nvSpPr>
+          <p:cNvPr id="21" name="Text 19">
+            <a:extLst>
+              <a:ext uri="{FF2B5EF4-FFF2-40B4-BE49-F238E27FC236}">
+                <a16:creationId xmlns:a16="http://schemas.microsoft.com/office/drawing/2014/main" id="{D3613C2C-15A5-471E-96FD-A61643A9C2FB}"/>
+              </a:ext>
+            </a:extLst>
+          </p:cNvPr>
+          <p:cNvSpPr>
+            <a:spLocks noGrp="1"/>
+          </p:cNvSpPr>
+          <p:nvPr/>
+        </p:nvSpPr>
+        <p:spPr>
+          <a:xfrm>
+            <a:off x="6858000" y="3566160"/>
+            <a:ext cx="640080" cy="237744"/>
+          </a:xfrm>
+          <a:prstGeom prst="rect">
+            <a:avLst/>
+          </a:prstGeom>
+          <a:solidFill>
+            <a:srgbClr val="22D3EE"/>
+          </a:solidFill>
+          <a:ln>
+            <a:solidFill>
+              <a:srgbClr val="22D3EE"/>
+            </a:solidFill>
+          </a:ln>
+        </p:spPr>
+        <p:txBody>
+          <a:bodyPr wrap="square" lIns="0" tIns="0" rIns="0" bIns="0" anchor="ctr">
+            <a:normAutofit/>
+          </a:bodyPr>
+          <a:lstStyle/>
+          <a:p>
+            <a:pPr marL="0" indent="0" algn="ctr">
+              <a:buNone/>
+            </a:pPr>
+            <a:r>
+              <a:rPr sz="900" b="1">
+                <a:solidFill>
+                  <a:srgbClr val="0B1020"/>
+                </a:solidFill>
+                <a:latin typeface="Microsoft YaHei"/>
+                <a:ea typeface="Microsoft YaHei"/>
+                <a:cs typeface="Microsoft YaHei"/>
+              </a:rPr>
+              <a:t>WB</a:t>
+            </a:r>
+            <a:endParaRPr sz="900"/>
+          </a:p>
+        </p:txBody>
+      </p:sp>
+      <p:sp>
+        <p:nvSpPr>
+          <p:cNvPr id="22" name="Text 20">
+            <a:extLst>
+              <a:ext uri="{FF2B5EF4-FFF2-40B4-BE49-F238E27FC236}">
+                <a16:creationId xmlns:a16="http://schemas.microsoft.com/office/drawing/2014/main" id="{290F5FD0-B801-4F09-8B12-14CBEE14DCF7}"/>
+              </a:ext>
+            </a:extLst>
+          </p:cNvPr>
+          <p:cNvSpPr>
+            <a:spLocks noGrp="1"/>
+          </p:cNvSpPr>
+          <p:nvPr/>
+        </p:nvSpPr>
+        <p:spPr>
+          <a:xfrm>
+            <a:off x="822960" y="4050792"/>
+            <a:ext cx="1051560" cy="182880"/>
+          </a:xfrm>
+          <a:prstGeom prst="rect">
+            <a:avLst/>
+          </a:prstGeom>
+          <a:noFill/>
+        </p:spPr>
+        <p:txBody>
+          <a:bodyPr wrap="square" lIns="0" tIns="0" rIns="0" bIns="0" anchor="t">
+            <a:normAutofit/>
+          </a:bodyPr>
+          <a:lstStyle/>
+          <a:p>
+            <a:pPr marL="0" indent="0" algn="l">
+              <a:buNone/>
+            </a:pPr>
+            <a:r>
+              <a:rPr sz="900">
+                <a:solidFill>
+                  <a:srgbClr val="B9C8E6"/>
+                </a:solidFill>
+                <a:latin typeface="Microsoft YaHei"/>
+                <a:ea typeface="Microsoft YaHei"/>
+                <a:cs typeface="Microsoft YaHei"/>
+              </a:rPr>
+              <a:t>顺序指令 1</a:t>
+            </a:r>
+            <a:endParaRPr sz="900"/>
+          </a:p>
+        </p:txBody>
+      </p:sp>
+      <p:sp>
+        <p:nvSpPr>
+          <p:cNvPr id="23" name="Text 21">
+            <a:extLst>
+              <a:ext uri="{FF2B5EF4-FFF2-40B4-BE49-F238E27FC236}">
+                <a16:creationId xmlns:a16="http://schemas.microsoft.com/office/drawing/2014/main" id="{3537890B-75B4-4ED8-9FC5-CFC7949B03E9}"/>
+              </a:ext>
+            </a:extLst>
+          </p:cNvPr>
+          <p:cNvSpPr>
+            <a:spLocks noGrp="1"/>
+          </p:cNvSpPr>
+          <p:nvPr/>
+        </p:nvSpPr>
+        <p:spPr>
+          <a:xfrm>
+            <a:off x="3154680" y="4037076"/>
             <a:ext cx="640080" cy="237744"/>
           </a:xfrm>
           <a:prstGeom prst="rect">
@@ -5194,7 +6062,7 @@
                 <a:ea typeface="Microsoft YaHei"/>
                 <a:cs typeface="Microsoft YaHei"/>
               </a:rPr>
-              <a:t>MEM</a:t>
+              <a:t>IF</a:t>
             </a:r>
             <a:endParaRPr sz="900"/>
           </a:p>
@@ -5202,21 +6070,179 @@
       </p:sp>
       <p:sp>
         <p:nvSpPr>
-          <p:cNvPr id="12" name="Text 10">
-            <a:extLst>
-              <a:ext uri="{FF2B5EF4-FFF2-40B4-BE49-F238E27FC236}">
-                <a16:creationId xmlns:a16="http://schemas.microsoft.com/office/drawing/2014/main" id="{1A17BCE3-72D9-482D-9409-7DCA3E56CFAB}"/>
-              </a:ext>
-            </a:extLst>
-          </p:cNvPr>
-          <p:cNvSpPr>
-            <a:spLocks noGrp="1"/>
-          </p:cNvSpPr>
-          <p:nvPr/>
-        </p:nvSpPr>
-        <p:spPr>
-          <a:xfrm>
-            <a:off x="9006840" y="1984248"/>
+          <p:cNvPr id="24" name="Text 22">
+            <a:extLst>
+              <a:ext uri="{FF2B5EF4-FFF2-40B4-BE49-F238E27FC236}">
+                <a16:creationId xmlns:a16="http://schemas.microsoft.com/office/drawing/2014/main" id="{30BB64CF-DDB3-4DC6-BCE7-21FCAE34DA49}"/>
+              </a:ext>
+            </a:extLst>
+          </p:cNvPr>
+          <p:cNvSpPr>
+            <a:spLocks noGrp="1"/>
+          </p:cNvSpPr>
+          <p:nvPr/>
+        </p:nvSpPr>
+        <p:spPr>
+          <a:xfrm>
+            <a:off x="4389120" y="4037076"/>
+            <a:ext cx="640080" cy="237744"/>
+          </a:xfrm>
+          <a:prstGeom prst="rect">
+            <a:avLst/>
+          </a:prstGeom>
+          <a:solidFill>
+            <a:srgbClr val="34D399"/>
+          </a:solidFill>
+          <a:ln>
+            <a:solidFill>
+              <a:srgbClr val="34D399"/>
+            </a:solidFill>
+          </a:ln>
+        </p:spPr>
+        <p:txBody>
+          <a:bodyPr wrap="square" lIns="0" tIns="0" rIns="0" bIns="0" anchor="ctr">
+            <a:normAutofit/>
+          </a:bodyPr>
+          <a:lstStyle/>
+          <a:p>
+            <a:pPr marL="0" indent="0" algn="ctr">
+              <a:buNone/>
+            </a:pPr>
+            <a:r>
+              <a:rPr sz="900" b="1">
+                <a:solidFill>
+                  <a:srgbClr val="0B1020"/>
+                </a:solidFill>
+                <a:latin typeface="Microsoft YaHei"/>
+                <a:ea typeface="Microsoft YaHei"/>
+                <a:cs typeface="Microsoft YaHei"/>
+              </a:rPr>
+              <a:t>ID</a:t>
+            </a:r>
+            <a:endParaRPr sz="900"/>
+          </a:p>
+        </p:txBody>
+      </p:sp>
+      <p:sp>
+        <p:nvSpPr>
+          <p:cNvPr id="25" name="Text 23">
+            <a:extLst>
+              <a:ext uri="{FF2B5EF4-FFF2-40B4-BE49-F238E27FC236}">
+                <a16:creationId xmlns:a16="http://schemas.microsoft.com/office/drawing/2014/main" id="{FB784BC1-9C2B-47A7-B0F2-59A4B84C917E}"/>
+              </a:ext>
+            </a:extLst>
+          </p:cNvPr>
+          <p:cNvSpPr>
+            <a:spLocks noGrp="1"/>
+          </p:cNvSpPr>
+          <p:nvPr/>
+        </p:nvSpPr>
+        <p:spPr>
+          <a:xfrm>
+            <a:off x="5623560" y="4037076"/>
+            <a:ext cx="640080" cy="237744"/>
+          </a:xfrm>
+          <a:prstGeom prst="rect">
+            <a:avLst/>
+          </a:prstGeom>
+          <a:solidFill>
+            <a:srgbClr val="F87171"/>
+          </a:solidFill>
+          <a:ln>
+            <a:solidFill>
+              <a:srgbClr val="F87171"/>
+            </a:solidFill>
+          </a:ln>
+        </p:spPr>
+        <p:txBody>
+          <a:bodyPr wrap="square" lIns="0" tIns="0" rIns="0" bIns="0" anchor="ctr">
+            <a:normAutofit/>
+          </a:bodyPr>
+          <a:lstStyle/>
+          <a:p>
+            <a:pPr marL="0" indent="0" algn="ctr">
+              <a:buNone/>
+            </a:pPr>
+            <a:r>
+              <a:rPr sz="900" b="1">
+                <a:solidFill>
+                  <a:srgbClr val="0B1020"/>
+                </a:solidFill>
+                <a:latin typeface="Microsoft YaHei"/>
+                <a:ea typeface="Microsoft YaHei"/>
+                <a:cs typeface="Microsoft YaHei"/>
+              </a:rPr>
+              <a:t>XX</a:t>
+            </a:r>
+            <a:endParaRPr sz="900"/>
+          </a:p>
+        </p:txBody>
+      </p:sp>
+      <p:sp>
+        <p:nvSpPr>
+          <p:cNvPr id="26" name="Text 24">
+            <a:extLst>
+              <a:ext uri="{FF2B5EF4-FFF2-40B4-BE49-F238E27FC236}">
+                <a16:creationId xmlns:a16="http://schemas.microsoft.com/office/drawing/2014/main" id="{2B504534-32F6-4817-9A92-DABF0FBB8D08}"/>
+              </a:ext>
+            </a:extLst>
+          </p:cNvPr>
+          <p:cNvSpPr>
+            <a:spLocks noGrp="1"/>
+          </p:cNvSpPr>
+          <p:nvPr/>
+        </p:nvSpPr>
+        <p:spPr>
+          <a:xfrm>
+            <a:off x="822960" y="4489704"/>
+            <a:ext cx="1051560" cy="182880"/>
+          </a:xfrm>
+          <a:prstGeom prst="rect">
+            <a:avLst/>
+          </a:prstGeom>
+          <a:noFill/>
+        </p:spPr>
+        <p:txBody>
+          <a:bodyPr wrap="square" lIns="0" tIns="0" rIns="0" bIns="0" anchor="t">
+            <a:normAutofit/>
+          </a:bodyPr>
+          <a:lstStyle/>
+          <a:p>
+            <a:pPr marL="0" indent="0" algn="l">
+              <a:buNone/>
+            </a:pPr>
+            <a:r>
+              <a:rPr sz="900">
+                <a:solidFill>
+                  <a:srgbClr val="B9C8E6"/>
+                </a:solidFill>
+                <a:latin typeface="Microsoft YaHei"/>
+                <a:ea typeface="Microsoft YaHei"/>
+                <a:cs typeface="Microsoft YaHei"/>
+              </a:rPr>
+              <a:t>顺序指令 2</a:t>
+            </a:r>
+            <a:endParaRPr sz="900"/>
+          </a:p>
+        </p:txBody>
+      </p:sp>
+      <p:sp>
+        <p:nvSpPr>
+          <p:cNvPr id="27" name="Text 25">
+            <a:extLst>
+              <a:ext uri="{FF2B5EF4-FFF2-40B4-BE49-F238E27FC236}">
+                <a16:creationId xmlns:a16="http://schemas.microsoft.com/office/drawing/2014/main" id="{16CBFE09-C1AE-4090-BB92-5AC1193C9FDE}"/>
+              </a:ext>
+            </a:extLst>
+          </p:cNvPr>
+          <p:cNvSpPr>
+            <a:spLocks noGrp="1"/>
+          </p:cNvSpPr>
+          <p:nvPr/>
+        </p:nvSpPr>
+        <p:spPr>
+          <a:xfrm>
+            <a:off x="4389120" y="4489704"/>
             <a:ext cx="640080" cy="237744"/>
           </a:xfrm>
           <a:prstGeom prst="rect">
@@ -5249,7 +6275,7 @@
                 <a:ea typeface="Microsoft YaHei"/>
                 <a:cs typeface="Microsoft YaHei"/>
               </a:rPr>
-              <a:t>MEM</a:t>
+              <a:t>IF</a:t>
             </a:r>
             <a:endParaRPr sz="900"/>
           </a:p>
@@ -5257,21 +6283,124 @@
       </p:sp>
       <p:sp>
         <p:nvSpPr>
-          <p:cNvPr id="13" name="Text 11">
-            <a:extLst>
-              <a:ext uri="{FF2B5EF4-FFF2-40B4-BE49-F238E27FC236}">
-                <a16:creationId xmlns:a16="http://schemas.microsoft.com/office/drawing/2014/main" id="{63E20DAE-B9FC-4557-81C0-30CBACA09C43}"/>
-              </a:ext>
-            </a:extLst>
-          </p:cNvPr>
-          <p:cNvSpPr>
-            <a:spLocks noGrp="1"/>
-          </p:cNvSpPr>
-          <p:nvPr/>
-        </p:nvSpPr>
-        <p:spPr>
-          <a:xfrm>
-            <a:off x="10012680" y="1984248"/>
+          <p:cNvPr id="28" name="Text 26">
+            <a:extLst>
+              <a:ext uri="{FF2B5EF4-FFF2-40B4-BE49-F238E27FC236}">
+                <a16:creationId xmlns:a16="http://schemas.microsoft.com/office/drawing/2014/main" id="{DA565CC3-C114-42C8-B4A6-FB60CB1A161A}"/>
+              </a:ext>
+            </a:extLst>
+          </p:cNvPr>
+          <p:cNvSpPr>
+            <a:spLocks noGrp="1"/>
+          </p:cNvSpPr>
+          <p:nvPr/>
+        </p:nvSpPr>
+        <p:spPr>
+          <a:xfrm>
+            <a:off x="5623560" y="4489704"/>
+            <a:ext cx="640080" cy="237744"/>
+          </a:xfrm>
+          <a:prstGeom prst="rect">
+            <a:avLst/>
+          </a:prstGeom>
+          <a:solidFill>
+            <a:srgbClr val="F87171"/>
+          </a:solidFill>
+          <a:ln>
+            <a:solidFill>
+              <a:srgbClr val="F87171"/>
+            </a:solidFill>
+          </a:ln>
+        </p:spPr>
+        <p:txBody>
+          <a:bodyPr wrap="square" lIns="0" tIns="0" rIns="0" bIns="0" anchor="ctr">
+            <a:normAutofit/>
+          </a:bodyPr>
+          <a:lstStyle/>
+          <a:p>
+            <a:pPr marL="0" indent="0" algn="ctr">
+              <a:buNone/>
+            </a:pPr>
+            <a:r>
+              <a:rPr sz="900" b="1">
+                <a:solidFill>
+                  <a:srgbClr val="0B1020"/>
+                </a:solidFill>
+                <a:latin typeface="Microsoft YaHei"/>
+                <a:ea typeface="Microsoft YaHei"/>
+                <a:cs typeface="Microsoft YaHei"/>
+              </a:rPr>
+              <a:t>XX</a:t>
+            </a:r>
+            <a:endParaRPr sz="900"/>
+          </a:p>
+        </p:txBody>
+      </p:sp>
+      <p:sp>
+        <p:nvSpPr>
+          <p:cNvPr id="29" name="Text 27">
+            <a:extLst>
+              <a:ext uri="{FF2B5EF4-FFF2-40B4-BE49-F238E27FC236}">
+                <a16:creationId xmlns:a16="http://schemas.microsoft.com/office/drawing/2014/main" id="{7E35B574-E95D-4A86-880D-C8BEB5DF03C9}"/>
+              </a:ext>
+            </a:extLst>
+          </p:cNvPr>
+          <p:cNvSpPr>
+            <a:spLocks noGrp="1"/>
+          </p:cNvSpPr>
+          <p:nvPr/>
+        </p:nvSpPr>
+        <p:spPr>
+          <a:xfrm>
+            <a:off x="822960" y="4928616"/>
+            <a:ext cx="1051560" cy="182880"/>
+          </a:xfrm>
+          <a:prstGeom prst="rect">
+            <a:avLst/>
+          </a:prstGeom>
+          <a:noFill/>
+        </p:spPr>
+        <p:txBody>
+          <a:bodyPr wrap="square" lIns="0" tIns="0" rIns="0" bIns="0" anchor="t">
+            <a:normAutofit/>
+          </a:bodyPr>
+          <a:lstStyle/>
+          <a:p>
+            <a:pPr marL="0" indent="0" algn="l">
+              <a:buNone/>
+            </a:pPr>
+            <a:r>
+              <a:rPr sz="900">
+                <a:solidFill>
+                  <a:srgbClr val="B9C8E6"/>
+                </a:solidFill>
+                <a:latin typeface="Microsoft YaHei"/>
+                <a:ea typeface="Microsoft YaHei"/>
+                <a:cs typeface="Microsoft YaHei"/>
+              </a:rPr>
+              <a:t>目标指令</a:t>
+            </a:r>
+            <a:endParaRPr sz="900"/>
+          </a:p>
+        </p:txBody>
+      </p:sp>
+      <p:sp>
+        <p:nvSpPr>
+          <p:cNvPr id="30" name="Text 28">
+            <a:extLst>
+              <a:ext uri="{FF2B5EF4-FFF2-40B4-BE49-F238E27FC236}">
+                <a16:creationId xmlns:a16="http://schemas.microsoft.com/office/drawing/2014/main" id="{1843B6C6-8654-44E6-B0F8-5788A4B0D8B1}"/>
+              </a:ext>
+            </a:extLst>
+          </p:cNvPr>
+          <p:cNvSpPr>
+            <a:spLocks noGrp="1"/>
+          </p:cNvSpPr>
+          <p:nvPr/>
+        </p:nvSpPr>
+        <p:spPr>
+          <a:xfrm>
+            <a:off x="5623560" y="4892715"/>
             <a:ext cx="640080" cy="237744"/>
           </a:xfrm>
           <a:prstGeom prst="rect">
@@ -5304,7 +6433,7 @@
                 <a:ea typeface="Microsoft YaHei"/>
                 <a:cs typeface="Microsoft YaHei"/>
               </a:rPr>
-              <a:t>WB</a:t>
+              <a:t>IF</a:t>
             </a:r>
             <a:endParaRPr sz="900"/>
           </a:p>
@@ -5312,37 +6441,92 @@
       </p:sp>
       <p:sp>
         <p:nvSpPr>
-          <p:cNvPr id="14" name="Text 12">
-            <a:extLst>
-              <a:ext uri="{FF2B5EF4-FFF2-40B4-BE49-F238E27FC236}">
-                <a16:creationId xmlns:a16="http://schemas.microsoft.com/office/drawing/2014/main" id="{FED78237-1F4B-4A22-AD2B-E9D2747D3803}"/>
-              </a:ext>
-            </a:extLst>
-          </p:cNvPr>
-          <p:cNvSpPr>
-            <a:spLocks noGrp="1"/>
-          </p:cNvSpPr>
-          <p:nvPr/>
-        </p:nvSpPr>
-        <p:spPr>
-          <a:xfrm>
-            <a:off x="786384" y="2926080"/>
-            <a:ext cx="2011680" cy="640080"/>
+          <p:cNvPr id="31" name="Text 29">
+            <a:extLst>
+              <a:ext uri="{FF2B5EF4-FFF2-40B4-BE49-F238E27FC236}">
+                <a16:creationId xmlns:a16="http://schemas.microsoft.com/office/drawing/2014/main" id="{DA1718B8-A3E0-45EE-936E-3B15F80E3992}"/>
+              </a:ext>
+            </a:extLst>
+          </p:cNvPr>
+          <p:cNvSpPr>
+            <a:spLocks noGrp="1"/>
+          </p:cNvSpPr>
+          <p:nvPr/>
+        </p:nvSpPr>
+        <p:spPr>
+          <a:xfrm>
+            <a:off x="6858000" y="4892715"/>
+            <a:ext cx="640080" cy="237744"/>
           </a:xfrm>
           <a:prstGeom prst="rect">
             <a:avLst/>
           </a:prstGeom>
           <a:solidFill>
-            <a:srgbClr val="121A2D"/>
+            <a:srgbClr val="34D399"/>
           </a:solidFill>
-          <a:ln w="15240">
+          <a:ln>
+            <a:solidFill>
+              <a:srgbClr val="34D399"/>
+            </a:solidFill>
+          </a:ln>
+        </p:spPr>
+        <p:txBody>
+          <a:bodyPr wrap="square" lIns="0" tIns="0" rIns="0" bIns="0" anchor="ctr">
+            <a:normAutofit/>
+          </a:bodyPr>
+          <a:lstStyle/>
+          <a:p>
+            <a:pPr marL="0" indent="0" algn="ctr">
+              <a:buNone/>
+            </a:pPr>
+            <a:r>
+              <a:rPr sz="900" b="1">
+                <a:solidFill>
+                  <a:srgbClr val="0B1020"/>
+                </a:solidFill>
+                <a:latin typeface="Microsoft YaHei"/>
+                <a:ea typeface="Microsoft YaHei"/>
+                <a:cs typeface="Microsoft YaHei"/>
+              </a:rPr>
+              <a:t>ID</a:t>
+            </a:r>
+            <a:endParaRPr sz="900"/>
+          </a:p>
+        </p:txBody>
+      </p:sp>
+      <p:sp>
+        <p:nvSpPr>
+          <p:cNvPr id="32" name="Text 30">
+            <a:extLst>
+              <a:ext uri="{FF2B5EF4-FFF2-40B4-BE49-F238E27FC236}">
+                <a16:creationId xmlns:a16="http://schemas.microsoft.com/office/drawing/2014/main" id="{37E4DC29-45D2-4DBC-94B0-73D6244D2379}"/>
+              </a:ext>
+            </a:extLst>
+          </p:cNvPr>
+          <p:cNvSpPr>
+            <a:spLocks noGrp="1"/>
+          </p:cNvSpPr>
+          <p:nvPr/>
+        </p:nvSpPr>
+        <p:spPr>
+          <a:xfrm>
+            <a:off x="8092440" y="4892715"/>
+            <a:ext cx="640080" cy="237744"/>
+          </a:xfrm>
+          <a:prstGeom prst="rect">
+            <a:avLst/>
+          </a:prstGeom>
+          <a:solidFill>
+            <a:srgbClr val="F59E0B"/>
+          </a:solidFill>
+          <a:ln>
             <a:solidFill>
               <a:srgbClr val="F59E0B"/>
             </a:solidFill>
           </a:ln>
         </p:spPr>
         <p:txBody>
-          <a:bodyPr wrap="square" lIns="1016" tIns="1016" rIns="1016" bIns="1016" anchor="ctr">
+          <a:bodyPr wrap="square" lIns="0" tIns="0" rIns="0" bIns="0" anchor="ctr">
             <a:normAutofit/>
           </a:bodyPr>
           <a:lstStyle/>
@@ -5351,235 +6535,53 @@
               <a:buNone/>
             </a:pPr>
             <a:r>
-              <a:rPr sz="1070" b="1">
-                <a:solidFill>
-                  <a:srgbClr val="F7FAFF"/>
-                </a:solidFill>
-                <a:latin typeface="Microsoft YaHei"/>
-                <a:ea typeface="Microsoft YaHei"/>
-                <a:cs typeface="Microsoft YaHei"/>
-              </a:rPr>
-              <a:t>load-use</a:t>
-            </a:r>
-            <a:endParaRPr sz="1070"/>
-          </a:p>
-          <a:p>
-            <a:pPr marL="0" indent="0" algn="ctr">
-              <a:buNone/>
-            </a:pPr>
-            <a:r>
-              <a:rPr sz="1070" b="1">
-                <a:solidFill>
-                  <a:srgbClr val="F7FAFF"/>
-                </a:solidFill>
-                <a:latin typeface="Microsoft YaHei"/>
-                <a:ea typeface="Microsoft YaHei"/>
-                <a:cs typeface="Microsoft YaHei"/>
-              </a:rPr>
-              <a:t>stall_data / valid</a:t>
-            </a:r>
-            <a:endParaRPr sz="1070"/>
-          </a:p>
-        </p:txBody>
-      </p:sp>
-      <p:sp>
-        <p:nvSpPr>
-          <p:cNvPr id="15" name="Text 13">
-            <a:extLst>
-              <a:ext uri="{FF2B5EF4-FFF2-40B4-BE49-F238E27FC236}">
-                <a16:creationId xmlns:a16="http://schemas.microsoft.com/office/drawing/2014/main" id="{25F6B7C8-135A-4FD2-A274-1D063E086486}"/>
-              </a:ext>
-            </a:extLst>
-          </p:cNvPr>
-          <p:cNvSpPr>
-            <a:spLocks noGrp="1"/>
-          </p:cNvSpPr>
-          <p:nvPr/>
-        </p:nvSpPr>
-        <p:spPr>
-          <a:xfrm>
-            <a:off x="2962656" y="2926080"/>
-            <a:ext cx="3703320" cy="640080"/>
+              <a:rPr sz="900" b="1">
+                <a:solidFill>
+                  <a:srgbClr val="0B1020"/>
+                </a:solidFill>
+                <a:latin typeface="Microsoft YaHei"/>
+                <a:ea typeface="Microsoft YaHei"/>
+                <a:cs typeface="Microsoft YaHei"/>
+              </a:rPr>
+              <a:t>EX</a:t>
+            </a:r>
+            <a:endParaRPr sz="900"/>
+          </a:p>
+        </p:txBody>
+      </p:sp>
+      <p:sp>
+        <p:nvSpPr>
+          <p:cNvPr id="33" name="Text 31">
+            <a:extLst>
+              <a:ext uri="{FF2B5EF4-FFF2-40B4-BE49-F238E27FC236}">
+                <a16:creationId xmlns:a16="http://schemas.microsoft.com/office/drawing/2014/main" id="{6CEC96D7-C93F-4B2E-AA22-9B13E2FC5848}"/>
+              </a:ext>
+            </a:extLst>
+          </p:cNvPr>
+          <p:cNvSpPr>
+            <a:spLocks noGrp="1"/>
+          </p:cNvSpPr>
+          <p:nvPr/>
+        </p:nvSpPr>
+        <p:spPr>
+          <a:xfrm>
+            <a:off x="1828800" y="5559552"/>
+            <a:ext cx="8503920" cy="402336"/>
           </a:xfrm>
           <a:prstGeom prst="rect">
             <a:avLst/>
           </a:prstGeom>
           <a:solidFill>
-            <a:srgbClr val="10172A"/>
+            <a:srgbClr val="2B1018"/>
           </a:solidFill>
           <a:ln w="12700">
             <a:solidFill>
-              <a:srgbClr val="2C3D61"/>
-            </a:solidFill>
-          </a:ln>
-        </p:spPr>
-        <p:txBody>
-          <a:bodyPr wrap="square" lIns="1143" tIns="1143" rIns="1143" bIns="1143" anchor="ctr">
-            <a:normAutofit/>
-          </a:bodyPr>
-          <a:lstStyle/>
-          <a:p>
-            <a:pPr marL="0" indent="0" algn="l">
-              <a:buNone/>
-            </a:pPr>
-            <a:r>
-              <a:rPr sz="1080">
-                <a:solidFill>
-                  <a:srgbClr val="B9C8E6"/>
-                </a:solidFill>
-                <a:latin typeface="Microsoft YaHei"/>
-                <a:ea typeface="Microsoft YaHei"/>
-                <a:cs typeface="Microsoft YaHei"/>
-              </a:rPr>
-              <a:t>  PC 与 IF/ID 保持，ID/EX 插入气泡，最终写回值正确</a:t>
-            </a:r>
-            <a:endParaRPr sz="1080"/>
-          </a:p>
-        </p:txBody>
-      </p:sp>
-      <p:sp>
-        <p:nvSpPr>
-          <p:cNvPr id="16" name="Text 14">
-            <a:extLst>
-              <a:ext uri="{FF2B5EF4-FFF2-40B4-BE49-F238E27FC236}">
-                <a16:creationId xmlns:a16="http://schemas.microsoft.com/office/drawing/2014/main" id="{ABF4942B-D88B-411F-8337-FAA216CDC1DC}"/>
-              </a:ext>
-            </a:extLst>
-          </p:cNvPr>
-          <p:cNvSpPr>
-            <a:spLocks noGrp="1"/>
-          </p:cNvSpPr>
-          <p:nvPr/>
-        </p:nvSpPr>
-        <p:spPr>
-          <a:xfrm>
-            <a:off x="6995160" y="3127248"/>
-            <a:ext cx="640080" cy="237744"/>
-          </a:xfrm>
-          <a:prstGeom prst="rect">
-            <a:avLst/>
-          </a:prstGeom>
-          <a:solidFill>
-            <a:srgbClr val="3B82F6"/>
-          </a:solidFill>
-          <a:ln>
-            <a:solidFill>
-              <a:srgbClr val="3B82F6"/>
-            </a:solidFill>
-          </a:ln>
-        </p:spPr>
-        <p:txBody>
-          <a:bodyPr wrap="square" lIns="0" tIns="0" rIns="0" bIns="0" anchor="ctr">
-            <a:normAutofit/>
-          </a:bodyPr>
-          <a:lstStyle/>
-          <a:p>
-            <a:pPr marL="0" indent="0" algn="ctr">
-              <a:buNone/>
-            </a:pPr>
-            <a:r>
-              <a:rPr sz="900" b="1">
-                <a:solidFill>
-                  <a:srgbClr val="0B1020"/>
-                </a:solidFill>
-                <a:latin typeface="Microsoft YaHei"/>
-                <a:ea typeface="Microsoft YaHei"/>
-                <a:cs typeface="Microsoft YaHei"/>
-              </a:rPr>
-              <a:t>RUN</a:t>
-            </a:r>
-            <a:endParaRPr sz="900"/>
-          </a:p>
-        </p:txBody>
-      </p:sp>
-      <p:sp>
-        <p:nvSpPr>
-          <p:cNvPr id="17" name="Text 15">
-            <a:extLst>
-              <a:ext uri="{FF2B5EF4-FFF2-40B4-BE49-F238E27FC236}">
-                <a16:creationId xmlns:a16="http://schemas.microsoft.com/office/drawing/2014/main" id="{AC0F5B33-10F9-4831-B2BC-51712A497DEE}"/>
-              </a:ext>
-            </a:extLst>
-          </p:cNvPr>
-          <p:cNvSpPr>
-            <a:spLocks noGrp="1"/>
-          </p:cNvSpPr>
-          <p:nvPr/>
-        </p:nvSpPr>
-        <p:spPr>
-          <a:xfrm>
-            <a:off x="8001000" y="3127248"/>
-            <a:ext cx="640080" cy="237744"/>
-          </a:xfrm>
-          <a:prstGeom prst="rect">
-            <a:avLst/>
-          </a:prstGeom>
-          <a:solidFill>
-            <a:srgbClr val="3B82F6"/>
-          </a:solidFill>
-          <a:ln>
-            <a:solidFill>
-              <a:srgbClr val="3B82F6"/>
-            </a:solidFill>
-          </a:ln>
-        </p:spPr>
-        <p:txBody>
-          <a:bodyPr wrap="square" lIns="0" tIns="0" rIns="0" bIns="0" anchor="ctr">
-            <a:normAutofit/>
-          </a:bodyPr>
-          <a:lstStyle/>
-          <a:p>
-            <a:pPr marL="0" indent="0" algn="ctr">
-              <a:buNone/>
-            </a:pPr>
-            <a:r>
-              <a:rPr sz="900" b="1">
-                <a:solidFill>
-                  <a:srgbClr val="0B1020"/>
-                </a:solidFill>
-                <a:latin typeface="Microsoft YaHei"/>
-                <a:ea typeface="Microsoft YaHei"/>
-                <a:cs typeface="Microsoft YaHei"/>
-              </a:rPr>
-              <a:t>HOLD</a:t>
-            </a:r>
-            <a:endParaRPr sz="900"/>
-          </a:p>
-        </p:txBody>
-      </p:sp>
-      <p:sp>
-        <p:nvSpPr>
-          <p:cNvPr id="18" name="Text 16">
-            <a:extLst>
-              <a:ext uri="{FF2B5EF4-FFF2-40B4-BE49-F238E27FC236}">
-                <a16:creationId xmlns:a16="http://schemas.microsoft.com/office/drawing/2014/main" id="{39998CAA-6AFF-4574-B223-C79384276B49}"/>
-              </a:ext>
-            </a:extLst>
-          </p:cNvPr>
-          <p:cNvSpPr>
-            <a:spLocks noGrp="1"/>
-          </p:cNvSpPr>
-          <p:nvPr/>
-        </p:nvSpPr>
-        <p:spPr>
-          <a:xfrm>
-            <a:off x="9006840" y="3127248"/>
-            <a:ext cx="640080" cy="237744"/>
-          </a:xfrm>
-          <a:prstGeom prst="rect">
-            <a:avLst/>
-          </a:prstGeom>
-          <a:solidFill>
-            <a:srgbClr val="F87171"/>
-          </a:solidFill>
-          <a:ln>
-            <a:solidFill>
               <a:srgbClr val="F87171"/>
             </a:solidFill>
           </a:ln>
         </p:spPr>
         <p:txBody>
-          <a:bodyPr wrap="square" lIns="0" tIns="0" rIns="0" bIns="0" anchor="ctr">
+          <a:bodyPr wrap="square" lIns="508" tIns="508" rIns="508" bIns="508" anchor="ctr">
             <a:normAutofit/>
           </a:bodyPr>
           <a:lstStyle/>
@@ -5588,483 +6590,26 @@
               <a:buNone/>
             </a:pPr>
             <a:r>
-              <a:rPr sz="900" b="1">
-                <a:solidFill>
-                  <a:srgbClr val="FFFFFF"/>
-                </a:solidFill>
-                <a:latin typeface="Microsoft YaHei"/>
-                <a:ea typeface="Microsoft YaHei"/>
-                <a:cs typeface="Microsoft YaHei"/>
-              </a:rPr>
-              <a:t>BUBBLE</a:t>
-            </a:r>
-            <a:endParaRPr sz="900"/>
-          </a:p>
-        </p:txBody>
-      </p:sp>
-      <p:sp>
-        <p:nvSpPr>
-          <p:cNvPr id="19" name="Text 17">
-            <a:extLst>
-              <a:ext uri="{FF2B5EF4-FFF2-40B4-BE49-F238E27FC236}">
-                <a16:creationId xmlns:a16="http://schemas.microsoft.com/office/drawing/2014/main" id="{1261CC61-1ECE-4354-B469-E1E7CCF5DC79}"/>
-              </a:ext>
-            </a:extLst>
-          </p:cNvPr>
-          <p:cNvSpPr>
-            <a:spLocks noGrp="1"/>
-          </p:cNvSpPr>
-          <p:nvPr/>
-        </p:nvSpPr>
-        <p:spPr>
-          <a:xfrm>
-            <a:off x="10012680" y="3127248"/>
-            <a:ext cx="640080" cy="237744"/>
-          </a:xfrm>
-          <a:prstGeom prst="rect">
-            <a:avLst/>
-          </a:prstGeom>
-          <a:solidFill>
-            <a:srgbClr val="3B82F6"/>
-          </a:solidFill>
-          <a:ln>
-            <a:solidFill>
-              <a:srgbClr val="3B82F6"/>
-            </a:solidFill>
-          </a:ln>
-        </p:spPr>
-        <p:txBody>
-          <a:bodyPr wrap="square" lIns="0" tIns="0" rIns="0" bIns="0" anchor="ctr">
-            <a:normAutofit/>
-          </a:bodyPr>
-          <a:lstStyle/>
-          <a:p>
-            <a:pPr marL="0" indent="0" algn="ctr">
-              <a:buNone/>
-            </a:pPr>
-            <a:r>
-              <a:rPr sz="900" b="1">
-                <a:solidFill>
-                  <a:srgbClr val="0B1020"/>
-                </a:solidFill>
-                <a:latin typeface="Microsoft YaHei"/>
-                <a:ea typeface="Microsoft YaHei"/>
-                <a:cs typeface="Microsoft YaHei"/>
-              </a:rPr>
-              <a:t>RUN</a:t>
-            </a:r>
-            <a:endParaRPr sz="900"/>
-          </a:p>
-        </p:txBody>
-      </p:sp>
-      <p:sp>
-        <p:nvSpPr>
-          <p:cNvPr id="20" name="Text 18">
-            <a:extLst>
-              <a:ext uri="{FF2B5EF4-FFF2-40B4-BE49-F238E27FC236}">
-                <a16:creationId xmlns:a16="http://schemas.microsoft.com/office/drawing/2014/main" id="{0C9E00A5-6481-4668-BCA4-46CF6DBD932C}"/>
-              </a:ext>
-            </a:extLst>
-          </p:cNvPr>
-          <p:cNvSpPr>
-            <a:spLocks noGrp="1"/>
-          </p:cNvSpPr>
-          <p:nvPr/>
-        </p:nvSpPr>
-        <p:spPr>
-          <a:xfrm>
-            <a:off x="786384" y="4069080"/>
-            <a:ext cx="2011680" cy="640080"/>
-          </a:xfrm>
-          <a:prstGeom prst="rect">
-            <a:avLst/>
-          </a:prstGeom>
-          <a:solidFill>
-            <a:srgbClr val="121A2D"/>
-          </a:solidFill>
-          <a:ln w="15240">
-            <a:solidFill>
-              <a:srgbClr val="F87171"/>
-            </a:solidFill>
-          </a:ln>
-        </p:spPr>
-        <p:txBody>
-          <a:bodyPr wrap="square" lIns="1016" tIns="1016" rIns="1016" bIns="1016" anchor="ctr">
-            <a:normAutofit/>
-          </a:bodyPr>
-          <a:lstStyle/>
-          <a:p>
-            <a:pPr marL="0" indent="0" algn="ctr">
-              <a:buNone/>
-            </a:pPr>
-            <a:r>
-              <a:rPr sz="1070" b="1">
-                <a:solidFill>
-                  <a:srgbClr val="F7FAFF"/>
-                </a:solidFill>
-                <a:latin typeface="Microsoft YaHei"/>
-                <a:ea typeface="Microsoft YaHei"/>
-                <a:cs typeface="Microsoft YaHei"/>
-              </a:rPr>
-              <a:t>分支冲刷</a:t>
-            </a:r>
-            <a:endParaRPr sz="1070"/>
-          </a:p>
-          <a:p>
-            <a:pPr marL="0" indent="0" algn="ctr">
-              <a:buNone/>
-            </a:pPr>
-            <a:r>
-              <a:rPr sz="1070" b="1">
-                <a:solidFill>
-                  <a:srgbClr val="F7FAFF"/>
-                </a:solidFill>
-                <a:latin typeface="Microsoft YaHei"/>
-                <a:ea typeface="Microsoft YaHei"/>
-                <a:cs typeface="Microsoft YaHei"/>
-              </a:rPr>
-              <a:t>redirect / flush</a:t>
-            </a:r>
-            <a:endParaRPr sz="1070"/>
-          </a:p>
-        </p:txBody>
-      </p:sp>
-      <p:sp>
-        <p:nvSpPr>
-          <p:cNvPr id="21" name="Text 19">
-            <a:extLst>
-              <a:ext uri="{FF2B5EF4-FFF2-40B4-BE49-F238E27FC236}">
-                <a16:creationId xmlns:a16="http://schemas.microsoft.com/office/drawing/2014/main" id="{F46924D1-56B7-44AC-8D3F-D93906639DB5}"/>
-              </a:ext>
-            </a:extLst>
-          </p:cNvPr>
-          <p:cNvSpPr>
-            <a:spLocks noGrp="1"/>
-          </p:cNvSpPr>
-          <p:nvPr/>
-        </p:nvSpPr>
-        <p:spPr>
-          <a:xfrm>
-            <a:off x="2962656" y="4069080"/>
-            <a:ext cx="3703320" cy="640080"/>
-          </a:xfrm>
-          <a:prstGeom prst="rect">
-            <a:avLst/>
-          </a:prstGeom>
-          <a:solidFill>
-            <a:srgbClr val="10172A"/>
-          </a:solidFill>
-          <a:ln w="12700">
-            <a:solidFill>
-              <a:srgbClr val="2C3D61"/>
-            </a:solidFill>
-          </a:ln>
-        </p:spPr>
-        <p:txBody>
-          <a:bodyPr wrap="square" lIns="1143" tIns="1143" rIns="1143" bIns="1143" anchor="ctr">
-            <a:normAutofit/>
-          </a:bodyPr>
-          <a:lstStyle/>
-          <a:p>
-            <a:pPr marL="0" indent="0" algn="l">
-              <a:buNone/>
-            </a:pPr>
-            <a:r>
-              <a:rPr sz="1080">
-                <a:solidFill>
-                  <a:srgbClr val="B9C8E6"/>
-                </a:solidFill>
-                <a:latin typeface="Microsoft YaHei"/>
-                <a:ea typeface="Microsoft YaHei"/>
-                <a:cs typeface="Microsoft YaHei"/>
-              </a:rPr>
-              <a:t>  taken 后清除两条年轻指令，错误路径无副作用</a:t>
-            </a:r>
-            <a:endParaRPr sz="1080"/>
-          </a:p>
-        </p:txBody>
-      </p:sp>
-      <p:sp>
-        <p:nvSpPr>
-          <p:cNvPr id="22" name="Text 20">
-            <a:extLst>
-              <a:ext uri="{FF2B5EF4-FFF2-40B4-BE49-F238E27FC236}">
-                <a16:creationId xmlns:a16="http://schemas.microsoft.com/office/drawing/2014/main" id="{C0F51870-53BD-40FD-8228-F8AF78172B74}"/>
-              </a:ext>
-            </a:extLst>
-          </p:cNvPr>
-          <p:cNvSpPr>
-            <a:spLocks noGrp="1"/>
-          </p:cNvSpPr>
-          <p:nvPr/>
-        </p:nvSpPr>
-        <p:spPr>
-          <a:xfrm>
-            <a:off x="6995160" y="4270248"/>
-            <a:ext cx="640080" cy="237744"/>
-          </a:xfrm>
-          <a:prstGeom prst="rect">
-            <a:avLst/>
-          </a:prstGeom>
-          <a:solidFill>
-            <a:srgbClr val="3B82F6"/>
-          </a:solidFill>
-          <a:ln>
-            <a:solidFill>
-              <a:srgbClr val="3B82F6"/>
-            </a:solidFill>
-          </a:ln>
-        </p:spPr>
-        <p:txBody>
-          <a:bodyPr wrap="square" lIns="0" tIns="0" rIns="0" bIns="0" anchor="ctr">
-            <a:normAutofit/>
-          </a:bodyPr>
-          <a:lstStyle/>
-          <a:p>
-            <a:pPr marL="0" indent="0" algn="ctr">
-              <a:buNone/>
-            </a:pPr>
-            <a:r>
-              <a:rPr sz="900" b="1">
-                <a:solidFill>
-                  <a:srgbClr val="0B1020"/>
-                </a:solidFill>
-                <a:latin typeface="Microsoft YaHei"/>
-                <a:ea typeface="Microsoft YaHei"/>
-                <a:cs typeface="Microsoft YaHei"/>
-              </a:rPr>
-              <a:t>SEQ</a:t>
-            </a:r>
-            <a:endParaRPr sz="900"/>
-          </a:p>
-        </p:txBody>
-      </p:sp>
-      <p:sp>
-        <p:nvSpPr>
-          <p:cNvPr id="23" name="Text 21">
-            <a:extLst>
-              <a:ext uri="{FF2B5EF4-FFF2-40B4-BE49-F238E27FC236}">
-                <a16:creationId xmlns:a16="http://schemas.microsoft.com/office/drawing/2014/main" id="{2AF5B253-2863-4D4A-B798-0B3247160663}"/>
-              </a:ext>
-            </a:extLst>
-          </p:cNvPr>
-          <p:cNvSpPr>
-            <a:spLocks noGrp="1"/>
-          </p:cNvSpPr>
-          <p:nvPr/>
-        </p:nvSpPr>
-        <p:spPr>
-          <a:xfrm>
-            <a:off x="8001000" y="4270248"/>
-            <a:ext cx="640080" cy="237744"/>
-          </a:xfrm>
-          <a:prstGeom prst="rect">
-            <a:avLst/>
-          </a:prstGeom>
-          <a:solidFill>
-            <a:srgbClr val="3B82F6"/>
-          </a:solidFill>
-          <a:ln>
-            <a:solidFill>
-              <a:srgbClr val="3B82F6"/>
-            </a:solidFill>
-          </a:ln>
-        </p:spPr>
-        <p:txBody>
-          <a:bodyPr wrap="square" lIns="0" tIns="0" rIns="0" bIns="0" anchor="ctr">
-            <a:normAutofit/>
-          </a:bodyPr>
-          <a:lstStyle/>
-          <a:p>
-            <a:pPr marL="0" indent="0" algn="ctr">
-              <a:buNone/>
-            </a:pPr>
-            <a:r>
-              <a:rPr sz="900" b="1">
-                <a:solidFill>
-                  <a:srgbClr val="0B1020"/>
-                </a:solidFill>
-                <a:latin typeface="Microsoft YaHei"/>
-                <a:ea typeface="Microsoft YaHei"/>
-                <a:cs typeface="Microsoft YaHei"/>
-              </a:rPr>
-              <a:t>TAKEN</a:t>
-            </a:r>
-            <a:endParaRPr sz="900"/>
-          </a:p>
-        </p:txBody>
-      </p:sp>
-      <p:sp>
-        <p:nvSpPr>
-          <p:cNvPr id="24" name="Text 22">
-            <a:extLst>
-              <a:ext uri="{FF2B5EF4-FFF2-40B4-BE49-F238E27FC236}">
-                <a16:creationId xmlns:a16="http://schemas.microsoft.com/office/drawing/2014/main" id="{9FE53AD3-B0A9-444C-9E8F-E45D60682F25}"/>
-              </a:ext>
-            </a:extLst>
-          </p:cNvPr>
-          <p:cNvSpPr>
-            <a:spLocks noGrp="1"/>
-          </p:cNvSpPr>
-          <p:nvPr/>
-        </p:nvSpPr>
-        <p:spPr>
-          <a:xfrm>
-            <a:off x="9006840" y="4270248"/>
-            <a:ext cx="640080" cy="237744"/>
-          </a:xfrm>
-          <a:prstGeom prst="rect">
-            <a:avLst/>
-          </a:prstGeom>
-          <a:solidFill>
-            <a:srgbClr val="F87171"/>
-          </a:solidFill>
-          <a:ln>
-            <a:solidFill>
-              <a:srgbClr val="F87171"/>
-            </a:solidFill>
-          </a:ln>
-        </p:spPr>
-        <p:txBody>
-          <a:bodyPr wrap="square" lIns="0" tIns="0" rIns="0" bIns="0" anchor="ctr">
-            <a:normAutofit/>
-          </a:bodyPr>
-          <a:lstStyle/>
-          <a:p>
-            <a:pPr marL="0" indent="0" algn="ctr">
-              <a:buNone/>
-            </a:pPr>
-            <a:r>
-              <a:rPr sz="900" b="1">
-                <a:solidFill>
-                  <a:srgbClr val="FFFFFF"/>
-                </a:solidFill>
-                <a:latin typeface="Microsoft YaHei"/>
-                <a:ea typeface="Microsoft YaHei"/>
-                <a:cs typeface="Microsoft YaHei"/>
-              </a:rPr>
-              <a:t>FLUSH</a:t>
-            </a:r>
-            <a:endParaRPr sz="900"/>
-          </a:p>
-        </p:txBody>
-      </p:sp>
-      <p:sp>
-        <p:nvSpPr>
-          <p:cNvPr id="25" name="Text 23">
-            <a:extLst>
-              <a:ext uri="{FF2B5EF4-FFF2-40B4-BE49-F238E27FC236}">
-                <a16:creationId xmlns:a16="http://schemas.microsoft.com/office/drawing/2014/main" id="{C214E617-6263-477C-9C7D-B94F496DDE74}"/>
-              </a:ext>
-            </a:extLst>
-          </p:cNvPr>
-          <p:cNvSpPr>
-            <a:spLocks noGrp="1"/>
-          </p:cNvSpPr>
-          <p:nvPr/>
-        </p:nvSpPr>
-        <p:spPr>
-          <a:xfrm>
-            <a:off x="10012680" y="4270248"/>
-            <a:ext cx="640080" cy="237744"/>
-          </a:xfrm>
-          <a:prstGeom prst="rect">
-            <a:avLst/>
-          </a:prstGeom>
-          <a:solidFill>
-            <a:srgbClr val="3B82F6"/>
-          </a:solidFill>
-          <a:ln>
-            <a:solidFill>
-              <a:srgbClr val="3B82F6"/>
-            </a:solidFill>
-          </a:ln>
-        </p:spPr>
-        <p:txBody>
-          <a:bodyPr wrap="square" lIns="0" tIns="0" rIns="0" bIns="0" anchor="ctr">
-            <a:normAutofit/>
-          </a:bodyPr>
-          <a:lstStyle/>
-          <a:p>
-            <a:pPr marL="0" indent="0" algn="ctr">
-              <a:buNone/>
-            </a:pPr>
-            <a:r>
-              <a:rPr sz="900" b="1">
-                <a:solidFill>
-                  <a:srgbClr val="0B1020"/>
-                </a:solidFill>
-                <a:latin typeface="Microsoft YaHei"/>
-                <a:ea typeface="Microsoft YaHei"/>
-                <a:cs typeface="Microsoft YaHei"/>
-              </a:rPr>
-              <a:t>TARGET</a:t>
-            </a:r>
-            <a:endParaRPr sz="900"/>
-          </a:p>
-        </p:txBody>
-      </p:sp>
-      <p:sp>
-        <p:nvSpPr>
-          <p:cNvPr id="26" name="Text 24">
-            <a:extLst>
-              <a:ext uri="{FF2B5EF4-FFF2-40B4-BE49-F238E27FC236}">
-                <a16:creationId xmlns:a16="http://schemas.microsoft.com/office/drawing/2014/main" id="{59AE7CF1-AAA1-4AF9-AB55-F2AC9CA9C4D2}"/>
-              </a:ext>
-            </a:extLst>
-          </p:cNvPr>
-          <p:cNvSpPr>
-            <a:spLocks noGrp="1"/>
-          </p:cNvSpPr>
-          <p:nvPr/>
-        </p:nvSpPr>
-        <p:spPr>
-          <a:xfrm>
-            <a:off x="1243584" y="5413248"/>
-            <a:ext cx="9692640" cy="438912"/>
-          </a:xfrm>
-          <a:prstGeom prst="rect">
-            <a:avLst/>
-          </a:prstGeom>
-          <a:solidFill>
-            <a:srgbClr val="102033"/>
-          </a:solidFill>
-          <a:ln w="12700">
-            <a:solidFill>
-              <a:srgbClr val="1F5E6E"/>
-            </a:solidFill>
-          </a:ln>
-        </p:spPr>
-        <p:txBody>
-          <a:bodyPr wrap="square" lIns="508" tIns="508" rIns="508" bIns="508" anchor="ctr">
-            <a:normAutofit/>
-          </a:bodyPr>
-          <a:lstStyle/>
-          <a:p>
-            <a:pPr marL="0" indent="0" algn="ctr">
-              <a:buNone/>
-            </a:pPr>
-            <a:r>
-              <a:rPr sz="1220" b="1">
-                <a:solidFill>
-                  <a:srgbClr val="E5FBFF"/>
-                </a:solidFill>
-                <a:latin typeface="Microsoft YaHei"/>
-                <a:ea typeface="Microsoft YaHei"/>
-                <a:cs typeface="Microsoft YaHei"/>
-              </a:rPr>
-              <a:t>仓库中的 trace.csv 记录退休 PC、指令、rd 与写回值，可用于核对退休序列</a:t>
-            </a:r>
-            <a:endParaRPr sz="1220"/>
-          </a:p>
-        </p:txBody>
-      </p:sp>
-      <p:sp>
-        <p:nvSpPr>
-          <p:cNvPr id="27" name="Text 25">
-            <a:extLst>
-              <a:ext uri="{FF2B5EF4-FFF2-40B4-BE49-F238E27FC236}">
-                <a16:creationId xmlns:a16="http://schemas.microsoft.com/office/drawing/2014/main" id="{16106898-CD53-47BD-9EB3-7B12D6F0C827}"/>
+              <a:rPr sz="1230" b="1">
+                <a:solidFill>
+                  <a:srgbClr val="FFD6DD"/>
+                </a:solidFill>
+                <a:latin typeface="Microsoft YaHei"/>
+                <a:ea typeface="Microsoft YaHei"/>
+                <a:cs typeface="Microsoft YaHei"/>
+              </a:rPr>
+              <a:t>错误路径指令 valid 清零，因此不能写寄存器、存储器或 MMIO</a:t>
+            </a:r>
+            <a:endParaRPr sz="1230"/>
+          </a:p>
+        </p:txBody>
+      </p:sp>
+      <p:sp>
+        <p:nvSpPr>
+          <p:cNvPr id="34" name="Text 32">
+            <a:extLst>
+              <a:ext uri="{FF2B5EF4-FFF2-40B4-BE49-F238E27FC236}">
+                <a16:creationId xmlns:a16="http://schemas.microsoft.com/office/drawing/2014/main" id="{F3D0AD5C-23D9-42F2-B7A1-C1013E7D4539}"/>
               </a:ext>
             </a:extLst>
           </p:cNvPr>
@@ -6104,126 +6649,13 @@
               <a:t>RV32I · 5-STAGE · MICROCODE · HAZARD CONTROL</a:t>
             </a:r>
             <a:endParaRPr sz="800"/>
-          </a:p>
-        </p:txBody>
-      </p:sp>
-      <p:sp>
-        <p:nvSpPr>
-          <p:cNvPr id="29" name="矩形 28">
-            <a:extLst>
-              <a:ext uri="{FF2B5EF4-FFF2-40B4-BE49-F238E27FC236}">
-                <a16:creationId xmlns:a16="http://schemas.microsoft.com/office/drawing/2014/main" id="{D2A319F5-D857-4334-B0DB-90583DE68CF9}"/>
-              </a:ext>
-            </a:extLst>
-          </p:cNvPr>
-          <p:cNvSpPr>
-            <a:spLocks noGrp="1"/>
-          </p:cNvSpPr>
-          <p:nvPr/>
-        </p:nvSpPr>
-        <p:spPr>
-          <a:xfrm>
-            <a:off x="457200" y="1447800"/>
-            <a:ext cx="11277600" cy="4743450"/>
-          </a:xfrm>
-          <a:prstGeom prst="rect">
-            <a:avLst/>
-          </a:prstGeom>
-          <a:solidFill>
-            <a:srgbClr val="080E20"/>
-          </a:solidFill>
-          <a:ln w="0">
-            <a:solidFill>
-              <a:srgbClr val="080E20"/>
-            </a:solidFill>
-            <a:prstDash val="solid"/>
-          </a:ln>
-        </p:spPr>
-      </p:sp>
-      <p:pic>
-        <p:nvPicPr>
-          <p:cNvPr id="30" name="图片 61"/>
-          <p:cNvPicPr>
-            <a:picLocks noChangeAspect="1"/>
-          </p:cNvPicPr>
-          <p:nvPr/>
-        </p:nvPicPr>
-        <p:blipFill>
-          <a:blip r:embed="rId3"/>
-          <a:stretch/>
-        </p:blipFill>
-        <p:spPr>
-          <a:xfrm>
-            <a:off x="2603679" y="1666875"/>
-            <a:ext cx="6984642" cy="3876675"/>
-          </a:xfrm>
-          <a:prstGeom prst="rect">
-            <a:avLst/>
-          </a:prstGeom>
-        </p:spPr>
-      </p:pic>
-      <p:sp>
-        <p:nvSpPr>
-          <p:cNvPr id="31" name="矩形 31">
-            <a:extLst>
-              <a:ext uri="{FF2B5EF4-FFF2-40B4-BE49-F238E27FC236}">
-                <a16:creationId xmlns:a16="http://schemas.microsoft.com/office/drawing/2014/main" id="{9C758A0C-10DE-4D31-A85C-FF5A91A9E24D}"/>
-              </a:ext>
-            </a:extLst>
-          </p:cNvPr>
-          <p:cNvSpPr>
-            <a:spLocks noGrp="1"/>
-          </p:cNvSpPr>
-          <p:nvPr/>
-        </p:nvSpPr>
-        <p:spPr>
-          <a:xfrm>
-            <a:off x="1123950" y="5715000"/>
-            <a:ext cx="9944100" cy="323850"/>
-          </a:xfrm>
-          <a:prstGeom prst="rect">
-            <a:avLst/>
-          </a:prstGeom>
-          <a:noFill/>
-          <a:ln w="0">
-            <a:noFill/>
-            <a:prstDash val="solid"/>
-          </a:ln>
-        </p:spPr>
-        <p:txBody>
-          <a:bodyPr>
-            <a:normAutofit/>
-          </a:bodyPr>
-          <a:lstStyle/>
-          <a:p>
-            <a:pPr algn="ctr">
-              <a:defRPr sz="1275" b="1">
-                <a:solidFill>
-                  <a:srgbClr val="F4F7FF"/>
-                </a:solidFill>
-                <a:latin typeface="Microsoft YaHei"/>
-                <a:ea typeface="Microsoft YaHei"/>
-                <a:cs typeface="Microsoft YaHei"/>
-              </a:defRPr>
-            </a:pPr>
-            <a:r>
-              <a:rPr sz="1275" b="1">
-                <a:solidFill>
-                  <a:srgbClr val="F4F7FF"/>
-                </a:solidFill>
-                <a:latin typeface="Microsoft YaHei"/>
-                <a:ea typeface="Microsoft YaHei"/>
-                <a:cs typeface="Microsoft YaHei"/>
-              </a:rPr>
-              <a:t>load_use、hold_frontend、bubble_id_ex 同时有效；停顿计数增加 1，恢复后 x6=43</a:t>
-            </a:r>
           </a:p>
         </p:txBody>
       </p:sp>
     </p:spTree>
     <p:extLst>
       <p:ext uri="{BB962C8B-B14F-4D97-AF65-F5344CB8AC3E}">
-        <p14:creationId xmlns:p14="http://schemas.microsoft.com/office/powerpoint/2010/main" val="632833072"/>
+        <p14:creationId xmlns:p14="http://schemas.microsoft.com/office/powerpoint/2010/main" val="1076890114"/>
       </p:ext>
     </p:extLst>
   </p:cSld>
@@ -7672,7 +8104,7 @@
         </p:nvSpPr>
         <p:spPr>
           <a:xfrm>
-            <a:off x="457200" y="1447800"/>
+            <a:off x="423979" y="1475528"/>
             <a:ext cx="11277600" cy="4743450"/>
           </a:xfrm>
           <a:prstGeom prst="rect">
@@ -7688,29 +8120,14 @@
             <a:prstDash val="solid"/>
           </a:ln>
         </p:spPr>
-      </p:sp>
-      <p:pic>
-        <p:nvPicPr>
-          <p:cNvPr id="30" name="图片 61"/>
-          <p:cNvPicPr>
-            <a:picLocks noChangeAspect="1"/>
-          </p:cNvPicPr>
-          <p:nvPr/>
-        </p:nvPicPr>
-        <p:blipFill>
-          <a:blip r:embed="rId3"/>
-          <a:stretch/>
-        </p:blipFill>
-        <p:spPr>
-          <a:xfrm>
-            <a:off x="2837037" y="1666875"/>
-            <a:ext cx="6517926" cy="3876675"/>
-          </a:xfrm>
-          <a:prstGeom prst="rect">
-            <a:avLst/>
-          </a:prstGeom>
-        </p:spPr>
-      </p:pic>
+        <p:txBody>
+          <a:bodyPr/>
+          <a:lstStyle/>
+          <a:p>
+            <a:endParaRPr lang="zh-CN" altLang="en-US" dirty="0"/>
+          </a:p>
+        </p:txBody>
+      </p:sp>
       <p:sp>
         <p:nvSpPr>
           <p:cNvPr id="31" name="矩形 31">
@@ -7745,7 +8162,7 @@
           </a:bodyPr>
           <a:lstStyle/>
           <a:p>
-            <a:pPr algn="ctr">
+            <a:pPr>
               <a:defRPr sz="1275" b="1">
                 <a:solidFill>
                   <a:srgbClr val="F4F7FF"/>
@@ -7756,7 +8173,7 @@
               </a:defRPr>
             </a:pPr>
             <a:r>
-              <a:rPr sz="1275" b="1">
+              <a:rPr sz="1275" b="1" dirty="0" err="1">
                 <a:solidFill>
                   <a:srgbClr val="F4F7FF"/>
                 </a:solidFill>
@@ -7764,11 +8181,433 @@
                 <a:ea typeface="Microsoft YaHei"/>
                 <a:cs typeface="Microsoft YaHei"/>
               </a:rPr>
-              <a:t>两次 redirect_accept 均伴随 flush_if_id 与 flush_id_ex；错误路径 valid 被清零</a:t>
-            </a:r>
-          </a:p>
-        </p:txBody>
-      </p:sp>
+              <a:t>两次</a:t>
+            </a:r>
+            <a:r>
+              <a:rPr sz="1275" b="1" dirty="0">
+                <a:solidFill>
+                  <a:srgbClr val="F4F7FF"/>
+                </a:solidFill>
+                <a:latin typeface="Microsoft YaHei"/>
+                <a:ea typeface="Microsoft YaHei"/>
+                <a:cs typeface="Microsoft YaHei"/>
+              </a:rPr>
+              <a:t> </a:t>
+            </a:r>
+            <a:r>
+              <a:rPr sz="1275" b="1" dirty="0" err="1">
+                <a:solidFill>
+                  <a:srgbClr val="F4F7FF"/>
+                </a:solidFill>
+                <a:latin typeface="Microsoft YaHei"/>
+                <a:ea typeface="Microsoft YaHei"/>
+                <a:cs typeface="Microsoft YaHei"/>
+              </a:rPr>
+              <a:t>redirect_accept</a:t>
+            </a:r>
+            <a:r>
+              <a:rPr sz="1275" b="1" dirty="0">
+                <a:solidFill>
+                  <a:srgbClr val="F4F7FF"/>
+                </a:solidFill>
+                <a:latin typeface="Microsoft YaHei"/>
+                <a:ea typeface="Microsoft YaHei"/>
+                <a:cs typeface="Microsoft YaHei"/>
+              </a:rPr>
+              <a:t> </a:t>
+            </a:r>
+            <a:r>
+              <a:rPr sz="1275" b="1" dirty="0" err="1">
+                <a:solidFill>
+                  <a:srgbClr val="F4F7FF"/>
+                </a:solidFill>
+                <a:latin typeface="Microsoft YaHei"/>
+                <a:ea typeface="Microsoft YaHei"/>
+                <a:cs typeface="Microsoft YaHei"/>
+              </a:rPr>
+              <a:t>均伴随</a:t>
+            </a:r>
+            <a:r>
+              <a:rPr sz="1275" b="1" dirty="0">
+                <a:solidFill>
+                  <a:srgbClr val="F4F7FF"/>
+                </a:solidFill>
+                <a:latin typeface="Microsoft YaHei"/>
+                <a:ea typeface="Microsoft YaHei"/>
+                <a:cs typeface="Microsoft YaHei"/>
+              </a:rPr>
+              <a:t> </a:t>
+            </a:r>
+            <a:r>
+              <a:rPr sz="1275" b="1" dirty="0" err="1">
+                <a:solidFill>
+                  <a:srgbClr val="F4F7FF"/>
+                </a:solidFill>
+                <a:latin typeface="Microsoft YaHei"/>
+                <a:ea typeface="Microsoft YaHei"/>
+                <a:cs typeface="Microsoft YaHei"/>
+              </a:rPr>
+              <a:t>flush_if_id</a:t>
+            </a:r>
+            <a:r>
+              <a:rPr sz="1275" b="1" dirty="0">
+                <a:solidFill>
+                  <a:srgbClr val="F4F7FF"/>
+                </a:solidFill>
+                <a:latin typeface="Microsoft YaHei"/>
+                <a:ea typeface="Microsoft YaHei"/>
+                <a:cs typeface="Microsoft YaHei"/>
+              </a:rPr>
+              <a:t> 与 </a:t>
+            </a:r>
+            <a:r>
+              <a:rPr sz="1275" b="1" dirty="0" err="1">
+                <a:solidFill>
+                  <a:srgbClr val="F4F7FF"/>
+                </a:solidFill>
+                <a:latin typeface="Microsoft YaHei"/>
+                <a:ea typeface="Microsoft YaHei"/>
+                <a:cs typeface="Microsoft YaHei"/>
+              </a:rPr>
+              <a:t>flush_id_ex；错误路径</a:t>
+            </a:r>
+            <a:r>
+              <a:rPr sz="1275" b="1" dirty="0">
+                <a:solidFill>
+                  <a:srgbClr val="F4F7FF"/>
+                </a:solidFill>
+                <a:latin typeface="Microsoft YaHei"/>
+                <a:ea typeface="Microsoft YaHei"/>
+                <a:cs typeface="Microsoft YaHei"/>
+              </a:rPr>
+              <a:t> valid </a:t>
+            </a:r>
+            <a:r>
+              <a:rPr sz="1275" b="1" dirty="0" err="1">
+                <a:solidFill>
+                  <a:srgbClr val="F4F7FF"/>
+                </a:solidFill>
+                <a:latin typeface="Microsoft YaHei"/>
+                <a:ea typeface="Microsoft YaHei"/>
+                <a:cs typeface="Microsoft YaHei"/>
+              </a:rPr>
+              <a:t>被清零</a:t>
+            </a:r>
+            <a:endParaRPr sz="1275" b="1" dirty="0">
+              <a:solidFill>
+                <a:srgbClr val="F4F7FF"/>
+              </a:solidFill>
+              <a:latin typeface="Microsoft YaHei"/>
+              <a:ea typeface="Microsoft YaHei"/>
+              <a:cs typeface="Microsoft YaHei"/>
+            </a:endParaRPr>
+          </a:p>
+        </p:txBody>
+      </p:sp>
+      <p:sp>
+        <p:nvSpPr>
+          <p:cNvPr id="34" name="矩形 33">
+            <a:extLst>
+              <a:ext uri="{FF2B5EF4-FFF2-40B4-BE49-F238E27FC236}">
+                <a16:creationId xmlns:a16="http://schemas.microsoft.com/office/drawing/2014/main" id="{CB33F6BA-27B8-4E2C-AA3E-5EAAF35C7DB4}"/>
+              </a:ext>
+            </a:extLst>
+          </p:cNvPr>
+          <p:cNvSpPr>
+            <a:spLocks noGrp="1"/>
+          </p:cNvSpPr>
+          <p:nvPr/>
+        </p:nvSpPr>
+        <p:spPr>
+          <a:xfrm>
+            <a:off x="8845183" y="1389887"/>
+            <a:ext cx="3032874" cy="4632495"/>
+          </a:xfrm>
+          <a:prstGeom prst="rect">
+            <a:avLst/>
+          </a:prstGeom>
+          <a:noFill/>
+          <a:ln w="0">
+            <a:noFill/>
+            <a:prstDash val="solid"/>
+          </a:ln>
+        </p:spPr>
+        <p:txBody>
+          <a:bodyPr>
+            <a:normAutofit/>
+          </a:bodyPr>
+          <a:lstStyle/>
+          <a:p>
+            <a:pPr>
+              <a:defRPr sz="1275" b="1">
+                <a:solidFill>
+                  <a:srgbClr val="F4F7FF"/>
+                </a:solidFill>
+                <a:latin typeface="Microsoft YaHei"/>
+                <a:ea typeface="Microsoft YaHei"/>
+                <a:cs typeface="Microsoft YaHei"/>
+              </a:defRPr>
+            </a:pPr>
+            <a:r>
+              <a:rPr lang="en-US" altLang="zh-CN" sz="1400" b="1" dirty="0">
+                <a:solidFill>
+                  <a:srgbClr val="F4F7FF"/>
+                </a:solidFill>
+                <a:latin typeface="Microsoft YaHei"/>
+                <a:ea typeface="Microsoft YaHei"/>
+                <a:cs typeface="Microsoft YaHei"/>
+              </a:rPr>
+              <a:t>	</a:t>
+            </a:r>
+            <a:r>
+              <a:rPr lang="en-US" altLang="zh-CN" sz="1400" b="1" dirty="0" err="1">
+                <a:solidFill>
+                  <a:srgbClr val="F4F7FF"/>
+                </a:solidFill>
+                <a:latin typeface="Microsoft YaHei"/>
+                <a:ea typeface="Microsoft YaHei"/>
+                <a:cs typeface="Microsoft YaHei"/>
+              </a:rPr>
+              <a:t>beq</a:t>
+            </a:r>
+            <a:r>
+              <a:rPr lang="en-US" altLang="zh-CN" sz="1400" b="1" dirty="0">
+                <a:solidFill>
+                  <a:srgbClr val="F4F7FF"/>
+                </a:solidFill>
+                <a:latin typeface="Microsoft YaHei"/>
+                <a:ea typeface="Microsoft YaHei"/>
+                <a:cs typeface="Microsoft YaHei"/>
+              </a:rPr>
+              <a:t>  x6, x6, L1     </a:t>
+            </a:r>
+          </a:p>
+          <a:p>
+            <a:pPr>
+              <a:defRPr sz="1275" b="1">
+                <a:solidFill>
+                  <a:srgbClr val="F4F7FF"/>
+                </a:solidFill>
+                <a:latin typeface="Microsoft YaHei"/>
+                <a:ea typeface="Microsoft YaHei"/>
+                <a:cs typeface="Microsoft YaHei"/>
+              </a:defRPr>
+            </a:pPr>
+            <a:r>
+              <a:rPr lang="en-US" altLang="zh-CN" sz="1400" b="1" dirty="0">
+                <a:solidFill>
+                  <a:srgbClr val="F4F7FF"/>
+                </a:solidFill>
+                <a:latin typeface="Microsoft YaHei"/>
+                <a:ea typeface="Microsoft YaHei"/>
+                <a:cs typeface="Microsoft YaHei"/>
+              </a:rPr>
+              <a:t>	</a:t>
+            </a:r>
+            <a:r>
+              <a:rPr lang="en-US" altLang="zh-CN" sz="1400" b="1" dirty="0" err="1">
+                <a:solidFill>
+                  <a:srgbClr val="F4F7FF"/>
+                </a:solidFill>
+                <a:latin typeface="Microsoft YaHei"/>
+                <a:ea typeface="Microsoft YaHei"/>
+                <a:cs typeface="Microsoft YaHei"/>
+              </a:rPr>
+              <a:t>addi</a:t>
+            </a:r>
+            <a:r>
+              <a:rPr lang="en-US" altLang="zh-CN" sz="1400" b="1" dirty="0">
+                <a:solidFill>
+                  <a:srgbClr val="F4F7FF"/>
+                </a:solidFill>
+                <a:latin typeface="Microsoft YaHei"/>
+                <a:ea typeface="Microsoft YaHei"/>
+                <a:cs typeface="Microsoft YaHei"/>
+              </a:rPr>
+              <a:t> x9, x0, 99     </a:t>
+            </a:r>
+          </a:p>
+          <a:p>
+            <a:pPr>
+              <a:defRPr sz="1275" b="1">
+                <a:solidFill>
+                  <a:srgbClr val="F4F7FF"/>
+                </a:solidFill>
+                <a:latin typeface="Microsoft YaHei"/>
+                <a:ea typeface="Microsoft YaHei"/>
+                <a:cs typeface="Microsoft YaHei"/>
+              </a:defRPr>
+            </a:pPr>
+            <a:r>
+              <a:rPr lang="en-US" altLang="zh-CN" sz="1400" b="1" dirty="0">
+                <a:solidFill>
+                  <a:srgbClr val="F4F7FF"/>
+                </a:solidFill>
+                <a:latin typeface="Microsoft YaHei"/>
+                <a:ea typeface="Microsoft YaHei"/>
+                <a:cs typeface="Microsoft YaHei"/>
+              </a:rPr>
+              <a:t>        L1:     </a:t>
+            </a:r>
+            <a:r>
+              <a:rPr lang="en-US" altLang="zh-CN" sz="1400" b="1" dirty="0" err="1">
+                <a:solidFill>
+                  <a:srgbClr val="F4F7FF"/>
+                </a:solidFill>
+                <a:latin typeface="Microsoft YaHei"/>
+                <a:ea typeface="Microsoft YaHei"/>
+                <a:cs typeface="Microsoft YaHei"/>
+              </a:rPr>
+              <a:t>jal</a:t>
+            </a:r>
+            <a:r>
+              <a:rPr lang="en-US" altLang="zh-CN" sz="1400" b="1" dirty="0">
+                <a:solidFill>
+                  <a:srgbClr val="F4F7FF"/>
+                </a:solidFill>
+                <a:latin typeface="Microsoft YaHei"/>
+                <a:ea typeface="Microsoft YaHei"/>
+                <a:cs typeface="Microsoft YaHei"/>
+              </a:rPr>
+              <a:t>  x8, L2         </a:t>
+            </a:r>
+          </a:p>
+          <a:p>
+            <a:pPr>
+              <a:defRPr sz="1275" b="1">
+                <a:solidFill>
+                  <a:srgbClr val="F4F7FF"/>
+                </a:solidFill>
+                <a:latin typeface="Microsoft YaHei"/>
+                <a:ea typeface="Microsoft YaHei"/>
+                <a:cs typeface="Microsoft YaHei"/>
+              </a:defRPr>
+            </a:pPr>
+            <a:r>
+              <a:rPr lang="en-US" altLang="zh-CN" sz="1400" b="1" dirty="0">
+                <a:solidFill>
+                  <a:srgbClr val="F4F7FF"/>
+                </a:solidFill>
+                <a:latin typeface="Microsoft YaHei"/>
+                <a:ea typeface="Microsoft YaHei"/>
+                <a:cs typeface="Microsoft YaHei"/>
+              </a:rPr>
+              <a:t>	</a:t>
+            </a:r>
+            <a:r>
+              <a:rPr lang="en-US" altLang="zh-CN" sz="1400" b="1" dirty="0" err="1">
+                <a:solidFill>
+                  <a:srgbClr val="F4F7FF"/>
+                </a:solidFill>
+                <a:latin typeface="Microsoft YaHei"/>
+                <a:ea typeface="Microsoft YaHei"/>
+                <a:cs typeface="Microsoft YaHei"/>
+              </a:rPr>
+              <a:t>addi</a:t>
+            </a:r>
+            <a:r>
+              <a:rPr lang="en-US" altLang="zh-CN" sz="1400" b="1" dirty="0">
+                <a:solidFill>
+                  <a:srgbClr val="F4F7FF"/>
+                </a:solidFill>
+                <a:latin typeface="Microsoft YaHei"/>
+                <a:ea typeface="Microsoft YaHei"/>
+                <a:cs typeface="Microsoft YaHei"/>
+              </a:rPr>
+              <a:t> x9, x0, 99     </a:t>
+            </a:r>
+          </a:p>
+          <a:p>
+            <a:pPr>
+              <a:defRPr sz="1275" b="1">
+                <a:solidFill>
+                  <a:srgbClr val="F4F7FF"/>
+                </a:solidFill>
+                <a:latin typeface="Microsoft YaHei"/>
+                <a:ea typeface="Microsoft YaHei"/>
+                <a:cs typeface="Microsoft YaHei"/>
+              </a:defRPr>
+            </a:pPr>
+            <a:r>
+              <a:rPr lang="en-US" altLang="zh-CN" sz="1400" b="1" dirty="0">
+                <a:solidFill>
+                  <a:srgbClr val="F4F7FF"/>
+                </a:solidFill>
+                <a:latin typeface="Microsoft YaHei"/>
+                <a:ea typeface="Microsoft YaHei"/>
+                <a:cs typeface="Microsoft YaHei"/>
+              </a:rPr>
+              <a:t>        L2:     </a:t>
+            </a:r>
+            <a:r>
+              <a:rPr lang="en-US" altLang="zh-CN" sz="1400" b="1" dirty="0" err="1">
+                <a:solidFill>
+                  <a:srgbClr val="F4F7FF"/>
+                </a:solidFill>
+                <a:latin typeface="Microsoft YaHei"/>
+                <a:ea typeface="Microsoft YaHei"/>
+                <a:cs typeface="Microsoft YaHei"/>
+              </a:rPr>
+              <a:t>addi</a:t>
+            </a:r>
+            <a:r>
+              <a:rPr lang="en-US" altLang="zh-CN" sz="1400" b="1" dirty="0">
+                <a:solidFill>
+                  <a:srgbClr val="F4F7FF"/>
+                </a:solidFill>
+                <a:latin typeface="Microsoft YaHei"/>
+                <a:ea typeface="Microsoft YaHei"/>
+                <a:cs typeface="Microsoft YaHei"/>
+              </a:rPr>
+              <a:t> x7, x0, 1</a:t>
+            </a:r>
+            <a:endParaRPr lang="en-US" sz="1400" b="1" dirty="0">
+              <a:solidFill>
+                <a:srgbClr val="F4F7FF"/>
+              </a:solidFill>
+              <a:latin typeface="Microsoft YaHei"/>
+              <a:ea typeface="Microsoft YaHei"/>
+              <a:cs typeface="Microsoft YaHei"/>
+            </a:endParaRPr>
+          </a:p>
+        </p:txBody>
+      </p:sp>
+      <p:pic>
+        <p:nvPicPr>
+          <p:cNvPr id="36" name="图片 35">
+            <a:extLst>
+              <a:ext uri="{FF2B5EF4-FFF2-40B4-BE49-F238E27FC236}">
+                <a16:creationId xmlns:a16="http://schemas.microsoft.com/office/drawing/2014/main" id="{278A7078-761A-38F3-4473-288039785A22}"/>
+              </a:ext>
+            </a:extLst>
+          </p:cNvPr>
+          <p:cNvPicPr>
+            <a:picLocks noChangeAspect="1"/>
+          </p:cNvPicPr>
+          <p:nvPr/>
+        </p:nvPicPr>
+        <p:blipFill>
+          <a:blip r:embed="rId3">
+            <a:extLst>
+              <a:ext uri="{28A0092B-C50C-407E-A947-70E740481C1C}">
+                <a14:useLocalDpi xmlns:a14="http://schemas.microsoft.com/office/drawing/2010/main" val="0"/>
+              </a:ext>
+            </a:extLst>
+          </a:blip>
+          <a:stretch>
+            <a:fillRect/>
+          </a:stretch>
+        </p:blipFill>
+        <p:spPr>
+          <a:xfrm>
+            <a:off x="490421" y="1280160"/>
+            <a:ext cx="8123227" cy="4398819"/>
+          </a:xfrm>
+          <a:prstGeom prst="rect">
+            <a:avLst/>
+          </a:prstGeom>
+        </p:spPr>
+      </p:pic>
     </p:spTree>
     <p:extLst>
       <p:ext uri="{BB962C8B-B14F-4D97-AF65-F5344CB8AC3E}">
@@ -9421,7 +10260,7 @@
               </a:defRPr>
             </a:pPr>
             <a:r>
-              <a:rPr sz="1200" b="0">
+              <a:rPr sz="1200" b="0" dirty="0" err="1">
                 <a:solidFill>
                   <a:srgbClr val="A9B6D1"/>
                 </a:solidFill>
@@ -9429,8 +10268,38 @@
                 <a:ea typeface="Microsoft YaHei"/>
                 <a:cs typeface="Microsoft YaHei"/>
               </a:rPr>
-              <a:t>实验边界：cpu_core + 当拍响应存储器模型，用于定向触发流水线相关</a:t>
-            </a:r>
+              <a:t>实验边界：cpu_core</a:t>
+            </a:r>
+            <a:r>
+              <a:rPr sz="1200" b="0" dirty="0">
+                <a:solidFill>
+                  <a:srgbClr val="A9B6D1"/>
+                </a:solidFill>
+                <a:latin typeface="Microsoft YaHei"/>
+                <a:ea typeface="Microsoft YaHei"/>
+                <a:cs typeface="Microsoft YaHei"/>
+              </a:rPr>
+              <a:t> + </a:t>
+            </a:r>
+            <a:r>
+              <a:rPr sz="1200" b="0" dirty="0" err="1">
+                <a:solidFill>
+                  <a:srgbClr val="A9B6D1"/>
+                </a:solidFill>
+                <a:latin typeface="Microsoft YaHei"/>
+                <a:ea typeface="Microsoft YaHei"/>
+                <a:cs typeface="Microsoft YaHei"/>
+              </a:rPr>
+              <a:t>当拍响应存储器模型，用于定向触发流水线相关</a:t>
+            </a:r>
+            <a:endParaRPr sz="1200" b="0" dirty="0">
+              <a:solidFill>
+                <a:srgbClr val="A9B6D1"/>
+              </a:solidFill>
+              <a:latin typeface="Microsoft YaHei"/>
+              <a:ea typeface="Microsoft YaHei"/>
+              <a:cs typeface="Microsoft YaHei"/>
+            </a:endParaRPr>
           </a:p>
         </p:txBody>
       </p:sp>
@@ -19387,7 +20256,7 @@
               <a:buNone/>
             </a:pPr>
             <a:r>
-              <a:rPr sz="1150">
+              <a:rPr sz="1150" dirty="0" err="1">
                 <a:solidFill>
                   <a:srgbClr val="B9C8E6"/>
                 </a:solidFill>
@@ -19397,7 +20266,7 @@
               </a:rPr>
               <a:t>后继指令优先取得最近的尚未写回结果</a:t>
             </a:r>
-            <a:endParaRPr sz="1150"/>
+            <a:endParaRPr sz="1150" dirty="0"/>
           </a:p>
         </p:txBody>
       </p:sp>
@@ -20256,7 +21125,7 @@
           <p:cNvPr id="2" name="Text 0">
             <a:extLst>
               <a:ext uri="{FF2B5EF4-FFF2-40B4-BE49-F238E27FC236}">
-                <a16:creationId xmlns:a16="http://schemas.microsoft.com/office/drawing/2014/main" id="{6D1F8209-DAE2-446A-8BDD-54ED53E5F2E4}"/>
+                <a16:creationId xmlns:a16="http://schemas.microsoft.com/office/drawing/2014/main" id="{C7F3C7D6-B64A-473B-8BDA-180C12B2A208}"/>
               </a:ext>
             </a:extLst>
           </p:cNvPr>
@@ -20293,7 +21162,7 @@
                 <a:ea typeface="Microsoft YaHei"/>
                 <a:cs typeface="Microsoft YaHei"/>
               </a:rPr>
-              <a:t>停顿机制</a:t>
+              <a:t>定向仿真</a:t>
             </a:r>
             <a:endParaRPr sz="850"/>
           </a:p>
@@ -20304,7 +21173,7 @@
           <p:cNvPr id="3" name="Text 1">
             <a:extLst>
               <a:ext uri="{FF2B5EF4-FFF2-40B4-BE49-F238E27FC236}">
-                <a16:creationId xmlns:a16="http://schemas.microsoft.com/office/drawing/2014/main" id="{01F4A80C-1C22-4829-A2A9-17A2FA077A39}"/>
+                <a16:creationId xmlns:a16="http://schemas.microsoft.com/office/drawing/2014/main" id="{E63C0FCF-7925-45EB-A8F7-F4C4FC448EF0}"/>
               </a:ext>
             </a:extLst>
           </p:cNvPr>
@@ -20341,7 +21210,7 @@
                 <a:ea typeface="Microsoft YaHei"/>
                 <a:cs typeface="Microsoft YaHei"/>
               </a:rPr>
-              <a:t>load-use 与存储等待</a:t>
+              <a:t>双源前递仿真</a:t>
             </a:r>
             <a:endParaRPr sz="2400"/>
           </a:p>
@@ -20352,7 +21221,7 @@
           <p:cNvPr id="4" name="Text 2">
             <a:extLst>
               <a:ext uri="{FF2B5EF4-FFF2-40B4-BE49-F238E27FC236}">
-                <a16:creationId xmlns:a16="http://schemas.microsoft.com/office/drawing/2014/main" id="{E49318E5-98CF-45EB-AF8C-0A411FE0DAEF}"/>
+                <a16:creationId xmlns:a16="http://schemas.microsoft.com/office/drawing/2014/main" id="{D7D3FA3F-F9AE-4568-8F4D-1E5E777B740A}"/>
               </a:ext>
             </a:extLst>
           </p:cNvPr>
@@ -20389,7 +21258,7 @@
                 <a:ea typeface="Microsoft YaHei"/>
                 <a:cs typeface="Microsoft YaHei"/>
               </a:rPr>
-              <a:t>数据未产生时插入气泡，存储未响应时冻结后端</a:t>
+              <a:t>两个源操作数分别从 MEM/WB 与 EX/MEM 取得最新值</a:t>
             </a:r>
             <a:endParaRPr sz="1150"/>
           </a:p>
@@ -20400,18 +21269,18 @@
           <p:cNvPr id="5" name="Text 3">
             <a:extLst>
               <a:ext uri="{FF2B5EF4-FFF2-40B4-BE49-F238E27FC236}">
-                <a16:creationId xmlns:a16="http://schemas.microsoft.com/office/drawing/2014/main" id="{237391D6-140C-480F-BD0A-A79BA17F4E49}"/>
-              </a:ext>
-            </a:extLst>
-          </p:cNvPr>
-          <p:cNvSpPr>
-            <a:spLocks noGrp="1"/>
-          </p:cNvSpPr>
-          <p:nvPr/>
-        </p:nvSpPr>
-        <p:spPr>
-          <a:xfrm>
-            <a:off x="11137392" y="384048"/>
+                <a16:creationId xmlns:a16="http://schemas.microsoft.com/office/drawing/2014/main" id="{150759C2-1DA8-464B-A5FB-2A6E87F706DF}"/>
+              </a:ext>
+            </a:extLst>
+          </p:cNvPr>
+          <p:cNvSpPr>
+            <a:spLocks noGrp="1"/>
+          </p:cNvSpPr>
+          <p:nvPr/>
+        </p:nvSpPr>
+        <p:spPr>
+          <a:xfrm>
+            <a:off x="11137392" y="390185"/>
             <a:ext cx="502920" cy="228600"/>
           </a:xfrm>
           <a:prstGeom prst="rect">
@@ -20427,7 +21296,7 @@
               <a:buNone/>
             </a:pPr>
             <a:r>
-              <a:rPr sz="1000" b="1">
+              <a:rPr lang="en-US" sz="1000" b="1" dirty="0">
                 <a:solidFill>
                   <a:srgbClr val="8392B7"/>
                 </a:solidFill>
@@ -20437,7 +21306,7 @@
               </a:rPr>
               <a:t>08</a:t>
             </a:r>
-            <a:endParaRPr sz="1000"/>
+            <a:endParaRPr sz="1000" dirty="0"/>
           </a:p>
         </p:txBody>
       </p:sp>
@@ -20446,7 +21315,7 @@
           <p:cNvPr id="6" name="Shape 4">
             <a:extLst>
               <a:ext uri="{FF2B5EF4-FFF2-40B4-BE49-F238E27FC236}">
-                <a16:creationId xmlns:a16="http://schemas.microsoft.com/office/drawing/2014/main" id="{367B4B92-5938-4051-9510-2B72DDF6310E}"/>
+                <a16:creationId xmlns:a16="http://schemas.microsoft.com/office/drawing/2014/main" id="{345F7127-82E6-4DA2-9752-6B981C7A8701}"/>
               </a:ext>
             </a:extLst>
           </p:cNvPr>
@@ -20479,7 +21348,7 @@
           <p:cNvPr id="7" name="Shape 5">
             <a:extLst>
               <a:ext uri="{FF2B5EF4-FFF2-40B4-BE49-F238E27FC236}">
-                <a16:creationId xmlns:a16="http://schemas.microsoft.com/office/drawing/2014/main" id="{46A7EA47-53EF-4FBF-BB3B-B6BD9BA215F2}"/>
+                <a16:creationId xmlns:a16="http://schemas.microsoft.com/office/drawing/2014/main" id="{129B6E9C-8A40-46B8-AF3D-DA35A1311E80}"/>
               </a:ext>
             </a:extLst>
           </p:cNvPr>
@@ -20510,19 +21379,19 @@
           <p:cNvPr id="8" name="Text 6">
             <a:extLst>
               <a:ext uri="{FF2B5EF4-FFF2-40B4-BE49-F238E27FC236}">
-                <a16:creationId xmlns:a16="http://schemas.microsoft.com/office/drawing/2014/main" id="{6DC5EC19-2365-4CAA-9C04-829AF143104E}"/>
-              </a:ext>
-            </a:extLst>
-          </p:cNvPr>
-          <p:cNvSpPr>
-            <a:spLocks noGrp="1"/>
-          </p:cNvSpPr>
-          <p:nvPr/>
-        </p:nvSpPr>
-        <p:spPr>
-          <a:xfrm>
-            <a:off x="786384" y="1755648"/>
-            <a:ext cx="5120640" cy="1005840"/>
+                <a16:creationId xmlns:a16="http://schemas.microsoft.com/office/drawing/2014/main" id="{A2AE9773-8BB2-49A2-9F86-1E224F0CA7AA}"/>
+              </a:ext>
+            </a:extLst>
+          </p:cNvPr>
+          <p:cNvSpPr>
+            <a:spLocks noGrp="1"/>
+          </p:cNvSpPr>
+          <p:nvPr/>
+        </p:nvSpPr>
+        <p:spPr>
+          <a:xfrm>
+            <a:off x="786384" y="1783080"/>
+            <a:ext cx="2011680" cy="640080"/>
           </a:xfrm>
           <a:prstGeom prst="rect">
             <a:avLst/>
@@ -20532,12 +21401,84 @@
           </a:solidFill>
           <a:ln w="15240">
             <a:solidFill>
-              <a:srgbClr val="3B82F6"/>
+              <a:srgbClr val="34D399"/>
             </a:solidFill>
           </a:ln>
         </p:spPr>
         <p:txBody>
-          <a:bodyPr wrap="square" lIns="1651" tIns="1651" rIns="1651" bIns="1651" anchor="ctr">
+          <a:bodyPr wrap="square" lIns="1016" tIns="1016" rIns="1016" bIns="1016" anchor="ctr">
+            <a:normAutofit/>
+          </a:bodyPr>
+          <a:lstStyle/>
+          <a:p>
+            <a:pPr marL="0" indent="0" algn="ctr">
+              <a:buNone/>
+            </a:pPr>
+            <a:r>
+              <a:rPr sz="1070" b="1">
+                <a:solidFill>
+                  <a:srgbClr val="F7FAFF"/>
+                </a:solidFill>
+                <a:latin typeface="Microsoft YaHei"/>
+                <a:ea typeface="Microsoft YaHei"/>
+                <a:cs typeface="Microsoft YaHei"/>
+              </a:rPr>
+              <a:t>ALU 前递</a:t>
+            </a:r>
+            <a:endParaRPr sz="1070"/>
+          </a:p>
+          <a:p>
+            <a:pPr marL="0" indent="0" algn="ctr">
+              <a:buNone/>
+            </a:pPr>
+            <a:r>
+              <a:rPr sz="1070" b="1">
+                <a:solidFill>
+                  <a:srgbClr val="F7FAFF"/>
+                </a:solidFill>
+                <a:latin typeface="Microsoft YaHei"/>
+                <a:ea typeface="Microsoft YaHei"/>
+                <a:cs typeface="Microsoft YaHei"/>
+              </a:rPr>
+              <a:t>forward_a / forward_b</a:t>
+            </a:r>
+            <a:endParaRPr sz="1070"/>
+          </a:p>
+        </p:txBody>
+      </p:sp>
+      <p:sp>
+        <p:nvSpPr>
+          <p:cNvPr id="9" name="Text 7">
+            <a:extLst>
+              <a:ext uri="{FF2B5EF4-FFF2-40B4-BE49-F238E27FC236}">
+                <a16:creationId xmlns:a16="http://schemas.microsoft.com/office/drawing/2014/main" id="{73FC4BE2-ABE8-4EE0-8EDE-482C67C56F06}"/>
+              </a:ext>
+            </a:extLst>
+          </p:cNvPr>
+          <p:cNvSpPr>
+            <a:spLocks noGrp="1"/>
+          </p:cNvSpPr>
+          <p:nvPr/>
+        </p:nvSpPr>
+        <p:spPr>
+          <a:xfrm>
+            <a:off x="2962656" y="1783080"/>
+            <a:ext cx="3703320" cy="640080"/>
+          </a:xfrm>
+          <a:prstGeom prst="rect">
+            <a:avLst/>
+          </a:prstGeom>
+          <a:solidFill>
+            <a:srgbClr val="10172A"/>
+          </a:solidFill>
+          <a:ln w="12700">
+            <a:solidFill>
+              <a:srgbClr val="2C3D61"/>
+            </a:solidFill>
+          </a:ln>
+        </p:spPr>
+        <p:txBody>
+          <a:bodyPr wrap="square" lIns="1143" tIns="1143" rIns="1143" bIns="1143" anchor="ctr">
             <a:normAutofit/>
           </a:bodyPr>
           <a:lstStyle/>
@@ -20546,174 +21487,17 @@
               <a:buNone/>
             </a:pPr>
             <a:r>
-              <a:rPr sz="1140" b="1">
-                <a:solidFill>
-                  <a:srgbClr val="F7FAFF"/>
-                </a:solidFill>
-                <a:latin typeface="Microsoft YaHei"/>
-                <a:ea typeface="Microsoft YaHei"/>
-                <a:cs typeface="Microsoft YaHei"/>
-              </a:rPr>
-              <a:t>  load-use</a:t>
-            </a:r>
-            <a:endParaRPr sz="1140"/>
-          </a:p>
-          <a:p>
-            <a:pPr marL="0" indent="0" algn="l">
-              <a:buNone/>
-            </a:pPr>
-            <a:r>
-              <a:rPr sz="1140" b="1">
-                <a:solidFill>
-                  <a:srgbClr val="F7FAFF"/>
-                </a:solidFill>
-                <a:latin typeface="Microsoft YaHei"/>
-                <a:ea typeface="Microsoft YaHei"/>
-                <a:cs typeface="Microsoft YaHei"/>
-              </a:rPr>
-              <a:t>  保持 PC 与 IF/ID</a:t>
-            </a:r>
-            <a:endParaRPr sz="1140"/>
-          </a:p>
-          <a:p>
-            <a:pPr marL="0" indent="0" algn="l">
-              <a:buNone/>
-            </a:pPr>
-            <a:r>
-              <a:rPr sz="1140" b="1">
-                <a:solidFill>
-                  <a:srgbClr val="F7FAFF"/>
-                </a:solidFill>
-                <a:latin typeface="Microsoft YaHei"/>
-                <a:ea typeface="Microsoft YaHei"/>
-                <a:cs typeface="Microsoft YaHei"/>
-              </a:rPr>
-              <a:t>  向 ID/EX 插入 1 个气泡</a:t>
-            </a:r>
-            <a:endParaRPr sz="1140"/>
-          </a:p>
-          <a:p>
-            <a:pPr marL="0" indent="0" algn="l">
-              <a:buNone/>
-            </a:pPr>
-            <a:r>
-              <a:rPr sz="1140" b="1">
-                <a:solidFill>
-                  <a:srgbClr val="F7FAFF"/>
-                </a:solidFill>
-                <a:latin typeface="Microsoft YaHei"/>
-                <a:ea typeface="Microsoft YaHei"/>
-                <a:cs typeface="Microsoft YaHei"/>
-              </a:rPr>
-              <a:t>  数据到 MEM/WB 后前递给消费者  </a:t>
-            </a:r>
-            <a:endParaRPr sz="1140"/>
-          </a:p>
-        </p:txBody>
-      </p:sp>
-      <p:sp>
-        <p:nvSpPr>
-          <p:cNvPr id="9" name="Text 7">
-            <a:extLst>
-              <a:ext uri="{FF2B5EF4-FFF2-40B4-BE49-F238E27FC236}">
-                <a16:creationId xmlns:a16="http://schemas.microsoft.com/office/drawing/2014/main" id="{9043C63C-AC8E-4BDE-8C2A-165A20D3BA4B}"/>
-              </a:ext>
-            </a:extLst>
-          </p:cNvPr>
-          <p:cNvSpPr>
-            <a:spLocks noGrp="1"/>
-          </p:cNvSpPr>
-          <p:nvPr/>
-        </p:nvSpPr>
-        <p:spPr>
-          <a:xfrm>
-            <a:off x="6291072" y="1755648"/>
-            <a:ext cx="5120640" cy="1005840"/>
-          </a:xfrm>
-          <a:prstGeom prst="rect">
-            <a:avLst/>
-          </a:prstGeom>
-          <a:solidFill>
-            <a:srgbClr val="201B12"/>
-          </a:solidFill>
-          <a:ln w="15240">
-            <a:solidFill>
-              <a:srgbClr val="F59E0B"/>
-            </a:solidFill>
-          </a:ln>
-        </p:spPr>
-        <p:txBody>
-          <a:bodyPr wrap="square" lIns="1651" tIns="1651" rIns="1651" bIns="1651" anchor="ctr">
-            <a:normAutofit/>
-          </a:bodyPr>
-          <a:lstStyle/>
-          <a:p>
-            <a:pPr marL="0" indent="0" algn="l">
-              <a:buNone/>
-            </a:pPr>
-            <a:r>
-              <a:rPr sz="1140" b="1">
-                <a:solidFill>
-                  <a:srgbClr val="FFF2D2"/>
-                </a:solidFill>
-                <a:latin typeface="Microsoft YaHei"/>
-                <a:ea typeface="Microsoft YaHei"/>
-                <a:cs typeface="Microsoft YaHei"/>
-              </a:rPr>
-              <a:t>  存储器等待</a:t>
-            </a:r>
-            <a:endParaRPr sz="1140"/>
-          </a:p>
-          <a:p>
-            <a:pPr marL="0" indent="0" algn="l">
-              <a:buNone/>
-            </a:pPr>
-            <a:r>
-              <a:rPr sz="1140" b="1">
-                <a:solidFill>
-                  <a:srgbClr val="FFF2D2"/>
-                </a:solidFill>
-                <a:latin typeface="Microsoft YaHei"/>
-                <a:ea typeface="Microsoft YaHei"/>
-                <a:cs typeface="Microsoft YaHei"/>
-              </a:rPr>
-              <a:t>  保持 EX/MEM 和请求信息</a:t>
-            </a:r>
-            <a:endParaRPr sz="1140"/>
-          </a:p>
-          <a:p>
-            <a:pPr marL="0" indent="0" algn="l">
-              <a:buNone/>
-            </a:pPr>
-            <a:r>
-              <a:rPr sz="1140" b="1">
-                <a:solidFill>
-                  <a:srgbClr val="FFF2D2"/>
-                </a:solidFill>
-                <a:latin typeface="Microsoft YaHei"/>
-                <a:ea typeface="Microsoft YaHei"/>
-                <a:cs typeface="Microsoft YaHei"/>
-              </a:rPr>
-              <a:t>  MEM/WB 注入气泡，避免重复退休</a:t>
-            </a:r>
-            <a:endParaRPr sz="1140"/>
-          </a:p>
-          <a:p>
-            <a:pPr marL="0" indent="0" algn="l">
-              <a:buNone/>
-            </a:pPr>
-            <a:r>
-              <a:rPr sz="1140" b="1">
-                <a:solidFill>
-                  <a:srgbClr val="FFF2D2"/>
-                </a:solidFill>
-                <a:latin typeface="Microsoft YaHei"/>
-                <a:ea typeface="Microsoft YaHei"/>
-                <a:cs typeface="Microsoft YaHei"/>
-              </a:rPr>
-              <a:t>  ready 到达后只提交一次</a:t>
-            </a:r>
-            <a:endParaRPr sz="1140"/>
+              <a:rPr sz="1080">
+                <a:solidFill>
+                  <a:srgbClr val="B9C8E6"/>
+                </a:solidFill>
+                <a:latin typeface="Microsoft YaHei"/>
+                <a:ea typeface="Microsoft YaHei"/>
+                <a:cs typeface="Microsoft YaHei"/>
+              </a:rPr>
+              <a:t>  EX/MEM 命中时直接送入 ALU，后继指令无需等待写回</a:t>
+            </a:r>
+            <a:endParaRPr sz="1080"/>
           </a:p>
         </p:txBody>
       </p:sp>
@@ -20722,450 +21506,18 @@
           <p:cNvPr id="10" name="Text 8">
             <a:extLst>
               <a:ext uri="{FF2B5EF4-FFF2-40B4-BE49-F238E27FC236}">
-                <a16:creationId xmlns:a16="http://schemas.microsoft.com/office/drawing/2014/main" id="{2E869CA9-29B0-45E8-A3D5-158523B848C8}"/>
-              </a:ext>
-            </a:extLst>
-          </p:cNvPr>
-          <p:cNvSpPr>
-            <a:spLocks noGrp="1"/>
-          </p:cNvSpPr>
-          <p:nvPr/>
-        </p:nvSpPr>
-        <p:spPr>
-          <a:xfrm>
-            <a:off x="841248" y="3310128"/>
-            <a:ext cx="502920" cy="164592"/>
-          </a:xfrm>
-          <a:prstGeom prst="rect">
-            <a:avLst/>
-          </a:prstGeom>
-          <a:noFill/>
-        </p:spPr>
-        <p:txBody>
-          <a:bodyPr wrap="square" lIns="0" tIns="0" rIns="0" bIns="0" anchor="t">
-            <a:normAutofit/>
-          </a:bodyPr>
-          <a:lstStyle/>
-          <a:p>
-            <a:pPr marL="0" indent="0" algn="l">
-              <a:buNone/>
-            </a:pPr>
-            <a:r>
-              <a:rPr sz="880">
-                <a:solidFill>
-                  <a:srgbClr val="8392B7"/>
-                </a:solidFill>
-                <a:latin typeface="Microsoft YaHei"/>
-                <a:ea typeface="Microsoft YaHei"/>
-                <a:cs typeface="Microsoft YaHei"/>
-              </a:rPr>
-              <a:t>周期</a:t>
-            </a:r>
-            <a:endParaRPr sz="880"/>
-          </a:p>
-        </p:txBody>
-      </p:sp>
-      <p:sp>
-        <p:nvSpPr>
-          <p:cNvPr id="11" name="Text 9">
-            <a:extLst>
-              <a:ext uri="{FF2B5EF4-FFF2-40B4-BE49-F238E27FC236}">
-                <a16:creationId xmlns:a16="http://schemas.microsoft.com/office/drawing/2014/main" id="{F83C6AA2-FB52-46C4-8306-81BDBAD84D18}"/>
-              </a:ext>
-            </a:extLst>
-          </p:cNvPr>
-          <p:cNvSpPr>
-            <a:spLocks noGrp="1"/>
-          </p:cNvSpPr>
-          <p:nvPr/>
-        </p:nvSpPr>
-        <p:spPr>
-          <a:xfrm>
-            <a:off x="1874520" y="3310128"/>
-            <a:ext cx="274320" cy="164592"/>
-          </a:xfrm>
-          <a:prstGeom prst="rect">
-            <a:avLst/>
-          </a:prstGeom>
-          <a:noFill/>
-        </p:spPr>
-        <p:txBody>
-          <a:bodyPr wrap="square" lIns="0" tIns="0" rIns="0" bIns="0" anchor="t">
-            <a:normAutofit/>
-          </a:bodyPr>
-          <a:lstStyle/>
-          <a:p>
-            <a:pPr marL="0" indent="0" algn="ctr">
-              <a:buNone/>
-            </a:pPr>
-            <a:r>
-              <a:rPr sz="880">
-                <a:solidFill>
-                  <a:srgbClr val="8392B7"/>
-                </a:solidFill>
-                <a:latin typeface="Microsoft YaHei"/>
-                <a:ea typeface="Microsoft YaHei"/>
-                <a:cs typeface="Microsoft YaHei"/>
-              </a:rPr>
-              <a:t>1</a:t>
-            </a:r>
-            <a:endParaRPr sz="880"/>
-          </a:p>
-        </p:txBody>
-      </p:sp>
-      <p:sp>
-        <p:nvSpPr>
-          <p:cNvPr id="12" name="Text 10">
-            <a:extLst>
-              <a:ext uri="{FF2B5EF4-FFF2-40B4-BE49-F238E27FC236}">
-                <a16:creationId xmlns:a16="http://schemas.microsoft.com/office/drawing/2014/main" id="{C96249A5-0C74-4E1A-9254-A03C07A9A17A}"/>
-              </a:ext>
-            </a:extLst>
-          </p:cNvPr>
-          <p:cNvSpPr>
-            <a:spLocks noGrp="1"/>
-          </p:cNvSpPr>
-          <p:nvPr/>
-        </p:nvSpPr>
-        <p:spPr>
-          <a:xfrm>
-            <a:off x="2971800" y="3310128"/>
-            <a:ext cx="274320" cy="164592"/>
-          </a:xfrm>
-          <a:prstGeom prst="rect">
-            <a:avLst/>
-          </a:prstGeom>
-          <a:noFill/>
-        </p:spPr>
-        <p:txBody>
-          <a:bodyPr wrap="square" lIns="0" tIns="0" rIns="0" bIns="0" anchor="t">
-            <a:normAutofit/>
-          </a:bodyPr>
-          <a:lstStyle/>
-          <a:p>
-            <a:pPr marL="0" indent="0" algn="ctr">
-              <a:buNone/>
-            </a:pPr>
-            <a:r>
-              <a:rPr sz="880">
-                <a:solidFill>
-                  <a:srgbClr val="8392B7"/>
-                </a:solidFill>
-                <a:latin typeface="Microsoft YaHei"/>
-                <a:ea typeface="Microsoft YaHei"/>
-                <a:cs typeface="Microsoft YaHei"/>
-              </a:rPr>
-              <a:t>2</a:t>
-            </a:r>
-            <a:endParaRPr sz="880"/>
-          </a:p>
-        </p:txBody>
-      </p:sp>
-      <p:sp>
-        <p:nvSpPr>
-          <p:cNvPr id="13" name="Text 11">
-            <a:extLst>
-              <a:ext uri="{FF2B5EF4-FFF2-40B4-BE49-F238E27FC236}">
-                <a16:creationId xmlns:a16="http://schemas.microsoft.com/office/drawing/2014/main" id="{5CBFEF2C-B6D9-46F2-A4AA-0A33AB2EAEF6}"/>
-              </a:ext>
-            </a:extLst>
-          </p:cNvPr>
-          <p:cNvSpPr>
-            <a:spLocks noGrp="1"/>
-          </p:cNvSpPr>
-          <p:nvPr/>
-        </p:nvSpPr>
-        <p:spPr>
-          <a:xfrm>
-            <a:off x="4069080" y="3310128"/>
-            <a:ext cx="274320" cy="164592"/>
-          </a:xfrm>
-          <a:prstGeom prst="rect">
-            <a:avLst/>
-          </a:prstGeom>
-          <a:noFill/>
-        </p:spPr>
-        <p:txBody>
-          <a:bodyPr wrap="square" lIns="0" tIns="0" rIns="0" bIns="0" anchor="t">
-            <a:normAutofit/>
-          </a:bodyPr>
-          <a:lstStyle/>
-          <a:p>
-            <a:pPr marL="0" indent="0" algn="ctr">
-              <a:buNone/>
-            </a:pPr>
-            <a:r>
-              <a:rPr sz="880">
-                <a:solidFill>
-                  <a:srgbClr val="8392B7"/>
-                </a:solidFill>
-                <a:latin typeface="Microsoft YaHei"/>
-                <a:ea typeface="Microsoft YaHei"/>
-                <a:cs typeface="Microsoft YaHei"/>
-              </a:rPr>
-              <a:t>3</a:t>
-            </a:r>
-            <a:endParaRPr sz="880"/>
-          </a:p>
-        </p:txBody>
-      </p:sp>
-      <p:sp>
-        <p:nvSpPr>
-          <p:cNvPr id="14" name="Text 12">
-            <a:extLst>
-              <a:ext uri="{FF2B5EF4-FFF2-40B4-BE49-F238E27FC236}">
-                <a16:creationId xmlns:a16="http://schemas.microsoft.com/office/drawing/2014/main" id="{4B2B9F0D-AFBE-4111-9E1F-D06EE42943FA}"/>
-              </a:ext>
-            </a:extLst>
-          </p:cNvPr>
-          <p:cNvSpPr>
-            <a:spLocks noGrp="1"/>
-          </p:cNvSpPr>
-          <p:nvPr/>
-        </p:nvSpPr>
-        <p:spPr>
-          <a:xfrm>
-            <a:off x="5166360" y="3310128"/>
-            <a:ext cx="274320" cy="164592"/>
-          </a:xfrm>
-          <a:prstGeom prst="rect">
-            <a:avLst/>
-          </a:prstGeom>
-          <a:noFill/>
-        </p:spPr>
-        <p:txBody>
-          <a:bodyPr wrap="square" lIns="0" tIns="0" rIns="0" bIns="0" anchor="t">
-            <a:normAutofit/>
-          </a:bodyPr>
-          <a:lstStyle/>
-          <a:p>
-            <a:pPr marL="0" indent="0" algn="ctr">
-              <a:buNone/>
-            </a:pPr>
-            <a:r>
-              <a:rPr sz="880">
-                <a:solidFill>
-                  <a:srgbClr val="8392B7"/>
-                </a:solidFill>
-                <a:latin typeface="Microsoft YaHei"/>
-                <a:ea typeface="Microsoft YaHei"/>
-                <a:cs typeface="Microsoft YaHei"/>
-              </a:rPr>
-              <a:t>4</a:t>
-            </a:r>
-            <a:endParaRPr sz="880"/>
-          </a:p>
-        </p:txBody>
-      </p:sp>
-      <p:sp>
-        <p:nvSpPr>
-          <p:cNvPr id="15" name="Text 13">
-            <a:extLst>
-              <a:ext uri="{FF2B5EF4-FFF2-40B4-BE49-F238E27FC236}">
-                <a16:creationId xmlns:a16="http://schemas.microsoft.com/office/drawing/2014/main" id="{EE89C862-A5C3-4C39-8937-C9C406CCEFE5}"/>
-              </a:ext>
-            </a:extLst>
-          </p:cNvPr>
-          <p:cNvSpPr>
-            <a:spLocks noGrp="1"/>
-          </p:cNvSpPr>
-          <p:nvPr/>
-        </p:nvSpPr>
-        <p:spPr>
-          <a:xfrm>
-            <a:off x="6263640" y="3310128"/>
-            <a:ext cx="274320" cy="164592"/>
-          </a:xfrm>
-          <a:prstGeom prst="rect">
-            <a:avLst/>
-          </a:prstGeom>
-          <a:noFill/>
-        </p:spPr>
-        <p:txBody>
-          <a:bodyPr wrap="square" lIns="0" tIns="0" rIns="0" bIns="0" anchor="t">
-            <a:normAutofit/>
-          </a:bodyPr>
-          <a:lstStyle/>
-          <a:p>
-            <a:pPr marL="0" indent="0" algn="ctr">
-              <a:buNone/>
-            </a:pPr>
-            <a:r>
-              <a:rPr sz="880">
-                <a:solidFill>
-                  <a:srgbClr val="8392B7"/>
-                </a:solidFill>
-                <a:latin typeface="Microsoft YaHei"/>
-                <a:ea typeface="Microsoft YaHei"/>
-                <a:cs typeface="Microsoft YaHei"/>
-              </a:rPr>
-              <a:t>5</a:t>
-            </a:r>
-            <a:endParaRPr sz="880"/>
-          </a:p>
-        </p:txBody>
-      </p:sp>
-      <p:sp>
-        <p:nvSpPr>
-          <p:cNvPr id="16" name="Text 14">
-            <a:extLst>
-              <a:ext uri="{FF2B5EF4-FFF2-40B4-BE49-F238E27FC236}">
-                <a16:creationId xmlns:a16="http://schemas.microsoft.com/office/drawing/2014/main" id="{05EC5D6D-487A-4335-AC2B-2577F6AF5C2F}"/>
-              </a:ext>
-            </a:extLst>
-          </p:cNvPr>
-          <p:cNvSpPr>
-            <a:spLocks noGrp="1"/>
-          </p:cNvSpPr>
-          <p:nvPr/>
-        </p:nvSpPr>
-        <p:spPr>
-          <a:xfrm>
-            <a:off x="7360920" y="3310128"/>
-            <a:ext cx="274320" cy="164592"/>
-          </a:xfrm>
-          <a:prstGeom prst="rect">
-            <a:avLst/>
-          </a:prstGeom>
-          <a:noFill/>
-        </p:spPr>
-        <p:txBody>
-          <a:bodyPr wrap="square" lIns="0" tIns="0" rIns="0" bIns="0" anchor="t">
-            <a:normAutofit/>
-          </a:bodyPr>
-          <a:lstStyle/>
-          <a:p>
-            <a:pPr marL="0" indent="0" algn="ctr">
-              <a:buNone/>
-            </a:pPr>
-            <a:r>
-              <a:rPr sz="880">
-                <a:solidFill>
-                  <a:srgbClr val="8392B7"/>
-                </a:solidFill>
-                <a:latin typeface="Microsoft YaHei"/>
-                <a:ea typeface="Microsoft YaHei"/>
-                <a:cs typeface="Microsoft YaHei"/>
-              </a:rPr>
-              <a:t>6</a:t>
-            </a:r>
-            <a:endParaRPr sz="880"/>
-          </a:p>
-        </p:txBody>
-      </p:sp>
-      <p:sp>
-        <p:nvSpPr>
-          <p:cNvPr id="17" name="Text 15">
-            <a:extLst>
-              <a:ext uri="{FF2B5EF4-FFF2-40B4-BE49-F238E27FC236}">
-                <a16:creationId xmlns:a16="http://schemas.microsoft.com/office/drawing/2014/main" id="{3A5CEE3A-3FF3-41B4-90DD-2D40B07CC68D}"/>
-              </a:ext>
-            </a:extLst>
-          </p:cNvPr>
-          <p:cNvSpPr>
-            <a:spLocks noGrp="1"/>
-          </p:cNvSpPr>
-          <p:nvPr/>
-        </p:nvSpPr>
-        <p:spPr>
-          <a:xfrm>
-            <a:off x="8458200" y="3310128"/>
-            <a:ext cx="274320" cy="164592"/>
-          </a:xfrm>
-          <a:prstGeom prst="rect">
-            <a:avLst/>
-          </a:prstGeom>
-          <a:noFill/>
-        </p:spPr>
-        <p:txBody>
-          <a:bodyPr wrap="square" lIns="0" tIns="0" rIns="0" bIns="0" anchor="t">
-            <a:normAutofit/>
-          </a:bodyPr>
-          <a:lstStyle/>
-          <a:p>
-            <a:pPr marL="0" indent="0" algn="ctr">
-              <a:buNone/>
-            </a:pPr>
-            <a:r>
-              <a:rPr sz="880">
-                <a:solidFill>
-                  <a:srgbClr val="8392B7"/>
-                </a:solidFill>
-                <a:latin typeface="Microsoft YaHei"/>
-                <a:ea typeface="Microsoft YaHei"/>
-                <a:cs typeface="Microsoft YaHei"/>
-              </a:rPr>
-              <a:t>7</a:t>
-            </a:r>
-            <a:endParaRPr sz="880"/>
-          </a:p>
-        </p:txBody>
-      </p:sp>
-      <p:sp>
-        <p:nvSpPr>
-          <p:cNvPr id="18" name="Text 16">
-            <a:extLst>
-              <a:ext uri="{FF2B5EF4-FFF2-40B4-BE49-F238E27FC236}">
-                <a16:creationId xmlns:a16="http://schemas.microsoft.com/office/drawing/2014/main" id="{254B7998-36A6-4E94-B7A2-E070F98B8733}"/>
-              </a:ext>
-            </a:extLst>
-          </p:cNvPr>
-          <p:cNvSpPr>
-            <a:spLocks noGrp="1"/>
-          </p:cNvSpPr>
-          <p:nvPr/>
-        </p:nvSpPr>
-        <p:spPr>
-          <a:xfrm>
-            <a:off x="841248" y="3675888"/>
-            <a:ext cx="731520" cy="182880"/>
-          </a:xfrm>
-          <a:prstGeom prst="rect">
-            <a:avLst/>
-          </a:prstGeom>
-          <a:noFill/>
-        </p:spPr>
-        <p:txBody>
-          <a:bodyPr wrap="square" lIns="0" tIns="0" rIns="0" bIns="0" anchor="t">
-            <a:normAutofit/>
-          </a:bodyPr>
-          <a:lstStyle/>
-          <a:p>
-            <a:pPr marL="0" indent="0" algn="l">
-              <a:buNone/>
-            </a:pPr>
-            <a:r>
-              <a:rPr sz="920">
-                <a:solidFill>
-                  <a:srgbClr val="B9C8E6"/>
-                </a:solidFill>
-                <a:latin typeface="Microsoft YaHei"/>
-                <a:ea typeface="Microsoft YaHei"/>
-                <a:cs typeface="Microsoft YaHei"/>
-              </a:rPr>
-              <a:t>LW x1</a:t>
-            </a:r>
-            <a:endParaRPr sz="920"/>
-          </a:p>
-        </p:txBody>
-      </p:sp>
-      <p:sp>
-        <p:nvSpPr>
-          <p:cNvPr id="19" name="Text 17">
-            <a:extLst>
-              <a:ext uri="{FF2B5EF4-FFF2-40B4-BE49-F238E27FC236}">
-                <a16:creationId xmlns:a16="http://schemas.microsoft.com/office/drawing/2014/main" id="{51793C1A-64C5-4558-8DD3-7847BFB29D15}"/>
-              </a:ext>
-            </a:extLst>
-          </p:cNvPr>
-          <p:cNvSpPr>
-            <a:spLocks noGrp="1"/>
-          </p:cNvSpPr>
-          <p:nvPr/>
-        </p:nvSpPr>
-        <p:spPr>
-          <a:xfrm>
-            <a:off x="1737360" y="3639312"/>
+                <a16:creationId xmlns:a16="http://schemas.microsoft.com/office/drawing/2014/main" id="{3304DBFD-CC5C-4CEA-8034-149795372FA3}"/>
+              </a:ext>
+            </a:extLst>
+          </p:cNvPr>
+          <p:cNvSpPr>
+            <a:spLocks noGrp="1"/>
+          </p:cNvSpPr>
+          <p:nvPr/>
+        </p:nvSpPr>
+        <p:spPr>
+          <a:xfrm>
+            <a:off x="6995160" y="1984248"/>
             <a:ext cx="640080" cy="237744"/>
           </a:xfrm>
           <a:prstGeom prst="rect">
@@ -21198,7 +21550,7 @@
                 <a:ea typeface="Microsoft YaHei"/>
                 <a:cs typeface="Microsoft YaHei"/>
               </a:rPr>
-              <a:t>IF</a:t>
+              <a:t>REG</a:t>
             </a:r>
             <a:endParaRPr sz="900"/>
           </a:p>
@@ -21206,289 +21558,21 @@
       </p:sp>
       <p:sp>
         <p:nvSpPr>
-          <p:cNvPr id="20" name="Text 18">
-            <a:extLst>
-              <a:ext uri="{FF2B5EF4-FFF2-40B4-BE49-F238E27FC236}">
-                <a16:creationId xmlns:a16="http://schemas.microsoft.com/office/drawing/2014/main" id="{7390164D-80B3-4123-A8DF-5C87232B59A0}"/>
-              </a:ext>
-            </a:extLst>
-          </p:cNvPr>
-          <p:cNvSpPr>
-            <a:spLocks noGrp="1"/>
-          </p:cNvSpPr>
-          <p:nvPr/>
-        </p:nvSpPr>
-        <p:spPr>
-          <a:xfrm>
-            <a:off x="2834640" y="3639312"/>
-            <a:ext cx="640080" cy="237744"/>
-          </a:xfrm>
-          <a:prstGeom prst="rect">
-            <a:avLst/>
-          </a:prstGeom>
-          <a:solidFill>
-            <a:srgbClr val="34D399"/>
-          </a:solidFill>
-          <a:ln>
-            <a:solidFill>
-              <a:srgbClr val="34D399"/>
-            </a:solidFill>
-          </a:ln>
-        </p:spPr>
-        <p:txBody>
-          <a:bodyPr wrap="square" lIns="0" tIns="0" rIns="0" bIns="0" anchor="ctr">
-            <a:normAutofit/>
-          </a:bodyPr>
-          <a:lstStyle/>
-          <a:p>
-            <a:pPr marL="0" indent="0" algn="ctr">
-              <a:buNone/>
-            </a:pPr>
-            <a:r>
-              <a:rPr sz="900" b="1">
-                <a:solidFill>
-                  <a:srgbClr val="0B1020"/>
-                </a:solidFill>
-                <a:latin typeface="Microsoft YaHei"/>
-                <a:ea typeface="Microsoft YaHei"/>
-                <a:cs typeface="Microsoft YaHei"/>
-              </a:rPr>
-              <a:t>ID</a:t>
-            </a:r>
-            <a:endParaRPr sz="900"/>
-          </a:p>
-        </p:txBody>
-      </p:sp>
-      <p:sp>
-        <p:nvSpPr>
-          <p:cNvPr id="21" name="Text 19">
-            <a:extLst>
-              <a:ext uri="{FF2B5EF4-FFF2-40B4-BE49-F238E27FC236}">
-                <a16:creationId xmlns:a16="http://schemas.microsoft.com/office/drawing/2014/main" id="{95809595-0EA3-4B34-B20F-1FC046213552}"/>
-              </a:ext>
-            </a:extLst>
-          </p:cNvPr>
-          <p:cNvSpPr>
-            <a:spLocks noGrp="1"/>
-          </p:cNvSpPr>
-          <p:nvPr/>
-        </p:nvSpPr>
-        <p:spPr>
-          <a:xfrm>
-            <a:off x="3931920" y="3639312"/>
-            <a:ext cx="640080" cy="237744"/>
-          </a:xfrm>
-          <a:prstGeom prst="rect">
-            <a:avLst/>
-          </a:prstGeom>
-          <a:solidFill>
-            <a:srgbClr val="F59E0B"/>
-          </a:solidFill>
-          <a:ln>
-            <a:solidFill>
-              <a:srgbClr val="F59E0B"/>
-            </a:solidFill>
-          </a:ln>
-        </p:spPr>
-        <p:txBody>
-          <a:bodyPr wrap="square" lIns="0" tIns="0" rIns="0" bIns="0" anchor="ctr">
-            <a:normAutofit/>
-          </a:bodyPr>
-          <a:lstStyle/>
-          <a:p>
-            <a:pPr marL="0" indent="0" algn="ctr">
-              <a:buNone/>
-            </a:pPr>
-            <a:r>
-              <a:rPr sz="900" b="1">
-                <a:solidFill>
-                  <a:srgbClr val="0B1020"/>
-                </a:solidFill>
-                <a:latin typeface="Microsoft YaHei"/>
-                <a:ea typeface="Microsoft YaHei"/>
-                <a:cs typeface="Microsoft YaHei"/>
-              </a:rPr>
-              <a:t>EX</a:t>
-            </a:r>
-            <a:endParaRPr sz="900"/>
-          </a:p>
-        </p:txBody>
-      </p:sp>
-      <p:sp>
-        <p:nvSpPr>
-          <p:cNvPr id="22" name="Text 20">
-            <a:extLst>
-              <a:ext uri="{FF2B5EF4-FFF2-40B4-BE49-F238E27FC236}">
-                <a16:creationId xmlns:a16="http://schemas.microsoft.com/office/drawing/2014/main" id="{B0106406-E44C-420C-BD08-F69945F07634}"/>
-              </a:ext>
-            </a:extLst>
-          </p:cNvPr>
-          <p:cNvSpPr>
-            <a:spLocks noGrp="1"/>
-          </p:cNvSpPr>
-          <p:nvPr/>
-        </p:nvSpPr>
-        <p:spPr>
-          <a:xfrm>
-            <a:off x="5029200" y="3639312"/>
-            <a:ext cx="640080" cy="237744"/>
-          </a:xfrm>
-          <a:prstGeom prst="rect">
-            <a:avLst/>
-          </a:prstGeom>
-          <a:solidFill>
-            <a:srgbClr val="A78BFA"/>
-          </a:solidFill>
-          <a:ln>
-            <a:solidFill>
-              <a:srgbClr val="A78BFA"/>
-            </a:solidFill>
-          </a:ln>
-        </p:spPr>
-        <p:txBody>
-          <a:bodyPr wrap="square" lIns="0" tIns="0" rIns="0" bIns="0" anchor="ctr">
-            <a:normAutofit/>
-          </a:bodyPr>
-          <a:lstStyle/>
-          <a:p>
-            <a:pPr marL="0" indent="0" algn="ctr">
-              <a:buNone/>
-            </a:pPr>
-            <a:r>
-              <a:rPr sz="900" b="1">
-                <a:solidFill>
-                  <a:srgbClr val="0B1020"/>
-                </a:solidFill>
-                <a:latin typeface="Microsoft YaHei"/>
-                <a:ea typeface="Microsoft YaHei"/>
-                <a:cs typeface="Microsoft YaHei"/>
-              </a:rPr>
-              <a:t>MEM</a:t>
-            </a:r>
-            <a:endParaRPr sz="900"/>
-          </a:p>
-        </p:txBody>
-      </p:sp>
-      <p:sp>
-        <p:nvSpPr>
-          <p:cNvPr id="23" name="Text 21">
-            <a:extLst>
-              <a:ext uri="{FF2B5EF4-FFF2-40B4-BE49-F238E27FC236}">
-                <a16:creationId xmlns:a16="http://schemas.microsoft.com/office/drawing/2014/main" id="{613A0D00-0A4D-4351-84D8-8D83EB605017}"/>
-              </a:ext>
-            </a:extLst>
-          </p:cNvPr>
-          <p:cNvSpPr>
-            <a:spLocks noGrp="1"/>
-          </p:cNvSpPr>
-          <p:nvPr/>
-        </p:nvSpPr>
-        <p:spPr>
-          <a:xfrm>
-            <a:off x="6126480" y="3639312"/>
-            <a:ext cx="640080" cy="237744"/>
-          </a:xfrm>
-          <a:prstGeom prst="rect">
-            <a:avLst/>
-          </a:prstGeom>
-          <a:solidFill>
-            <a:srgbClr val="22D3EE"/>
-          </a:solidFill>
-          <a:ln>
-            <a:solidFill>
-              <a:srgbClr val="22D3EE"/>
-            </a:solidFill>
-          </a:ln>
-        </p:spPr>
-        <p:txBody>
-          <a:bodyPr wrap="square" lIns="0" tIns="0" rIns="0" bIns="0" anchor="ctr">
-            <a:normAutofit/>
-          </a:bodyPr>
-          <a:lstStyle/>
-          <a:p>
-            <a:pPr marL="0" indent="0" algn="ctr">
-              <a:buNone/>
-            </a:pPr>
-            <a:r>
-              <a:rPr sz="900" b="1">
-                <a:solidFill>
-                  <a:srgbClr val="0B1020"/>
-                </a:solidFill>
-                <a:latin typeface="Microsoft YaHei"/>
-                <a:ea typeface="Microsoft YaHei"/>
-                <a:cs typeface="Microsoft YaHei"/>
-              </a:rPr>
-              <a:t>WB</a:t>
-            </a:r>
-            <a:endParaRPr sz="900"/>
-          </a:p>
-        </p:txBody>
-      </p:sp>
-      <p:sp>
-        <p:nvSpPr>
-          <p:cNvPr id="24" name="Text 22">
-            <a:extLst>
-              <a:ext uri="{FF2B5EF4-FFF2-40B4-BE49-F238E27FC236}">
-                <a16:creationId xmlns:a16="http://schemas.microsoft.com/office/drawing/2014/main" id="{1199976C-B6A0-4156-8254-673C4839AEF7}"/>
-              </a:ext>
-            </a:extLst>
-          </p:cNvPr>
-          <p:cNvSpPr>
-            <a:spLocks noGrp="1"/>
-          </p:cNvSpPr>
-          <p:nvPr/>
-        </p:nvSpPr>
-        <p:spPr>
-          <a:xfrm>
-            <a:off x="749808" y="4206240"/>
-            <a:ext cx="841248" cy="182880"/>
-          </a:xfrm>
-          <a:prstGeom prst="rect">
-            <a:avLst/>
-          </a:prstGeom>
-          <a:noFill/>
-        </p:spPr>
-        <p:txBody>
-          <a:bodyPr wrap="square" lIns="0" tIns="0" rIns="0" bIns="0" anchor="t">
-            <a:normAutofit/>
-          </a:bodyPr>
-          <a:lstStyle/>
-          <a:p>
-            <a:pPr marL="0" indent="0" algn="l">
-              <a:buNone/>
-            </a:pPr>
-            <a:r>
-              <a:rPr sz="920">
-                <a:solidFill>
-                  <a:srgbClr val="B9C8E6"/>
-                </a:solidFill>
-                <a:latin typeface="Microsoft YaHei"/>
-                <a:ea typeface="Microsoft YaHei"/>
-                <a:cs typeface="Microsoft YaHei"/>
-              </a:rPr>
-              <a:t>ADD x2,x1</a:t>
-            </a:r>
-            <a:endParaRPr sz="920"/>
-          </a:p>
-        </p:txBody>
-      </p:sp>
-      <p:sp>
-        <p:nvSpPr>
-          <p:cNvPr id="25" name="Text 23">
-            <a:extLst>
-              <a:ext uri="{FF2B5EF4-FFF2-40B4-BE49-F238E27FC236}">
-                <a16:creationId xmlns:a16="http://schemas.microsoft.com/office/drawing/2014/main" id="{9D356109-818D-4AC7-A253-3D2751C0028B}"/>
-              </a:ext>
-            </a:extLst>
-          </p:cNvPr>
-          <p:cNvSpPr>
-            <a:spLocks noGrp="1"/>
-          </p:cNvSpPr>
-          <p:nvPr/>
-        </p:nvSpPr>
-        <p:spPr>
-          <a:xfrm>
-            <a:off x="2834640" y="4178808"/>
+          <p:cNvPr id="11" name="Text 9">
+            <a:extLst>
+              <a:ext uri="{FF2B5EF4-FFF2-40B4-BE49-F238E27FC236}">
+                <a16:creationId xmlns:a16="http://schemas.microsoft.com/office/drawing/2014/main" id="{3DA9D26B-42FB-4A96-BC57-FC528FD89A2D}"/>
+              </a:ext>
+            </a:extLst>
+          </p:cNvPr>
+          <p:cNvSpPr>
+            <a:spLocks noGrp="1"/>
+          </p:cNvSpPr>
+          <p:nvPr/>
+        </p:nvSpPr>
+        <p:spPr>
+          <a:xfrm>
+            <a:off x="8001000" y="1984248"/>
             <a:ext cx="640080" cy="237744"/>
           </a:xfrm>
           <a:prstGeom prst="rect">
@@ -21521,7 +21605,7 @@
                 <a:ea typeface="Microsoft YaHei"/>
                 <a:cs typeface="Microsoft YaHei"/>
               </a:rPr>
-              <a:t>IF</a:t>
+              <a:t>MEM</a:t>
             </a:r>
             <a:endParaRPr sz="900"/>
           </a:p>
@@ -21529,32 +21613,32 @@
       </p:sp>
       <p:sp>
         <p:nvSpPr>
-          <p:cNvPr id="26" name="Text 24">
-            <a:extLst>
-              <a:ext uri="{FF2B5EF4-FFF2-40B4-BE49-F238E27FC236}">
-                <a16:creationId xmlns:a16="http://schemas.microsoft.com/office/drawing/2014/main" id="{ACC1B1FE-242C-4666-8723-0062A6F06309}"/>
-              </a:ext>
-            </a:extLst>
-          </p:cNvPr>
-          <p:cNvSpPr>
-            <a:spLocks noGrp="1"/>
-          </p:cNvSpPr>
-          <p:nvPr/>
-        </p:nvSpPr>
-        <p:spPr>
-          <a:xfrm>
-            <a:off x="3931920" y="4178808"/>
+          <p:cNvPr id="12" name="Text 10">
+            <a:extLst>
+              <a:ext uri="{FF2B5EF4-FFF2-40B4-BE49-F238E27FC236}">
+                <a16:creationId xmlns:a16="http://schemas.microsoft.com/office/drawing/2014/main" id="{1A17BCE3-72D9-482D-9409-7DCA3E56CFAB}"/>
+              </a:ext>
+            </a:extLst>
+          </p:cNvPr>
+          <p:cNvSpPr>
+            <a:spLocks noGrp="1"/>
+          </p:cNvSpPr>
+          <p:nvPr/>
+        </p:nvSpPr>
+        <p:spPr>
+          <a:xfrm>
+            <a:off x="9006840" y="1984248"/>
             <a:ext cx="640080" cy="237744"/>
           </a:xfrm>
           <a:prstGeom prst="rect">
             <a:avLst/>
           </a:prstGeom>
           <a:solidFill>
-            <a:srgbClr val="34D399"/>
+            <a:srgbClr val="3B82F6"/>
           </a:solidFill>
           <a:ln>
             <a:solidFill>
-              <a:srgbClr val="34D399"/>
+              <a:srgbClr val="3B82F6"/>
             </a:solidFill>
           </a:ln>
         </p:spPr>
@@ -21576,7 +21660,7 @@
                 <a:ea typeface="Microsoft YaHei"/>
                 <a:cs typeface="Microsoft YaHei"/>
               </a:rPr>
-              <a:t>ID</a:t>
+              <a:t>MEM</a:t>
             </a:r>
             <a:endParaRPr sz="900"/>
           </a:p>
@@ -21584,37 +21668,92 @@
       </p:sp>
       <p:sp>
         <p:nvSpPr>
-          <p:cNvPr id="27" name="Text 25">
-            <a:extLst>
-              <a:ext uri="{FF2B5EF4-FFF2-40B4-BE49-F238E27FC236}">
-                <a16:creationId xmlns:a16="http://schemas.microsoft.com/office/drawing/2014/main" id="{EF996091-748C-477E-AD00-9859AAF218C9}"/>
-              </a:ext>
-            </a:extLst>
-          </p:cNvPr>
-          <p:cNvSpPr>
-            <a:spLocks noGrp="1"/>
-          </p:cNvSpPr>
-          <p:nvPr/>
-        </p:nvSpPr>
-        <p:spPr>
-          <a:xfrm>
-            <a:off x="5029200" y="4178808"/>
+          <p:cNvPr id="13" name="Text 11">
+            <a:extLst>
+              <a:ext uri="{FF2B5EF4-FFF2-40B4-BE49-F238E27FC236}">
+                <a16:creationId xmlns:a16="http://schemas.microsoft.com/office/drawing/2014/main" id="{63E20DAE-B9FC-4557-81C0-30CBACA09C43}"/>
+              </a:ext>
+            </a:extLst>
+          </p:cNvPr>
+          <p:cNvSpPr>
+            <a:spLocks noGrp="1"/>
+          </p:cNvSpPr>
+          <p:nvPr/>
+        </p:nvSpPr>
+        <p:spPr>
+          <a:xfrm>
+            <a:off x="10012680" y="1984248"/>
             <a:ext cx="640080" cy="237744"/>
           </a:xfrm>
           <a:prstGeom prst="rect">
             <a:avLst/>
           </a:prstGeom>
           <a:solidFill>
-            <a:srgbClr val="F59E0B"/>
+            <a:srgbClr val="3B82F6"/>
           </a:solidFill>
           <a:ln>
             <a:solidFill>
+              <a:srgbClr val="3B82F6"/>
+            </a:solidFill>
+          </a:ln>
+        </p:spPr>
+        <p:txBody>
+          <a:bodyPr wrap="square" lIns="0" tIns="0" rIns="0" bIns="0" anchor="ctr">
+            <a:normAutofit/>
+          </a:bodyPr>
+          <a:lstStyle/>
+          <a:p>
+            <a:pPr marL="0" indent="0" algn="ctr">
+              <a:buNone/>
+            </a:pPr>
+            <a:r>
+              <a:rPr sz="900" b="1">
+                <a:solidFill>
+                  <a:srgbClr val="0B1020"/>
+                </a:solidFill>
+                <a:latin typeface="Microsoft YaHei"/>
+                <a:ea typeface="Microsoft YaHei"/>
+                <a:cs typeface="Microsoft YaHei"/>
+              </a:rPr>
+              <a:t>WB</a:t>
+            </a:r>
+            <a:endParaRPr sz="900"/>
+          </a:p>
+        </p:txBody>
+      </p:sp>
+      <p:sp>
+        <p:nvSpPr>
+          <p:cNvPr id="14" name="Text 12">
+            <a:extLst>
+              <a:ext uri="{FF2B5EF4-FFF2-40B4-BE49-F238E27FC236}">
+                <a16:creationId xmlns:a16="http://schemas.microsoft.com/office/drawing/2014/main" id="{FED78237-1F4B-4A22-AD2B-E9D2747D3803}"/>
+              </a:ext>
+            </a:extLst>
+          </p:cNvPr>
+          <p:cNvSpPr>
+            <a:spLocks noGrp="1"/>
+          </p:cNvSpPr>
+          <p:nvPr/>
+        </p:nvSpPr>
+        <p:spPr>
+          <a:xfrm>
+            <a:off x="786384" y="2926080"/>
+            <a:ext cx="2011680" cy="640080"/>
+          </a:xfrm>
+          <a:prstGeom prst="rect">
+            <a:avLst/>
+          </a:prstGeom>
+          <a:solidFill>
+            <a:srgbClr val="121A2D"/>
+          </a:solidFill>
+          <a:ln w="15240">
+            <a:solidFill>
               <a:srgbClr val="F59E0B"/>
             </a:solidFill>
           </a:ln>
         </p:spPr>
         <p:txBody>
-          <a:bodyPr wrap="square" lIns="0" tIns="0" rIns="0" bIns="0" anchor="ctr">
+          <a:bodyPr wrap="square" lIns="1016" tIns="1016" rIns="1016" bIns="1016" anchor="ctr">
             <a:normAutofit/>
           </a:bodyPr>
           <a:lstStyle/>
@@ -21623,48 +21762,120 @@
               <a:buNone/>
             </a:pPr>
             <a:r>
-              <a:rPr sz="900" b="1">
-                <a:solidFill>
-                  <a:srgbClr val="0B1020"/>
-                </a:solidFill>
-                <a:latin typeface="Microsoft YaHei"/>
-                <a:ea typeface="Microsoft YaHei"/>
-                <a:cs typeface="Microsoft YaHei"/>
-              </a:rPr>
-              <a:t>气泡</a:t>
-            </a:r>
-            <a:endParaRPr sz="900"/>
-          </a:p>
-        </p:txBody>
-      </p:sp>
-      <p:sp>
-        <p:nvSpPr>
-          <p:cNvPr id="28" name="Text 26">
-            <a:extLst>
-              <a:ext uri="{FF2B5EF4-FFF2-40B4-BE49-F238E27FC236}">
-                <a16:creationId xmlns:a16="http://schemas.microsoft.com/office/drawing/2014/main" id="{0A72A9CE-050D-4C2A-BD20-69F3A32B40BE}"/>
-              </a:ext>
-            </a:extLst>
-          </p:cNvPr>
-          <p:cNvSpPr>
-            <a:spLocks noGrp="1"/>
-          </p:cNvSpPr>
-          <p:nvPr/>
-        </p:nvSpPr>
-        <p:spPr>
-          <a:xfrm>
-            <a:off x="6126480" y="4178808"/>
+              <a:rPr sz="1070" b="1">
+                <a:solidFill>
+                  <a:srgbClr val="F7FAFF"/>
+                </a:solidFill>
+                <a:latin typeface="Microsoft YaHei"/>
+                <a:ea typeface="Microsoft YaHei"/>
+                <a:cs typeface="Microsoft YaHei"/>
+              </a:rPr>
+              <a:t>load-use</a:t>
+            </a:r>
+            <a:endParaRPr sz="1070"/>
+          </a:p>
+          <a:p>
+            <a:pPr marL="0" indent="0" algn="ctr">
+              <a:buNone/>
+            </a:pPr>
+            <a:r>
+              <a:rPr sz="1070" b="1">
+                <a:solidFill>
+                  <a:srgbClr val="F7FAFF"/>
+                </a:solidFill>
+                <a:latin typeface="Microsoft YaHei"/>
+                <a:ea typeface="Microsoft YaHei"/>
+                <a:cs typeface="Microsoft YaHei"/>
+              </a:rPr>
+              <a:t>stall_data / valid</a:t>
+            </a:r>
+            <a:endParaRPr sz="1070"/>
+          </a:p>
+        </p:txBody>
+      </p:sp>
+      <p:sp>
+        <p:nvSpPr>
+          <p:cNvPr id="15" name="Text 13">
+            <a:extLst>
+              <a:ext uri="{FF2B5EF4-FFF2-40B4-BE49-F238E27FC236}">
+                <a16:creationId xmlns:a16="http://schemas.microsoft.com/office/drawing/2014/main" id="{25F6B7C8-135A-4FD2-A274-1D063E086486}"/>
+              </a:ext>
+            </a:extLst>
+          </p:cNvPr>
+          <p:cNvSpPr>
+            <a:spLocks noGrp="1"/>
+          </p:cNvSpPr>
+          <p:nvPr/>
+        </p:nvSpPr>
+        <p:spPr>
+          <a:xfrm>
+            <a:off x="2962656" y="2926080"/>
+            <a:ext cx="3703320" cy="640080"/>
+          </a:xfrm>
+          <a:prstGeom prst="rect">
+            <a:avLst/>
+          </a:prstGeom>
+          <a:solidFill>
+            <a:srgbClr val="10172A"/>
+          </a:solidFill>
+          <a:ln w="12700">
+            <a:solidFill>
+              <a:srgbClr val="2C3D61"/>
+            </a:solidFill>
+          </a:ln>
+        </p:spPr>
+        <p:txBody>
+          <a:bodyPr wrap="square" lIns="1143" tIns="1143" rIns="1143" bIns="1143" anchor="ctr">
+            <a:normAutofit/>
+          </a:bodyPr>
+          <a:lstStyle/>
+          <a:p>
+            <a:pPr marL="0" indent="0" algn="l">
+              <a:buNone/>
+            </a:pPr>
+            <a:r>
+              <a:rPr sz="1080">
+                <a:solidFill>
+                  <a:srgbClr val="B9C8E6"/>
+                </a:solidFill>
+                <a:latin typeface="Microsoft YaHei"/>
+                <a:ea typeface="Microsoft YaHei"/>
+                <a:cs typeface="Microsoft YaHei"/>
+              </a:rPr>
+              <a:t>  PC 与 IF/ID 保持，ID/EX 插入气泡，最终写回值正确</a:t>
+            </a:r>
+            <a:endParaRPr sz="1080"/>
+          </a:p>
+        </p:txBody>
+      </p:sp>
+      <p:sp>
+        <p:nvSpPr>
+          <p:cNvPr id="16" name="Text 14">
+            <a:extLst>
+              <a:ext uri="{FF2B5EF4-FFF2-40B4-BE49-F238E27FC236}">
+                <a16:creationId xmlns:a16="http://schemas.microsoft.com/office/drawing/2014/main" id="{ABF4942B-D88B-411F-8337-FAA216CDC1DC}"/>
+              </a:ext>
+            </a:extLst>
+          </p:cNvPr>
+          <p:cNvSpPr>
+            <a:spLocks noGrp="1"/>
+          </p:cNvSpPr>
+          <p:nvPr/>
+        </p:nvSpPr>
+        <p:spPr>
+          <a:xfrm>
+            <a:off x="6995160" y="3127248"/>
             <a:ext cx="640080" cy="237744"/>
           </a:xfrm>
           <a:prstGeom prst="rect">
             <a:avLst/>
           </a:prstGeom>
           <a:solidFill>
-            <a:srgbClr val="F59E0B"/>
+            <a:srgbClr val="3B82F6"/>
           </a:solidFill>
           <a:ln>
             <a:solidFill>
-              <a:srgbClr val="F59E0B"/>
+              <a:srgbClr val="3B82F6"/>
             </a:solidFill>
           </a:ln>
         </p:spPr>
@@ -21686,7 +21897,7 @@
                 <a:ea typeface="Microsoft YaHei"/>
                 <a:cs typeface="Microsoft YaHei"/>
               </a:rPr>
-              <a:t>EX</a:t>
+              <a:t>RUN</a:t>
             </a:r>
             <a:endParaRPr sz="900"/>
           </a:p>
@@ -21694,32 +21905,32 @@
       </p:sp>
       <p:sp>
         <p:nvSpPr>
-          <p:cNvPr id="29" name="Text 27">
-            <a:extLst>
-              <a:ext uri="{FF2B5EF4-FFF2-40B4-BE49-F238E27FC236}">
-                <a16:creationId xmlns:a16="http://schemas.microsoft.com/office/drawing/2014/main" id="{622CDF23-C06F-41B0-99D5-F3DB7D83270B}"/>
-              </a:ext>
-            </a:extLst>
-          </p:cNvPr>
-          <p:cNvSpPr>
-            <a:spLocks noGrp="1"/>
-          </p:cNvSpPr>
-          <p:nvPr/>
-        </p:nvSpPr>
-        <p:spPr>
-          <a:xfrm>
-            <a:off x="7223760" y="4178808"/>
+          <p:cNvPr id="17" name="Text 15">
+            <a:extLst>
+              <a:ext uri="{FF2B5EF4-FFF2-40B4-BE49-F238E27FC236}">
+                <a16:creationId xmlns:a16="http://schemas.microsoft.com/office/drawing/2014/main" id="{AC0F5B33-10F9-4831-B2BC-51712A497DEE}"/>
+              </a:ext>
+            </a:extLst>
+          </p:cNvPr>
+          <p:cNvSpPr>
+            <a:spLocks noGrp="1"/>
+          </p:cNvSpPr>
+          <p:nvPr/>
+        </p:nvSpPr>
+        <p:spPr>
+          <a:xfrm>
+            <a:off x="8001000" y="3127248"/>
             <a:ext cx="640080" cy="237744"/>
           </a:xfrm>
           <a:prstGeom prst="rect">
             <a:avLst/>
           </a:prstGeom>
           <a:solidFill>
-            <a:srgbClr val="A78BFA"/>
+            <a:srgbClr val="3B82F6"/>
           </a:solidFill>
           <a:ln>
             <a:solidFill>
-              <a:srgbClr val="A78BFA"/>
+              <a:srgbClr val="3B82F6"/>
             </a:solidFill>
           </a:ln>
         </p:spPr>
@@ -21741,7 +21952,7 @@
                 <a:ea typeface="Microsoft YaHei"/>
                 <a:cs typeface="Microsoft YaHei"/>
               </a:rPr>
-              <a:t>MEM</a:t>
+              <a:t>HOLD</a:t>
             </a:r>
             <a:endParaRPr sz="900"/>
           </a:p>
@@ -21749,32 +21960,32 @@
       </p:sp>
       <p:sp>
         <p:nvSpPr>
-          <p:cNvPr id="30" name="Text 28">
-            <a:extLst>
-              <a:ext uri="{FF2B5EF4-FFF2-40B4-BE49-F238E27FC236}">
-                <a16:creationId xmlns:a16="http://schemas.microsoft.com/office/drawing/2014/main" id="{9647198A-CCDA-41C2-96C9-8184C5A6A7FE}"/>
-              </a:ext>
-            </a:extLst>
-          </p:cNvPr>
-          <p:cNvSpPr>
-            <a:spLocks noGrp="1"/>
-          </p:cNvSpPr>
-          <p:nvPr/>
-        </p:nvSpPr>
-        <p:spPr>
-          <a:xfrm>
-            <a:off x="8321040" y="4178808"/>
+          <p:cNvPr id="18" name="Text 16">
+            <a:extLst>
+              <a:ext uri="{FF2B5EF4-FFF2-40B4-BE49-F238E27FC236}">
+                <a16:creationId xmlns:a16="http://schemas.microsoft.com/office/drawing/2014/main" id="{39998CAA-6AFF-4574-B223-C79384276B49}"/>
+              </a:ext>
+            </a:extLst>
+          </p:cNvPr>
+          <p:cNvSpPr>
+            <a:spLocks noGrp="1"/>
+          </p:cNvSpPr>
+          <p:nvPr/>
+        </p:nvSpPr>
+        <p:spPr>
+          <a:xfrm>
+            <a:off x="9006840" y="3127248"/>
             <a:ext cx="640080" cy="237744"/>
           </a:xfrm>
           <a:prstGeom prst="rect">
             <a:avLst/>
           </a:prstGeom>
           <a:solidFill>
-            <a:srgbClr val="22D3EE"/>
+            <a:srgbClr val="F87171"/>
           </a:solidFill>
           <a:ln>
             <a:solidFill>
-              <a:srgbClr val="22D3EE"/>
+              <a:srgbClr val="F87171"/>
             </a:solidFill>
           </a:ln>
         </p:spPr>
@@ -21790,13 +22001,68 @@
             <a:r>
               <a:rPr sz="900" b="1">
                 <a:solidFill>
+                  <a:srgbClr val="FFFFFF"/>
+                </a:solidFill>
+                <a:latin typeface="Microsoft YaHei"/>
+                <a:ea typeface="Microsoft YaHei"/>
+                <a:cs typeface="Microsoft YaHei"/>
+              </a:rPr>
+              <a:t>BUBBLE</a:t>
+            </a:r>
+            <a:endParaRPr sz="900"/>
+          </a:p>
+        </p:txBody>
+      </p:sp>
+      <p:sp>
+        <p:nvSpPr>
+          <p:cNvPr id="19" name="Text 17">
+            <a:extLst>
+              <a:ext uri="{FF2B5EF4-FFF2-40B4-BE49-F238E27FC236}">
+                <a16:creationId xmlns:a16="http://schemas.microsoft.com/office/drawing/2014/main" id="{1261CC61-1ECE-4354-B469-E1E7CCF5DC79}"/>
+              </a:ext>
+            </a:extLst>
+          </p:cNvPr>
+          <p:cNvSpPr>
+            <a:spLocks noGrp="1"/>
+          </p:cNvSpPr>
+          <p:nvPr/>
+        </p:nvSpPr>
+        <p:spPr>
+          <a:xfrm>
+            <a:off x="10012680" y="3127248"/>
+            <a:ext cx="640080" cy="237744"/>
+          </a:xfrm>
+          <a:prstGeom prst="rect">
+            <a:avLst/>
+          </a:prstGeom>
+          <a:solidFill>
+            <a:srgbClr val="3B82F6"/>
+          </a:solidFill>
+          <a:ln>
+            <a:solidFill>
+              <a:srgbClr val="3B82F6"/>
+            </a:solidFill>
+          </a:ln>
+        </p:spPr>
+        <p:txBody>
+          <a:bodyPr wrap="square" lIns="0" tIns="0" rIns="0" bIns="0" anchor="ctr">
+            <a:normAutofit/>
+          </a:bodyPr>
+          <a:lstStyle/>
+          <a:p>
+            <a:pPr marL="0" indent="0" algn="ctr">
+              <a:buNone/>
+            </a:pPr>
+            <a:r>
+              <a:rPr sz="900" b="1">
+                <a:solidFill>
                   <a:srgbClr val="0B1020"/>
                 </a:solidFill>
                 <a:latin typeface="Microsoft YaHei"/>
                 <a:ea typeface="Microsoft YaHei"/>
                 <a:cs typeface="Microsoft YaHei"/>
               </a:rPr>
-              <a:t>WB</a:t>
+              <a:t>RUN</a:t>
             </a:r>
             <a:endParaRPr sz="900"/>
           </a:p>
@@ -21804,22 +22070,402 @@
       </p:sp>
       <p:sp>
         <p:nvSpPr>
-          <p:cNvPr id="31" name="Text 29">
-            <a:extLst>
-              <a:ext uri="{FF2B5EF4-FFF2-40B4-BE49-F238E27FC236}">
-                <a16:creationId xmlns:a16="http://schemas.microsoft.com/office/drawing/2014/main" id="{70AAF364-8203-4E35-B988-BE4EC79195C8}"/>
-              </a:ext>
-            </a:extLst>
-          </p:cNvPr>
-          <p:cNvSpPr>
-            <a:spLocks noGrp="1"/>
-          </p:cNvSpPr>
-          <p:nvPr/>
-        </p:nvSpPr>
-        <p:spPr>
-          <a:xfrm>
-            <a:off x="1280160" y="5010912"/>
-            <a:ext cx="6858000" cy="384048"/>
+          <p:cNvPr id="20" name="Text 18">
+            <a:extLst>
+              <a:ext uri="{FF2B5EF4-FFF2-40B4-BE49-F238E27FC236}">
+                <a16:creationId xmlns:a16="http://schemas.microsoft.com/office/drawing/2014/main" id="{0C9E00A5-6481-4668-BCA4-46CF6DBD932C}"/>
+              </a:ext>
+            </a:extLst>
+          </p:cNvPr>
+          <p:cNvSpPr>
+            <a:spLocks noGrp="1"/>
+          </p:cNvSpPr>
+          <p:nvPr/>
+        </p:nvSpPr>
+        <p:spPr>
+          <a:xfrm>
+            <a:off x="786384" y="4069080"/>
+            <a:ext cx="2011680" cy="640080"/>
+          </a:xfrm>
+          <a:prstGeom prst="rect">
+            <a:avLst/>
+          </a:prstGeom>
+          <a:solidFill>
+            <a:srgbClr val="121A2D"/>
+          </a:solidFill>
+          <a:ln w="15240">
+            <a:solidFill>
+              <a:srgbClr val="F87171"/>
+            </a:solidFill>
+          </a:ln>
+        </p:spPr>
+        <p:txBody>
+          <a:bodyPr wrap="square" lIns="1016" tIns="1016" rIns="1016" bIns="1016" anchor="ctr">
+            <a:normAutofit/>
+          </a:bodyPr>
+          <a:lstStyle/>
+          <a:p>
+            <a:pPr marL="0" indent="0" algn="ctr">
+              <a:buNone/>
+            </a:pPr>
+            <a:r>
+              <a:rPr sz="1070" b="1" dirty="0" err="1">
+                <a:solidFill>
+                  <a:srgbClr val="F7FAFF"/>
+                </a:solidFill>
+                <a:latin typeface="Microsoft YaHei"/>
+                <a:ea typeface="Microsoft YaHei"/>
+                <a:cs typeface="Microsoft YaHei"/>
+              </a:rPr>
+              <a:t>分支冲刷</a:t>
+            </a:r>
+            <a:endParaRPr sz="1070" dirty="0"/>
+          </a:p>
+          <a:p>
+            <a:pPr marL="0" indent="0" algn="ctr">
+              <a:buNone/>
+            </a:pPr>
+            <a:r>
+              <a:rPr sz="1070" b="1" dirty="0">
+                <a:solidFill>
+                  <a:srgbClr val="F7FAFF"/>
+                </a:solidFill>
+                <a:latin typeface="Microsoft YaHei"/>
+                <a:ea typeface="Microsoft YaHei"/>
+                <a:cs typeface="Microsoft YaHei"/>
+              </a:rPr>
+              <a:t>redirect</a:t>
+            </a:r>
+            <a:r>
+              <a:rPr lang="zh-CN" altLang="en-US" sz="1070" b="1" dirty="0">
+                <a:solidFill>
+                  <a:srgbClr val="F7FAFF"/>
+                </a:solidFill>
+                <a:latin typeface="Microsoft YaHei"/>
+                <a:ea typeface="Microsoft YaHei"/>
+                <a:cs typeface="Microsoft YaHei"/>
+              </a:rPr>
+              <a:t> </a:t>
+            </a:r>
+            <a:r>
+              <a:rPr lang="en-US" altLang="zh-CN" sz="1070" b="1" dirty="0">
+                <a:solidFill>
+                  <a:srgbClr val="F7FAFF"/>
+                </a:solidFill>
+                <a:latin typeface="Microsoft YaHei"/>
+                <a:ea typeface="Microsoft YaHei"/>
+                <a:cs typeface="Microsoft YaHei"/>
+              </a:rPr>
+              <a:t>/</a:t>
+            </a:r>
+            <a:r>
+              <a:rPr sz="1070" b="1" dirty="0">
+                <a:solidFill>
+                  <a:srgbClr val="F7FAFF"/>
+                </a:solidFill>
+                <a:latin typeface="Microsoft YaHei"/>
+                <a:ea typeface="Microsoft YaHei"/>
+                <a:cs typeface="Microsoft YaHei"/>
+              </a:rPr>
+              <a:t> flush</a:t>
+            </a:r>
+            <a:endParaRPr sz="1070" dirty="0"/>
+          </a:p>
+        </p:txBody>
+      </p:sp>
+      <p:sp>
+        <p:nvSpPr>
+          <p:cNvPr id="21" name="Text 19">
+            <a:extLst>
+              <a:ext uri="{FF2B5EF4-FFF2-40B4-BE49-F238E27FC236}">
+                <a16:creationId xmlns:a16="http://schemas.microsoft.com/office/drawing/2014/main" id="{F46924D1-56B7-44AC-8D3F-D93906639DB5}"/>
+              </a:ext>
+            </a:extLst>
+          </p:cNvPr>
+          <p:cNvSpPr>
+            <a:spLocks noGrp="1"/>
+          </p:cNvSpPr>
+          <p:nvPr/>
+        </p:nvSpPr>
+        <p:spPr>
+          <a:xfrm>
+            <a:off x="2962656" y="4069080"/>
+            <a:ext cx="3703320" cy="640080"/>
+          </a:xfrm>
+          <a:prstGeom prst="rect">
+            <a:avLst/>
+          </a:prstGeom>
+          <a:solidFill>
+            <a:srgbClr val="10172A"/>
+          </a:solidFill>
+          <a:ln w="12700">
+            <a:solidFill>
+              <a:srgbClr val="2C3D61"/>
+            </a:solidFill>
+          </a:ln>
+        </p:spPr>
+        <p:txBody>
+          <a:bodyPr wrap="square" lIns="1143" tIns="1143" rIns="1143" bIns="1143" anchor="ctr">
+            <a:normAutofit/>
+          </a:bodyPr>
+          <a:lstStyle/>
+          <a:p>
+            <a:pPr marL="0" indent="0" algn="l">
+              <a:buNone/>
+            </a:pPr>
+            <a:r>
+              <a:rPr sz="1080">
+                <a:solidFill>
+                  <a:srgbClr val="B9C8E6"/>
+                </a:solidFill>
+                <a:latin typeface="Microsoft YaHei"/>
+                <a:ea typeface="Microsoft YaHei"/>
+                <a:cs typeface="Microsoft YaHei"/>
+              </a:rPr>
+              <a:t>  taken 后清除两条年轻指令，错误路径无副作用</a:t>
+            </a:r>
+            <a:endParaRPr sz="1080"/>
+          </a:p>
+        </p:txBody>
+      </p:sp>
+      <p:sp>
+        <p:nvSpPr>
+          <p:cNvPr id="22" name="Text 20">
+            <a:extLst>
+              <a:ext uri="{FF2B5EF4-FFF2-40B4-BE49-F238E27FC236}">
+                <a16:creationId xmlns:a16="http://schemas.microsoft.com/office/drawing/2014/main" id="{C0F51870-53BD-40FD-8228-F8AF78172B74}"/>
+              </a:ext>
+            </a:extLst>
+          </p:cNvPr>
+          <p:cNvSpPr>
+            <a:spLocks noGrp="1"/>
+          </p:cNvSpPr>
+          <p:nvPr/>
+        </p:nvSpPr>
+        <p:spPr>
+          <a:xfrm>
+            <a:off x="6995160" y="4270248"/>
+            <a:ext cx="640080" cy="237744"/>
+          </a:xfrm>
+          <a:prstGeom prst="rect">
+            <a:avLst/>
+          </a:prstGeom>
+          <a:solidFill>
+            <a:srgbClr val="3B82F6"/>
+          </a:solidFill>
+          <a:ln>
+            <a:solidFill>
+              <a:srgbClr val="3B82F6"/>
+            </a:solidFill>
+          </a:ln>
+        </p:spPr>
+        <p:txBody>
+          <a:bodyPr wrap="square" lIns="0" tIns="0" rIns="0" bIns="0" anchor="ctr">
+            <a:normAutofit/>
+          </a:bodyPr>
+          <a:lstStyle/>
+          <a:p>
+            <a:pPr marL="0" indent="0" algn="ctr">
+              <a:buNone/>
+            </a:pPr>
+            <a:r>
+              <a:rPr sz="900" b="1">
+                <a:solidFill>
+                  <a:srgbClr val="0B1020"/>
+                </a:solidFill>
+                <a:latin typeface="Microsoft YaHei"/>
+                <a:ea typeface="Microsoft YaHei"/>
+                <a:cs typeface="Microsoft YaHei"/>
+              </a:rPr>
+              <a:t>SEQ</a:t>
+            </a:r>
+            <a:endParaRPr sz="900"/>
+          </a:p>
+        </p:txBody>
+      </p:sp>
+      <p:sp>
+        <p:nvSpPr>
+          <p:cNvPr id="23" name="Text 21">
+            <a:extLst>
+              <a:ext uri="{FF2B5EF4-FFF2-40B4-BE49-F238E27FC236}">
+                <a16:creationId xmlns:a16="http://schemas.microsoft.com/office/drawing/2014/main" id="{2AF5B253-2863-4D4A-B798-0B3247160663}"/>
+              </a:ext>
+            </a:extLst>
+          </p:cNvPr>
+          <p:cNvSpPr>
+            <a:spLocks noGrp="1"/>
+          </p:cNvSpPr>
+          <p:nvPr/>
+        </p:nvSpPr>
+        <p:spPr>
+          <a:xfrm>
+            <a:off x="8001000" y="4270248"/>
+            <a:ext cx="640080" cy="237744"/>
+          </a:xfrm>
+          <a:prstGeom prst="rect">
+            <a:avLst/>
+          </a:prstGeom>
+          <a:solidFill>
+            <a:srgbClr val="3B82F6"/>
+          </a:solidFill>
+          <a:ln>
+            <a:solidFill>
+              <a:srgbClr val="3B82F6"/>
+            </a:solidFill>
+          </a:ln>
+        </p:spPr>
+        <p:txBody>
+          <a:bodyPr wrap="square" lIns="0" tIns="0" rIns="0" bIns="0" anchor="ctr">
+            <a:normAutofit/>
+          </a:bodyPr>
+          <a:lstStyle/>
+          <a:p>
+            <a:pPr marL="0" indent="0" algn="ctr">
+              <a:buNone/>
+            </a:pPr>
+            <a:r>
+              <a:rPr sz="900" b="1">
+                <a:solidFill>
+                  <a:srgbClr val="0B1020"/>
+                </a:solidFill>
+                <a:latin typeface="Microsoft YaHei"/>
+                <a:ea typeface="Microsoft YaHei"/>
+                <a:cs typeface="Microsoft YaHei"/>
+              </a:rPr>
+              <a:t>TAKEN</a:t>
+            </a:r>
+            <a:endParaRPr sz="900"/>
+          </a:p>
+        </p:txBody>
+      </p:sp>
+      <p:sp>
+        <p:nvSpPr>
+          <p:cNvPr id="24" name="Text 22">
+            <a:extLst>
+              <a:ext uri="{FF2B5EF4-FFF2-40B4-BE49-F238E27FC236}">
+                <a16:creationId xmlns:a16="http://schemas.microsoft.com/office/drawing/2014/main" id="{9FE53AD3-B0A9-444C-9E8F-E45D60682F25}"/>
+              </a:ext>
+            </a:extLst>
+          </p:cNvPr>
+          <p:cNvSpPr>
+            <a:spLocks noGrp="1"/>
+          </p:cNvSpPr>
+          <p:nvPr/>
+        </p:nvSpPr>
+        <p:spPr>
+          <a:xfrm>
+            <a:off x="9006840" y="4270248"/>
+            <a:ext cx="640080" cy="237744"/>
+          </a:xfrm>
+          <a:prstGeom prst="rect">
+            <a:avLst/>
+          </a:prstGeom>
+          <a:solidFill>
+            <a:srgbClr val="F87171"/>
+          </a:solidFill>
+          <a:ln>
+            <a:solidFill>
+              <a:srgbClr val="F87171"/>
+            </a:solidFill>
+          </a:ln>
+        </p:spPr>
+        <p:txBody>
+          <a:bodyPr wrap="square" lIns="0" tIns="0" rIns="0" bIns="0" anchor="ctr">
+            <a:normAutofit/>
+          </a:bodyPr>
+          <a:lstStyle/>
+          <a:p>
+            <a:pPr marL="0" indent="0" algn="ctr">
+              <a:buNone/>
+            </a:pPr>
+            <a:r>
+              <a:rPr sz="900" b="1">
+                <a:solidFill>
+                  <a:srgbClr val="FFFFFF"/>
+                </a:solidFill>
+                <a:latin typeface="Microsoft YaHei"/>
+                <a:ea typeface="Microsoft YaHei"/>
+                <a:cs typeface="Microsoft YaHei"/>
+              </a:rPr>
+              <a:t>FLUSH</a:t>
+            </a:r>
+            <a:endParaRPr sz="900"/>
+          </a:p>
+        </p:txBody>
+      </p:sp>
+      <p:sp>
+        <p:nvSpPr>
+          <p:cNvPr id="25" name="Text 23">
+            <a:extLst>
+              <a:ext uri="{FF2B5EF4-FFF2-40B4-BE49-F238E27FC236}">
+                <a16:creationId xmlns:a16="http://schemas.microsoft.com/office/drawing/2014/main" id="{C214E617-6263-477C-9C7D-B94F496DDE74}"/>
+              </a:ext>
+            </a:extLst>
+          </p:cNvPr>
+          <p:cNvSpPr>
+            <a:spLocks noGrp="1"/>
+          </p:cNvSpPr>
+          <p:nvPr/>
+        </p:nvSpPr>
+        <p:spPr>
+          <a:xfrm>
+            <a:off x="10012680" y="4270248"/>
+            <a:ext cx="640080" cy="237744"/>
+          </a:xfrm>
+          <a:prstGeom prst="rect">
+            <a:avLst/>
+          </a:prstGeom>
+          <a:solidFill>
+            <a:srgbClr val="3B82F6"/>
+          </a:solidFill>
+          <a:ln>
+            <a:solidFill>
+              <a:srgbClr val="3B82F6"/>
+            </a:solidFill>
+          </a:ln>
+        </p:spPr>
+        <p:txBody>
+          <a:bodyPr wrap="square" lIns="0" tIns="0" rIns="0" bIns="0" anchor="ctr">
+            <a:normAutofit/>
+          </a:bodyPr>
+          <a:lstStyle/>
+          <a:p>
+            <a:pPr marL="0" indent="0" algn="ctr">
+              <a:buNone/>
+            </a:pPr>
+            <a:r>
+              <a:rPr sz="900" b="1">
+                <a:solidFill>
+                  <a:srgbClr val="0B1020"/>
+                </a:solidFill>
+                <a:latin typeface="Microsoft YaHei"/>
+                <a:ea typeface="Microsoft YaHei"/>
+                <a:cs typeface="Microsoft YaHei"/>
+              </a:rPr>
+              <a:t>TARGET</a:t>
+            </a:r>
+            <a:endParaRPr sz="900"/>
+          </a:p>
+        </p:txBody>
+      </p:sp>
+      <p:sp>
+        <p:nvSpPr>
+          <p:cNvPr id="26" name="Text 24">
+            <a:extLst>
+              <a:ext uri="{FF2B5EF4-FFF2-40B4-BE49-F238E27FC236}">
+                <a16:creationId xmlns:a16="http://schemas.microsoft.com/office/drawing/2014/main" id="{59AE7CF1-AAA1-4AF9-AB55-F2AC9CA9C4D2}"/>
+              </a:ext>
+            </a:extLst>
+          </p:cNvPr>
+          <p:cNvSpPr>
+            <a:spLocks noGrp="1"/>
+          </p:cNvSpPr>
+          <p:nvPr/>
+        </p:nvSpPr>
+        <p:spPr>
+          <a:xfrm>
+            <a:off x="1243584" y="5413248"/>
+            <a:ext cx="9692640" cy="438912"/>
           </a:xfrm>
           <a:prstGeom prst="rect">
             <a:avLst/>
@@ -21843,7 +22489,7 @@
               <a:buNone/>
             </a:pPr>
             <a:r>
-              <a:rPr sz="1160" b="1">
+              <a:rPr sz="1220" b="1">
                 <a:solidFill>
                   <a:srgbClr val="E5FBFF"/>
                 </a:solidFill>
@@ -21851,128 +22497,18 @@
                 <a:ea typeface="Microsoft YaHei"/>
                 <a:cs typeface="Microsoft YaHei"/>
               </a:rPr>
-              <a:t>时序示意：第 4 周期保持前端，并让消费者延后进入 EX</a:t>
-            </a:r>
-            <a:endParaRPr sz="1160"/>
-          </a:p>
-        </p:txBody>
-      </p:sp>
-      <p:sp>
-        <p:nvSpPr>
-          <p:cNvPr id="32" name="Text 30">
-            <a:extLst>
-              <a:ext uri="{FF2B5EF4-FFF2-40B4-BE49-F238E27FC236}">
-                <a16:creationId xmlns:a16="http://schemas.microsoft.com/office/drawing/2014/main" id="{3C677FEF-BA03-48AC-B1E1-DED978D6B5BD}"/>
-              </a:ext>
-            </a:extLst>
-          </p:cNvPr>
-          <p:cNvSpPr>
-            <a:spLocks noGrp="1"/>
-          </p:cNvSpPr>
-          <p:nvPr/>
-        </p:nvSpPr>
-        <p:spPr>
-          <a:xfrm>
-            <a:off x="8458200" y="5010912"/>
-            <a:ext cx="1234440" cy="310896"/>
-          </a:xfrm>
-          <a:prstGeom prst="rect">
-            <a:avLst/>
-          </a:prstGeom>
-          <a:solidFill>
-            <a:srgbClr val="2C1D0C"/>
-          </a:solidFill>
-          <a:ln w="12700">
-            <a:solidFill>
-              <a:srgbClr val="F59E0B"/>
-            </a:solidFill>
-          </a:ln>
-        </p:spPr>
-        <p:txBody>
-          <a:bodyPr wrap="square" lIns="254" tIns="254" rIns="254" bIns="254" anchor="ctr">
-            <a:normAutofit/>
-          </a:bodyPr>
-          <a:lstStyle/>
-          <a:p>
-            <a:pPr marL="0" indent="0" algn="ctr">
-              <a:buNone/>
-            </a:pPr>
-            <a:r>
-              <a:rPr sz="980" b="1">
-                <a:solidFill>
-                  <a:srgbClr val="FFF2D2"/>
-                </a:solidFill>
-                <a:latin typeface="Microsoft YaHei"/>
-                <a:ea typeface="Microsoft YaHei"/>
-                <a:cs typeface="Microsoft YaHei"/>
-              </a:rPr>
-              <a:t>请求保持</a:t>
-            </a:r>
-            <a:endParaRPr sz="980"/>
-          </a:p>
-        </p:txBody>
-      </p:sp>
-      <p:sp>
-        <p:nvSpPr>
-          <p:cNvPr id="33" name="Text 31">
-            <a:extLst>
-              <a:ext uri="{FF2B5EF4-FFF2-40B4-BE49-F238E27FC236}">
-                <a16:creationId xmlns:a16="http://schemas.microsoft.com/office/drawing/2014/main" id="{610A4EE0-FAF3-4E28-B5D8-8263BD9BD627}"/>
-              </a:ext>
-            </a:extLst>
-          </p:cNvPr>
-          <p:cNvSpPr>
-            <a:spLocks noGrp="1"/>
-          </p:cNvSpPr>
-          <p:nvPr/>
-        </p:nvSpPr>
-        <p:spPr>
-          <a:xfrm>
-            <a:off x="9875520" y="5010912"/>
-            <a:ext cx="1234440" cy="310896"/>
-          </a:xfrm>
-          <a:prstGeom prst="rect">
-            <a:avLst/>
-          </a:prstGeom>
-          <a:solidFill>
-            <a:srgbClr val="0F2C20"/>
-          </a:solidFill>
-          <a:ln w="12700">
-            <a:solidFill>
-              <a:srgbClr val="34D399"/>
-            </a:solidFill>
-          </a:ln>
-        </p:spPr>
-        <p:txBody>
-          <a:bodyPr wrap="square" lIns="254" tIns="254" rIns="254" bIns="254" anchor="ctr">
-            <a:normAutofit/>
-          </a:bodyPr>
-          <a:lstStyle/>
-          <a:p>
-            <a:pPr marL="0" indent="0" algn="ctr">
-              <a:buNone/>
-            </a:pPr>
-            <a:r>
-              <a:rPr sz="980" b="1">
-                <a:solidFill>
-                  <a:srgbClr val="DBFBEA"/>
-                </a:solidFill>
-                <a:latin typeface="Microsoft YaHei"/>
-                <a:ea typeface="Microsoft YaHei"/>
-                <a:cs typeface="Microsoft YaHei"/>
-              </a:rPr>
-              <a:t>单次提交</a:t>
-            </a:r>
-            <a:endParaRPr sz="980"/>
-          </a:p>
-        </p:txBody>
-      </p:sp>
-      <p:sp>
-        <p:nvSpPr>
-          <p:cNvPr id="34" name="Text 32">
-            <a:extLst>
-              <a:ext uri="{FF2B5EF4-FFF2-40B4-BE49-F238E27FC236}">
-                <a16:creationId xmlns:a16="http://schemas.microsoft.com/office/drawing/2014/main" id="{19F1BD46-A0C9-412B-87F1-CDCD56487DC6}"/>
+              <a:t>仓库中的 trace.csv 记录退休 PC、指令、rd 与写回值，可用于核对退休序列</a:t>
+            </a:r>
+            <a:endParaRPr sz="1220"/>
+          </a:p>
+        </p:txBody>
+      </p:sp>
+      <p:sp>
+        <p:nvSpPr>
+          <p:cNvPr id="27" name="Text 25">
+            <a:extLst>
+              <a:ext uri="{FF2B5EF4-FFF2-40B4-BE49-F238E27FC236}">
+                <a16:creationId xmlns:a16="http://schemas.microsoft.com/office/drawing/2014/main" id="{16106898-CD53-47BD-9EB3-7B12D6F0C827}"/>
               </a:ext>
             </a:extLst>
           </p:cNvPr>
@@ -22015,10 +22551,436 @@
           </a:p>
         </p:txBody>
       </p:sp>
+      <p:sp>
+        <p:nvSpPr>
+          <p:cNvPr id="29" name="矩形 28">
+            <a:extLst>
+              <a:ext uri="{FF2B5EF4-FFF2-40B4-BE49-F238E27FC236}">
+                <a16:creationId xmlns:a16="http://schemas.microsoft.com/office/drawing/2014/main" id="{22B28248-3DC5-4CB6-9CA0-ABDA643B88D3}"/>
+              </a:ext>
+            </a:extLst>
+          </p:cNvPr>
+          <p:cNvSpPr>
+            <a:spLocks noGrp="1"/>
+          </p:cNvSpPr>
+          <p:nvPr/>
+        </p:nvSpPr>
+        <p:spPr>
+          <a:xfrm>
+            <a:off x="446532" y="1358646"/>
+            <a:ext cx="10912894" cy="4743450"/>
+          </a:xfrm>
+          <a:prstGeom prst="rect">
+            <a:avLst/>
+          </a:prstGeom>
+          <a:solidFill>
+            <a:srgbClr val="080E20"/>
+          </a:solidFill>
+          <a:ln w="0">
+            <a:solidFill>
+              <a:srgbClr val="080E20"/>
+            </a:solidFill>
+            <a:prstDash val="solid"/>
+          </a:ln>
+        </p:spPr>
+        <p:txBody>
+          <a:bodyPr/>
+          <a:lstStyle/>
+          <a:p>
+            <a:endParaRPr lang="zh-CN" altLang="en-US"/>
+          </a:p>
+        </p:txBody>
+      </p:sp>
+      <p:sp>
+        <p:nvSpPr>
+          <p:cNvPr id="32" name="矩形 31">
+            <a:extLst>
+              <a:ext uri="{FF2B5EF4-FFF2-40B4-BE49-F238E27FC236}">
+                <a16:creationId xmlns:a16="http://schemas.microsoft.com/office/drawing/2014/main" id="{73E8607B-9AEE-408B-8F5F-1C8ECC8E72A7}"/>
+              </a:ext>
+            </a:extLst>
+          </p:cNvPr>
+          <p:cNvSpPr>
+            <a:spLocks noGrp="1"/>
+          </p:cNvSpPr>
+          <p:nvPr/>
+        </p:nvSpPr>
+        <p:spPr>
+          <a:xfrm>
+            <a:off x="9247325" y="1278933"/>
+            <a:ext cx="2630731" cy="4743450"/>
+          </a:xfrm>
+          <a:prstGeom prst="rect">
+            <a:avLst/>
+          </a:prstGeom>
+          <a:noFill/>
+          <a:ln w="0">
+            <a:noFill/>
+            <a:prstDash val="solid"/>
+          </a:ln>
+        </p:spPr>
+        <p:txBody>
+          <a:bodyPr>
+            <a:normAutofit/>
+          </a:bodyPr>
+          <a:lstStyle/>
+          <a:p>
+            <a:pPr algn="ctr">
+              <a:defRPr sz="1275" b="1">
+                <a:solidFill>
+                  <a:srgbClr val="F4F7FF"/>
+                </a:solidFill>
+                <a:latin typeface="Microsoft YaHei"/>
+                <a:ea typeface="Microsoft YaHei"/>
+                <a:cs typeface="Microsoft YaHei"/>
+              </a:defRPr>
+            </a:pPr>
+            <a:endParaRPr lang="en-US" sz="1400" b="1" dirty="0">
+              <a:solidFill>
+                <a:srgbClr val="F4F7FF"/>
+              </a:solidFill>
+              <a:latin typeface="Microsoft YaHei"/>
+              <a:ea typeface="Microsoft YaHei"/>
+              <a:cs typeface="Microsoft YaHei"/>
+            </a:endParaRPr>
+          </a:p>
+          <a:p>
+            <a:pPr lvl="1"/>
+            <a:endParaRPr lang="en-US" altLang="zh-CN" sz="1400" b="1" dirty="0">
+              <a:solidFill>
+                <a:srgbClr val="F4F7FF"/>
+              </a:solidFill>
+              <a:latin typeface="Microsoft YaHei"/>
+              <a:ea typeface="Microsoft YaHei"/>
+            </a:endParaRPr>
+          </a:p>
+          <a:p>
+            <a:pPr lvl="1"/>
+            <a:endParaRPr lang="en-US" altLang="zh-CN" sz="1400" b="1" dirty="0">
+              <a:solidFill>
+                <a:srgbClr val="F4F7FF"/>
+              </a:solidFill>
+              <a:latin typeface="Microsoft YaHei"/>
+              <a:ea typeface="Microsoft YaHei"/>
+            </a:endParaRPr>
+          </a:p>
+          <a:p>
+            <a:pPr lvl="1"/>
+            <a:endParaRPr lang="en-US" altLang="zh-CN" sz="1400" b="1" dirty="0">
+              <a:solidFill>
+                <a:srgbClr val="F4F7FF"/>
+              </a:solidFill>
+              <a:latin typeface="Microsoft YaHei"/>
+              <a:ea typeface="Microsoft YaHei"/>
+            </a:endParaRPr>
+          </a:p>
+          <a:p>
+            <a:pPr lvl="1"/>
+            <a:r>
+              <a:rPr lang="zh-CN" altLang="zh-CN" sz="1400" b="1" dirty="0">
+                <a:solidFill>
+                  <a:srgbClr val="F4F7FF"/>
+                </a:solidFill>
+                <a:latin typeface="Microsoft YaHei"/>
+                <a:ea typeface="Microsoft YaHei"/>
+              </a:rPr>
+              <a:t>addi x1, x0, 5     </a:t>
+            </a:r>
+          </a:p>
+          <a:p>
+            <a:pPr lvl="1"/>
+            <a:r>
+              <a:rPr lang="zh-CN" altLang="zh-CN" sz="1400" b="1" dirty="0">
+                <a:solidFill>
+                  <a:srgbClr val="F4F7FF"/>
+                </a:solidFill>
+                <a:latin typeface="Microsoft YaHei"/>
+                <a:ea typeface="Microsoft YaHei"/>
+              </a:rPr>
+              <a:t>addi x2, x0, 7    </a:t>
+            </a:r>
+          </a:p>
+          <a:p>
+            <a:pPr lvl="1"/>
+            <a:r>
+              <a:rPr lang="zh-CN" altLang="zh-CN" sz="1400" b="1" dirty="0">
+                <a:solidFill>
+                  <a:srgbClr val="F4F7FF"/>
+                </a:solidFill>
+                <a:latin typeface="Microsoft YaHei"/>
+                <a:ea typeface="Microsoft YaHei"/>
+              </a:rPr>
+              <a:t>add </a:t>
+            </a:r>
+            <a:r>
+              <a:rPr lang="en-US" altLang="zh-CN" sz="1400" b="1" dirty="0">
+                <a:solidFill>
+                  <a:srgbClr val="F4F7FF"/>
+                </a:solidFill>
+                <a:latin typeface="Microsoft YaHei"/>
+                <a:ea typeface="Microsoft YaHei"/>
+              </a:rPr>
+              <a:t> </a:t>
+            </a:r>
+            <a:r>
+              <a:rPr lang="zh-CN" altLang="zh-CN" sz="1400" b="1" dirty="0">
+                <a:solidFill>
+                  <a:srgbClr val="F4F7FF"/>
+                </a:solidFill>
+                <a:latin typeface="Microsoft YaHei"/>
+                <a:ea typeface="Microsoft YaHei"/>
+              </a:rPr>
+              <a:t>x3, x1, x2</a:t>
+            </a:r>
+          </a:p>
+          <a:p>
+            <a:pPr>
+              <a:defRPr sz="1275" b="1">
+                <a:solidFill>
+                  <a:srgbClr val="F4F7FF"/>
+                </a:solidFill>
+                <a:latin typeface="Microsoft YaHei"/>
+                <a:ea typeface="Microsoft YaHei"/>
+                <a:cs typeface="Microsoft YaHei"/>
+              </a:defRPr>
+            </a:pPr>
+            <a:endParaRPr lang="en-US" sz="1400" b="1" dirty="0">
+              <a:solidFill>
+                <a:srgbClr val="F4F7FF"/>
+              </a:solidFill>
+              <a:latin typeface="Microsoft YaHei"/>
+              <a:ea typeface="Microsoft YaHei"/>
+              <a:cs typeface="Microsoft YaHei"/>
+            </a:endParaRPr>
+          </a:p>
+          <a:p>
+            <a:pPr algn="ctr">
+              <a:defRPr sz="1275" b="1">
+                <a:solidFill>
+                  <a:srgbClr val="F4F7FF"/>
+                </a:solidFill>
+                <a:latin typeface="Microsoft YaHei"/>
+                <a:ea typeface="Microsoft YaHei"/>
+                <a:cs typeface="Microsoft YaHei"/>
+              </a:defRPr>
+            </a:pPr>
+            <a:endParaRPr lang="en-US" sz="1400" b="1" dirty="0">
+              <a:solidFill>
+                <a:srgbClr val="F4F7FF"/>
+              </a:solidFill>
+              <a:latin typeface="Microsoft YaHei"/>
+              <a:ea typeface="Microsoft YaHei"/>
+              <a:cs typeface="Microsoft YaHei"/>
+            </a:endParaRPr>
+          </a:p>
+          <a:p>
+            <a:pPr algn="ctr">
+              <a:defRPr sz="1275" b="1">
+                <a:solidFill>
+                  <a:srgbClr val="F4F7FF"/>
+                </a:solidFill>
+                <a:latin typeface="Microsoft YaHei"/>
+                <a:ea typeface="Microsoft YaHei"/>
+                <a:cs typeface="Microsoft YaHei"/>
+              </a:defRPr>
+            </a:pPr>
+            <a:endParaRPr lang="en-US" sz="1400" b="1" dirty="0">
+              <a:solidFill>
+                <a:srgbClr val="F4F7FF"/>
+              </a:solidFill>
+              <a:latin typeface="Microsoft YaHei"/>
+              <a:ea typeface="Microsoft YaHei"/>
+              <a:cs typeface="Microsoft YaHei"/>
+            </a:endParaRPr>
+          </a:p>
+          <a:p>
+            <a:pPr algn="ctr">
+              <a:defRPr sz="1275" b="1">
+                <a:solidFill>
+                  <a:srgbClr val="F4F7FF"/>
+                </a:solidFill>
+                <a:latin typeface="Microsoft YaHei"/>
+                <a:ea typeface="Microsoft YaHei"/>
+                <a:cs typeface="Microsoft YaHei"/>
+              </a:defRPr>
+            </a:pPr>
+            <a:endParaRPr lang="en-US" sz="1400" b="1" dirty="0">
+              <a:solidFill>
+                <a:srgbClr val="F4F7FF"/>
+              </a:solidFill>
+              <a:latin typeface="Microsoft YaHei"/>
+              <a:ea typeface="Microsoft YaHei"/>
+              <a:cs typeface="Microsoft YaHei"/>
+            </a:endParaRPr>
+          </a:p>
+          <a:p>
+            <a:pPr algn="ctr">
+              <a:defRPr sz="1275" b="1">
+                <a:solidFill>
+                  <a:srgbClr val="F4F7FF"/>
+                </a:solidFill>
+                <a:latin typeface="Microsoft YaHei"/>
+                <a:ea typeface="Microsoft YaHei"/>
+                <a:cs typeface="Microsoft YaHei"/>
+              </a:defRPr>
+            </a:pPr>
+            <a:r>
+              <a:rPr sz="1400" b="1" dirty="0" err="1">
+                <a:solidFill>
+                  <a:srgbClr val="F4F7FF"/>
+                </a:solidFill>
+                <a:latin typeface="Microsoft YaHei"/>
+                <a:ea typeface="Microsoft YaHei"/>
+                <a:cs typeface="Microsoft YaHei"/>
+              </a:rPr>
+              <a:t>forward_a</a:t>
+            </a:r>
+            <a:r>
+              <a:rPr sz="1400" b="1" dirty="0">
+                <a:solidFill>
+                  <a:srgbClr val="F4F7FF"/>
+                </a:solidFill>
+                <a:latin typeface="Microsoft YaHei"/>
+                <a:ea typeface="Microsoft YaHei"/>
+                <a:cs typeface="Microsoft YaHei"/>
+              </a:rPr>
+              <a:t>=01，forward_b=10，</a:t>
+            </a:r>
+            <a:endParaRPr lang="en-US" sz="1400" b="1" dirty="0">
+              <a:solidFill>
+                <a:srgbClr val="F4F7FF"/>
+              </a:solidFill>
+              <a:latin typeface="Microsoft YaHei"/>
+              <a:ea typeface="Microsoft YaHei"/>
+              <a:cs typeface="Microsoft YaHei"/>
+            </a:endParaRPr>
+          </a:p>
+          <a:p>
+            <a:pPr algn="ctr">
+              <a:defRPr sz="1275" b="1">
+                <a:solidFill>
+                  <a:srgbClr val="F4F7FF"/>
+                </a:solidFill>
+                <a:latin typeface="Microsoft YaHei"/>
+                <a:ea typeface="Microsoft YaHei"/>
+                <a:cs typeface="Microsoft YaHei"/>
+              </a:defRPr>
+            </a:pPr>
+            <a:r>
+              <a:rPr sz="1400" b="1" dirty="0">
+                <a:solidFill>
+                  <a:srgbClr val="F4F7FF"/>
+                </a:solidFill>
+                <a:latin typeface="Microsoft YaHei"/>
+                <a:ea typeface="Microsoft YaHei"/>
+                <a:cs typeface="Microsoft YaHei"/>
+              </a:rPr>
+              <a:t>ALU </a:t>
+            </a:r>
+            <a:r>
+              <a:rPr sz="1400" b="1" dirty="0" err="1">
+                <a:solidFill>
+                  <a:srgbClr val="F4F7FF"/>
+                </a:solidFill>
+                <a:latin typeface="Microsoft YaHei"/>
+                <a:ea typeface="Microsoft YaHei"/>
+                <a:cs typeface="Microsoft YaHei"/>
+              </a:rPr>
+              <a:t>输入为</a:t>
+            </a:r>
+            <a:r>
+              <a:rPr sz="1400" b="1" dirty="0">
+                <a:solidFill>
+                  <a:srgbClr val="F4F7FF"/>
+                </a:solidFill>
+                <a:latin typeface="Microsoft YaHei"/>
+                <a:ea typeface="Microsoft YaHei"/>
+                <a:cs typeface="Microsoft YaHei"/>
+              </a:rPr>
+              <a:t> 5 和 7结果为 12</a:t>
+            </a:r>
+            <a:endParaRPr lang="en-US" sz="1400" b="1" dirty="0">
+              <a:solidFill>
+                <a:srgbClr val="F4F7FF"/>
+              </a:solidFill>
+              <a:latin typeface="Microsoft YaHei"/>
+              <a:ea typeface="Microsoft YaHei"/>
+              <a:cs typeface="Microsoft YaHei"/>
+            </a:endParaRPr>
+          </a:p>
+          <a:p>
+            <a:pPr algn="ctr">
+              <a:defRPr sz="1275" b="1">
+                <a:solidFill>
+                  <a:srgbClr val="F4F7FF"/>
+                </a:solidFill>
+                <a:latin typeface="Microsoft YaHei"/>
+                <a:ea typeface="Microsoft YaHei"/>
+                <a:cs typeface="Microsoft YaHei"/>
+              </a:defRPr>
+            </a:pPr>
+            <a:r>
+              <a:rPr sz="1400" b="1" dirty="0" err="1">
+                <a:solidFill>
+                  <a:srgbClr val="F4F7FF"/>
+                </a:solidFill>
+                <a:latin typeface="Microsoft YaHei"/>
+                <a:ea typeface="Microsoft YaHei"/>
+                <a:cs typeface="Microsoft YaHei"/>
+              </a:rPr>
+              <a:t>相关指令无需等待写回</a:t>
+            </a:r>
+            <a:endParaRPr sz="1400" b="1" dirty="0">
+              <a:solidFill>
+                <a:srgbClr val="F4F7FF"/>
+              </a:solidFill>
+              <a:latin typeface="Microsoft YaHei"/>
+              <a:ea typeface="Microsoft YaHei"/>
+              <a:cs typeface="Microsoft YaHei"/>
+            </a:endParaRPr>
+          </a:p>
+        </p:txBody>
+      </p:sp>
+      <p:pic>
+        <p:nvPicPr>
+          <p:cNvPr id="34" name="图片 33">
+            <a:extLst>
+              <a:ext uri="{FF2B5EF4-FFF2-40B4-BE49-F238E27FC236}">
+                <a16:creationId xmlns:a16="http://schemas.microsoft.com/office/drawing/2014/main" id="{11495AE5-E2DD-74ED-2165-16A94623BC13}"/>
+              </a:ext>
+            </a:extLst>
+          </p:cNvPr>
+          <p:cNvPicPr>
+            <a:picLocks noChangeAspect="1"/>
+          </p:cNvPicPr>
+          <p:nvPr/>
+        </p:nvPicPr>
+        <p:blipFill>
+          <a:blip r:embed="rId3">
+            <a:extLst>
+              <a:ext uri="{28A0092B-C50C-407E-A947-70E740481C1C}">
+                <a14:useLocalDpi xmlns:a14="http://schemas.microsoft.com/office/drawing/2010/main" val="0"/>
+              </a:ext>
+            </a:extLst>
+          </a:blip>
+          <a:stretch>
+            <a:fillRect/>
+          </a:stretch>
+        </p:blipFill>
+        <p:spPr>
+          <a:xfrm>
+            <a:off x="548640" y="1295400"/>
+            <a:ext cx="8680704" cy="5048610"/>
+          </a:xfrm>
+          <a:prstGeom prst="rect">
+            <a:avLst/>
+          </a:prstGeom>
+        </p:spPr>
+      </p:pic>
     </p:spTree>
     <p:extLst>
       <p:ext uri="{BB962C8B-B14F-4D97-AF65-F5344CB8AC3E}">
-        <p14:creationId xmlns:p14="http://schemas.microsoft.com/office/powerpoint/2010/main" val="2109804027"/>
+        <p14:creationId xmlns:p14="http://schemas.microsoft.com/office/powerpoint/2010/main" val="632833072"/>
       </p:ext>
     </p:extLst>
   </p:cSld>
@@ -22058,7 +23020,7 @@
           <p:cNvPr id="2" name="Text 0">
             <a:extLst>
               <a:ext uri="{FF2B5EF4-FFF2-40B4-BE49-F238E27FC236}">
-                <a16:creationId xmlns:a16="http://schemas.microsoft.com/office/drawing/2014/main" id="{FFAEC3B8-BD3E-4655-926F-46FF73DA6628}"/>
+                <a16:creationId xmlns:a16="http://schemas.microsoft.com/office/drawing/2014/main" id="{6D1F8209-DAE2-446A-8BDD-54ED53E5F2E4}"/>
               </a:ext>
             </a:extLst>
           </p:cNvPr>
@@ -22095,7 +23057,7 @@
                 <a:ea typeface="Microsoft YaHei"/>
                 <a:cs typeface="Microsoft YaHei"/>
               </a:rPr>
-              <a:t>分支与跳转</a:t>
+              <a:t>停顿机制</a:t>
             </a:r>
             <a:endParaRPr sz="850"/>
           </a:p>
@@ -22106,7 +23068,7 @@
           <p:cNvPr id="3" name="Text 1">
             <a:extLst>
               <a:ext uri="{FF2B5EF4-FFF2-40B4-BE49-F238E27FC236}">
-                <a16:creationId xmlns:a16="http://schemas.microsoft.com/office/drawing/2014/main" id="{75042E01-CC49-42F1-A892-39CC9B6B5B7D}"/>
+                <a16:creationId xmlns:a16="http://schemas.microsoft.com/office/drawing/2014/main" id="{01F4A80C-1C22-4829-A2A9-17A2FA077A39}"/>
               </a:ext>
             </a:extLst>
           </p:cNvPr>
@@ -22143,7 +23105,7 @@
                 <a:ea typeface="Microsoft YaHei"/>
                 <a:cs typeface="Microsoft YaHei"/>
               </a:rPr>
-              <a:t>控制相关解决方案</a:t>
+              <a:t>load-use 与存储等待</a:t>
             </a:r>
             <a:endParaRPr sz="2400"/>
           </a:p>
@@ -22154,7 +23116,7 @@
           <p:cNvPr id="4" name="Text 2">
             <a:extLst>
               <a:ext uri="{FF2B5EF4-FFF2-40B4-BE49-F238E27FC236}">
-                <a16:creationId xmlns:a16="http://schemas.microsoft.com/office/drawing/2014/main" id="{715958F3-3CD7-439E-8914-8A4EB22ED94D}"/>
+                <a16:creationId xmlns:a16="http://schemas.microsoft.com/office/drawing/2014/main" id="{E49318E5-98CF-45EB-AF8C-0A411FE0DAEF}"/>
               </a:ext>
             </a:extLst>
           </p:cNvPr>
@@ -22191,7 +23153,7 @@
                 <a:ea typeface="Microsoft YaHei"/>
                 <a:cs typeface="Microsoft YaHei"/>
               </a:rPr>
-              <a:t>EX 级确认方向后，PC 重定向并作废两条年轻错误路径指令</a:t>
+              <a:t>数据未产生时插入气泡，存储未响应时冻结后端</a:t>
             </a:r>
             <a:endParaRPr sz="1150"/>
           </a:p>
@@ -22202,18 +23164,18 @@
           <p:cNvPr id="5" name="Text 3">
             <a:extLst>
               <a:ext uri="{FF2B5EF4-FFF2-40B4-BE49-F238E27FC236}">
-                <a16:creationId xmlns:a16="http://schemas.microsoft.com/office/drawing/2014/main" id="{8D73DDF9-5B65-4AD8-A36C-AF0C97C9AC87}"/>
-              </a:ext>
-            </a:extLst>
-          </p:cNvPr>
-          <p:cNvSpPr>
-            <a:spLocks noGrp="1"/>
-          </p:cNvSpPr>
-          <p:nvPr/>
-        </p:nvSpPr>
-        <p:spPr>
-          <a:xfrm>
-            <a:off x="11137392" y="384048"/>
+                <a16:creationId xmlns:a16="http://schemas.microsoft.com/office/drawing/2014/main" id="{237391D6-140C-480F-BD0A-A79BA17F4E49}"/>
+              </a:ext>
+            </a:extLst>
+          </p:cNvPr>
+          <p:cNvSpPr>
+            <a:spLocks noGrp="1"/>
+          </p:cNvSpPr>
+          <p:nvPr/>
+        </p:nvSpPr>
+        <p:spPr>
+          <a:xfrm>
+            <a:off x="11158728" y="384048"/>
             <a:ext cx="502920" cy="228600"/>
           </a:xfrm>
           <a:prstGeom prst="rect">
@@ -22229,7 +23191,7 @@
               <a:buNone/>
             </a:pPr>
             <a:r>
-              <a:rPr sz="1000" b="1">
+              <a:rPr lang="en-US" sz="1000" b="1" dirty="0">
                 <a:solidFill>
                   <a:srgbClr val="8392B7"/>
                 </a:solidFill>
@@ -22239,7 +23201,7 @@
               </a:rPr>
               <a:t>09</a:t>
             </a:r>
-            <a:endParaRPr sz="1000"/>
+            <a:endParaRPr sz="1000" dirty="0"/>
           </a:p>
         </p:txBody>
       </p:sp>
@@ -22248,7 +23210,7 @@
           <p:cNvPr id="6" name="Shape 4">
             <a:extLst>
               <a:ext uri="{FF2B5EF4-FFF2-40B4-BE49-F238E27FC236}">
-                <a16:creationId xmlns:a16="http://schemas.microsoft.com/office/drawing/2014/main" id="{5488BDE7-D686-42F5-B49A-4A621D48B300}"/>
+                <a16:creationId xmlns:a16="http://schemas.microsoft.com/office/drawing/2014/main" id="{367B4B92-5938-4051-9510-2B72DDF6310E}"/>
               </a:ext>
             </a:extLst>
           </p:cNvPr>
@@ -22281,7 +23243,7 @@
           <p:cNvPr id="7" name="Shape 5">
             <a:extLst>
               <a:ext uri="{FF2B5EF4-FFF2-40B4-BE49-F238E27FC236}">
-                <a16:creationId xmlns:a16="http://schemas.microsoft.com/office/drawing/2014/main" id="{3BE6A8E9-3863-484D-A274-AD03EB8815DF}"/>
+                <a16:creationId xmlns:a16="http://schemas.microsoft.com/office/drawing/2014/main" id="{46A7EA47-53EF-4FBF-BB3B-B6BD9BA215F2}"/>
               </a:ext>
             </a:extLst>
           </p:cNvPr>
@@ -22309,199 +23271,28 @@
       </p:sp>
       <p:sp>
         <p:nvSpPr>
-          <p:cNvPr id="8" name="Shape 6">
-            <a:extLst>
-              <a:ext uri="{FF2B5EF4-FFF2-40B4-BE49-F238E27FC236}">
-                <a16:creationId xmlns:a16="http://schemas.microsoft.com/office/drawing/2014/main" id="{2F2B2B9E-3622-41B5-BCC0-61391E74DECC}"/>
-              </a:ext>
-            </a:extLst>
-          </p:cNvPr>
-          <p:cNvSpPr>
-            <a:spLocks noGrp="1"/>
-          </p:cNvSpPr>
-          <p:nvPr/>
-        </p:nvSpPr>
-        <p:spPr>
-          <a:xfrm>
-            <a:off x="2743200" y="2176272"/>
-            <a:ext cx="713232" cy="0"/>
-          </a:xfrm>
-          <a:prstGeom prst="line">
-            <a:avLst/>
-          </a:prstGeom>
-          <a:noFill/>
-          <a:ln w="16510">
-            <a:solidFill>
-              <a:srgbClr val="22D3EE"/>
-            </a:solidFill>
-            <a:prstDash val="solid"/>
-            <a:headEnd type="none"/>
-            <a:tailEnd type="triangle"/>
-          </a:ln>
-        </p:spPr>
-      </p:sp>
-      <p:sp>
-        <p:nvSpPr>
-          <p:cNvPr id="9" name="Shape 7">
-            <a:extLst>
-              <a:ext uri="{FF2B5EF4-FFF2-40B4-BE49-F238E27FC236}">
-                <a16:creationId xmlns:a16="http://schemas.microsoft.com/office/drawing/2014/main" id="{C7C8501A-4AFF-4E57-A2BB-D2B23A78EA68}"/>
-              </a:ext>
-            </a:extLst>
-          </p:cNvPr>
-          <p:cNvSpPr>
-            <a:spLocks noGrp="1"/>
-          </p:cNvSpPr>
-          <p:nvPr/>
-        </p:nvSpPr>
-        <p:spPr>
-          <a:xfrm>
-            <a:off x="5440680" y="2176272"/>
-            <a:ext cx="713232" cy="0"/>
-          </a:xfrm>
-          <a:prstGeom prst="line">
-            <a:avLst/>
-          </a:prstGeom>
-          <a:noFill/>
-          <a:ln w="16510">
-            <a:solidFill>
-              <a:srgbClr val="22D3EE"/>
-            </a:solidFill>
-            <a:prstDash val="solid"/>
-            <a:headEnd type="none"/>
-            <a:tailEnd type="triangle"/>
-          </a:ln>
-        </p:spPr>
-      </p:sp>
-      <p:sp>
-        <p:nvSpPr>
-          <p:cNvPr id="10" name="Shape 8">
-            <a:extLst>
-              <a:ext uri="{FF2B5EF4-FFF2-40B4-BE49-F238E27FC236}">
-                <a16:creationId xmlns:a16="http://schemas.microsoft.com/office/drawing/2014/main" id="{E6DB3879-99F0-4D11-A0F6-87565EAE1D6D}"/>
-              </a:ext>
-            </a:extLst>
-          </p:cNvPr>
-          <p:cNvSpPr>
-            <a:spLocks noGrp="1"/>
-          </p:cNvSpPr>
-          <p:nvPr/>
-        </p:nvSpPr>
-        <p:spPr>
-          <a:xfrm>
-            <a:off x="8138160" y="2176272"/>
-            <a:ext cx="713232" cy="0"/>
-          </a:xfrm>
-          <a:prstGeom prst="line">
-            <a:avLst/>
-          </a:prstGeom>
-          <a:noFill/>
-          <a:ln w="16510">
-            <a:solidFill>
-              <a:srgbClr val="22D3EE"/>
-            </a:solidFill>
-            <a:prstDash val="solid"/>
-            <a:headEnd type="none"/>
-            <a:tailEnd type="triangle"/>
-          </a:ln>
-        </p:spPr>
-      </p:sp>
-      <p:sp>
-        <p:nvSpPr>
-          <p:cNvPr id="11" name="Text 9">
-            <a:extLst>
-              <a:ext uri="{FF2B5EF4-FFF2-40B4-BE49-F238E27FC236}">
-                <a16:creationId xmlns:a16="http://schemas.microsoft.com/office/drawing/2014/main" id="{15B5FC59-E8FB-4D7D-ADA6-B50570B27A68}"/>
-              </a:ext>
-            </a:extLst>
-          </p:cNvPr>
-          <p:cNvSpPr>
-            <a:spLocks noGrp="1"/>
-          </p:cNvSpPr>
-          <p:nvPr/>
-        </p:nvSpPr>
-        <p:spPr>
-          <a:xfrm>
-            <a:off x="868680" y="1847088"/>
-            <a:ext cx="1828800" cy="658368"/>
+          <p:cNvPr id="8" name="Text 6">
+            <a:extLst>
+              <a:ext uri="{FF2B5EF4-FFF2-40B4-BE49-F238E27FC236}">
+                <a16:creationId xmlns:a16="http://schemas.microsoft.com/office/drawing/2014/main" id="{6DC5EC19-2365-4CAA-9C04-829AF143104E}"/>
+              </a:ext>
+            </a:extLst>
+          </p:cNvPr>
+          <p:cNvSpPr>
+            <a:spLocks noGrp="1"/>
+          </p:cNvSpPr>
+          <p:nvPr/>
+        </p:nvSpPr>
+        <p:spPr>
+          <a:xfrm>
+            <a:off x="786384" y="1755648"/>
+            <a:ext cx="5120640" cy="1005840"/>
           </a:xfrm>
           <a:prstGeom prst="rect">
             <a:avLst/>
           </a:prstGeom>
           <a:solidFill>
-            <a:srgbClr val="19233B"/>
-          </a:solidFill>
-          <a:ln w="15240">
-            <a:solidFill>
-              <a:srgbClr val="34D399"/>
-            </a:solidFill>
-          </a:ln>
-        </p:spPr>
-        <p:txBody>
-          <a:bodyPr wrap="square" lIns="1270" tIns="1270" rIns="1270" bIns="1270" anchor="ctr">
-            <a:normAutofit/>
-          </a:bodyPr>
-          <a:lstStyle/>
-          <a:p>
-            <a:pPr marL="0" indent="0" algn="ctr">
-              <a:buNone/>
-            </a:pPr>
-            <a:r>
-              <a:rPr sz="1020" b="1">
-                <a:solidFill>
-                  <a:srgbClr val="F7FAFF"/>
-                </a:solidFill>
-                <a:latin typeface="Microsoft YaHei"/>
-                <a:ea typeface="Microsoft YaHei"/>
-                <a:cs typeface="Microsoft YaHei"/>
-              </a:rPr>
-              <a:t>BEQ / JAL</a:t>
-            </a:r>
-            <a:endParaRPr sz="1020"/>
-          </a:p>
-          <a:p>
-            <a:pPr marL="0" indent="0" algn="ctr">
-              <a:buNone/>
-            </a:pPr>
-            <a:r>
-              <a:rPr sz="1020" b="1">
-                <a:solidFill>
-                  <a:srgbClr val="F7FAFF"/>
-                </a:solidFill>
-                <a:latin typeface="Microsoft YaHei"/>
-                <a:ea typeface="Microsoft YaHei"/>
-                <a:cs typeface="Microsoft YaHei"/>
-              </a:rPr>
-              <a:t>EX 判定 taken</a:t>
-            </a:r>
-            <a:endParaRPr sz="1020"/>
-          </a:p>
-        </p:txBody>
-      </p:sp>
-      <p:sp>
-        <p:nvSpPr>
-          <p:cNvPr id="12" name="Text 10">
-            <a:extLst>
-              <a:ext uri="{FF2B5EF4-FFF2-40B4-BE49-F238E27FC236}">
-                <a16:creationId xmlns:a16="http://schemas.microsoft.com/office/drawing/2014/main" id="{0A1302F8-245B-436C-B954-7206B97D9202}"/>
-              </a:ext>
-            </a:extLst>
-          </p:cNvPr>
-          <p:cNvSpPr>
-            <a:spLocks noGrp="1"/>
-          </p:cNvSpPr>
-          <p:nvPr/>
-        </p:nvSpPr>
-        <p:spPr>
-          <a:xfrm>
-            <a:off x="3566160" y="1847088"/>
-            <a:ext cx="1828800" cy="658368"/>
-          </a:xfrm>
-          <a:prstGeom prst="rect">
-            <a:avLst/>
-          </a:prstGeom>
-          <a:solidFill>
-            <a:srgbClr val="19233B"/>
+            <a:srgbClr val="121A2D"/>
           </a:solidFill>
           <a:ln w="15240">
             <a:solidFill>
@@ -22510,16 +23301,16 @@
           </a:ln>
         </p:spPr>
         <p:txBody>
-          <a:bodyPr wrap="square" lIns="1270" tIns="1270" rIns="1270" bIns="1270" anchor="ctr">
-            <a:normAutofit/>
-          </a:bodyPr>
-          <a:lstStyle/>
-          <a:p>
-            <a:pPr marL="0" indent="0" algn="ctr">
-              <a:buNone/>
-            </a:pPr>
-            <a:r>
-              <a:rPr sz="1020" b="1">
+          <a:bodyPr wrap="square" lIns="1651" tIns="1651" rIns="1651" bIns="1651" anchor="ctr">
+            <a:normAutofit/>
+          </a:bodyPr>
+          <a:lstStyle/>
+          <a:p>
+            <a:pPr marL="0" indent="0" algn="l">
+              <a:buNone/>
+            </a:pPr>
+            <a:r>
+              <a:rPr sz="1140" b="1">
                 <a:solidFill>
                   <a:srgbClr val="F7FAFF"/>
                 </a:solidFill>
@@ -22527,16 +23318,16 @@
                 <a:ea typeface="Microsoft YaHei"/>
                 <a:cs typeface="Microsoft YaHei"/>
               </a:rPr>
-              <a:t>redirect</a:t>
-            </a:r>
-            <a:endParaRPr sz="1020"/>
-          </a:p>
-          <a:p>
-            <a:pPr marL="0" indent="0" algn="ctr">
-              <a:buNone/>
-            </a:pPr>
-            <a:r>
-              <a:rPr sz="1020" b="1">
+              <a:t>  load-use</a:t>
+            </a:r>
+            <a:endParaRPr sz="1140"/>
+          </a:p>
+          <a:p>
+            <a:pPr marL="0" indent="0" algn="l">
+              <a:buNone/>
+            </a:pPr>
+            <a:r>
+              <a:rPr sz="1140" b="1">
                 <a:solidFill>
                   <a:srgbClr val="F7FAFF"/>
                 </a:solidFill>
@@ -22544,45 +23335,226 @@
                 <a:ea typeface="Microsoft YaHei"/>
                 <a:cs typeface="Microsoft YaHei"/>
               </a:rPr>
-              <a:t>计算真实目标 PC</a:t>
-            </a:r>
-            <a:endParaRPr sz="1020"/>
-          </a:p>
-        </p:txBody>
-      </p:sp>
-      <p:sp>
-        <p:nvSpPr>
-          <p:cNvPr id="13" name="Text 11">
-            <a:extLst>
-              <a:ext uri="{FF2B5EF4-FFF2-40B4-BE49-F238E27FC236}">
-                <a16:creationId xmlns:a16="http://schemas.microsoft.com/office/drawing/2014/main" id="{0B3358AB-44F7-4966-87EB-36957E66A8EF}"/>
-              </a:ext>
-            </a:extLst>
-          </p:cNvPr>
-          <p:cNvSpPr>
-            <a:spLocks noGrp="1"/>
-          </p:cNvSpPr>
-          <p:nvPr/>
-        </p:nvSpPr>
-        <p:spPr>
-          <a:xfrm>
-            <a:off x="6263640" y="1847088"/>
-            <a:ext cx="1828800" cy="658368"/>
+              <a:t>  保持 PC 与 IF/ID</a:t>
+            </a:r>
+            <a:endParaRPr sz="1140"/>
+          </a:p>
+          <a:p>
+            <a:pPr marL="0" indent="0" algn="l">
+              <a:buNone/>
+            </a:pPr>
+            <a:r>
+              <a:rPr sz="1140" b="1">
+                <a:solidFill>
+                  <a:srgbClr val="F7FAFF"/>
+                </a:solidFill>
+                <a:latin typeface="Microsoft YaHei"/>
+                <a:ea typeface="Microsoft YaHei"/>
+                <a:cs typeface="Microsoft YaHei"/>
+              </a:rPr>
+              <a:t>  向 ID/EX 插入 1 个气泡</a:t>
+            </a:r>
+            <a:endParaRPr sz="1140"/>
+          </a:p>
+          <a:p>
+            <a:pPr marL="0" indent="0" algn="l">
+              <a:buNone/>
+            </a:pPr>
+            <a:r>
+              <a:rPr sz="1140" b="1">
+                <a:solidFill>
+                  <a:srgbClr val="F7FAFF"/>
+                </a:solidFill>
+                <a:latin typeface="Microsoft YaHei"/>
+                <a:ea typeface="Microsoft YaHei"/>
+                <a:cs typeface="Microsoft YaHei"/>
+              </a:rPr>
+              <a:t>  数据到 MEM/WB 后前递给消费者  </a:t>
+            </a:r>
+            <a:endParaRPr sz="1140"/>
+          </a:p>
+        </p:txBody>
+      </p:sp>
+      <p:sp>
+        <p:nvSpPr>
+          <p:cNvPr id="9" name="Text 7">
+            <a:extLst>
+              <a:ext uri="{FF2B5EF4-FFF2-40B4-BE49-F238E27FC236}">
+                <a16:creationId xmlns:a16="http://schemas.microsoft.com/office/drawing/2014/main" id="{9043C63C-AC8E-4BDE-8C2A-165A20D3BA4B}"/>
+              </a:ext>
+            </a:extLst>
+          </p:cNvPr>
+          <p:cNvSpPr>
+            <a:spLocks noGrp="1"/>
+          </p:cNvSpPr>
+          <p:nvPr/>
+        </p:nvSpPr>
+        <p:spPr>
+          <a:xfrm>
+            <a:off x="6291072" y="1755648"/>
+            <a:ext cx="5120640" cy="1005840"/>
           </a:xfrm>
           <a:prstGeom prst="rect">
             <a:avLst/>
           </a:prstGeom>
           <a:solidFill>
-            <a:srgbClr val="19233B"/>
+            <a:srgbClr val="201B12"/>
           </a:solidFill>
           <a:ln w="15240">
             <a:solidFill>
-              <a:srgbClr val="F87171"/>
+              <a:srgbClr val="F59E0B"/>
             </a:solidFill>
           </a:ln>
         </p:spPr>
         <p:txBody>
-          <a:bodyPr wrap="square" lIns="1270" tIns="1270" rIns="1270" bIns="1270" anchor="ctr">
+          <a:bodyPr wrap="square" lIns="1651" tIns="1651" rIns="1651" bIns="1651" anchor="ctr">
+            <a:normAutofit/>
+          </a:bodyPr>
+          <a:lstStyle/>
+          <a:p>
+            <a:pPr marL="0" indent="0" algn="l">
+              <a:buNone/>
+            </a:pPr>
+            <a:r>
+              <a:rPr sz="1140" b="1">
+                <a:solidFill>
+                  <a:srgbClr val="FFF2D2"/>
+                </a:solidFill>
+                <a:latin typeface="Microsoft YaHei"/>
+                <a:ea typeface="Microsoft YaHei"/>
+                <a:cs typeface="Microsoft YaHei"/>
+              </a:rPr>
+              <a:t>  存储器等待</a:t>
+            </a:r>
+            <a:endParaRPr sz="1140"/>
+          </a:p>
+          <a:p>
+            <a:pPr marL="0" indent="0" algn="l">
+              <a:buNone/>
+            </a:pPr>
+            <a:r>
+              <a:rPr sz="1140" b="1">
+                <a:solidFill>
+                  <a:srgbClr val="FFF2D2"/>
+                </a:solidFill>
+                <a:latin typeface="Microsoft YaHei"/>
+                <a:ea typeface="Microsoft YaHei"/>
+                <a:cs typeface="Microsoft YaHei"/>
+              </a:rPr>
+              <a:t>  保持 EX/MEM 和请求信息</a:t>
+            </a:r>
+            <a:endParaRPr sz="1140"/>
+          </a:p>
+          <a:p>
+            <a:pPr marL="0" indent="0" algn="l">
+              <a:buNone/>
+            </a:pPr>
+            <a:r>
+              <a:rPr sz="1140" b="1">
+                <a:solidFill>
+                  <a:srgbClr val="FFF2D2"/>
+                </a:solidFill>
+                <a:latin typeface="Microsoft YaHei"/>
+                <a:ea typeface="Microsoft YaHei"/>
+                <a:cs typeface="Microsoft YaHei"/>
+              </a:rPr>
+              <a:t>  MEM/WB 注入气泡，避免重复退休</a:t>
+            </a:r>
+            <a:endParaRPr sz="1140"/>
+          </a:p>
+          <a:p>
+            <a:pPr marL="0" indent="0" algn="l">
+              <a:buNone/>
+            </a:pPr>
+            <a:r>
+              <a:rPr sz="1140" b="1">
+                <a:solidFill>
+                  <a:srgbClr val="FFF2D2"/>
+                </a:solidFill>
+                <a:latin typeface="Microsoft YaHei"/>
+                <a:ea typeface="Microsoft YaHei"/>
+                <a:cs typeface="Microsoft YaHei"/>
+              </a:rPr>
+              <a:t>  ready 到达后只提交一次</a:t>
+            </a:r>
+            <a:endParaRPr sz="1140"/>
+          </a:p>
+        </p:txBody>
+      </p:sp>
+      <p:sp>
+        <p:nvSpPr>
+          <p:cNvPr id="10" name="Text 8">
+            <a:extLst>
+              <a:ext uri="{FF2B5EF4-FFF2-40B4-BE49-F238E27FC236}">
+                <a16:creationId xmlns:a16="http://schemas.microsoft.com/office/drawing/2014/main" id="{2E869CA9-29B0-45E8-A3D5-158523B848C8}"/>
+              </a:ext>
+            </a:extLst>
+          </p:cNvPr>
+          <p:cNvSpPr>
+            <a:spLocks noGrp="1"/>
+          </p:cNvSpPr>
+          <p:nvPr/>
+        </p:nvSpPr>
+        <p:spPr>
+          <a:xfrm>
+            <a:off x="841248" y="3310128"/>
+            <a:ext cx="502920" cy="164592"/>
+          </a:xfrm>
+          <a:prstGeom prst="rect">
+            <a:avLst/>
+          </a:prstGeom>
+          <a:noFill/>
+        </p:spPr>
+        <p:txBody>
+          <a:bodyPr wrap="square" lIns="0" tIns="0" rIns="0" bIns="0" anchor="t">
+            <a:normAutofit/>
+          </a:bodyPr>
+          <a:lstStyle/>
+          <a:p>
+            <a:pPr marL="0" indent="0" algn="l">
+              <a:buNone/>
+            </a:pPr>
+            <a:r>
+              <a:rPr sz="880">
+                <a:solidFill>
+                  <a:srgbClr val="8392B7"/>
+                </a:solidFill>
+                <a:latin typeface="Microsoft YaHei"/>
+                <a:ea typeface="Microsoft YaHei"/>
+                <a:cs typeface="Microsoft YaHei"/>
+              </a:rPr>
+              <a:t>周期</a:t>
+            </a:r>
+            <a:endParaRPr sz="880"/>
+          </a:p>
+        </p:txBody>
+      </p:sp>
+      <p:sp>
+        <p:nvSpPr>
+          <p:cNvPr id="11" name="Text 9">
+            <a:extLst>
+              <a:ext uri="{FF2B5EF4-FFF2-40B4-BE49-F238E27FC236}">
+                <a16:creationId xmlns:a16="http://schemas.microsoft.com/office/drawing/2014/main" id="{F83C6AA2-FB52-46C4-8306-81BDBAD84D18}"/>
+              </a:ext>
+            </a:extLst>
+          </p:cNvPr>
+          <p:cNvSpPr>
+            <a:spLocks noGrp="1"/>
+          </p:cNvSpPr>
+          <p:nvPr/>
+        </p:nvSpPr>
+        <p:spPr>
+          <a:xfrm>
+            <a:off x="1874520" y="3310128"/>
+            <a:ext cx="274320" cy="164592"/>
+          </a:xfrm>
+          <a:prstGeom prst="rect">
+            <a:avLst/>
+          </a:prstGeom>
+          <a:noFill/>
+        </p:spPr>
+        <p:txBody>
+          <a:bodyPr wrap="square" lIns="0" tIns="0" rIns="0" bIns="0" anchor="t">
             <a:normAutofit/>
           </a:bodyPr>
           <a:lstStyle/>
@@ -22591,34 +23563,113 @@
               <a:buNone/>
             </a:pPr>
             <a:r>
-              <a:rPr sz="1020" b="1">
-                <a:solidFill>
-                  <a:srgbClr val="F7FAFF"/>
-                </a:solidFill>
-                <a:latin typeface="Microsoft YaHei"/>
-                <a:ea typeface="Microsoft YaHei"/>
-                <a:cs typeface="Microsoft YaHei"/>
-              </a:rPr>
-              <a:t>flush</a:t>
-            </a:r>
-            <a:endParaRPr sz="1020"/>
-          </a:p>
+              <a:rPr sz="880">
+                <a:solidFill>
+                  <a:srgbClr val="8392B7"/>
+                </a:solidFill>
+                <a:latin typeface="Microsoft YaHei"/>
+                <a:ea typeface="Microsoft YaHei"/>
+                <a:cs typeface="Microsoft YaHei"/>
+              </a:rPr>
+              <a:t>1</a:t>
+            </a:r>
+            <a:endParaRPr sz="880"/>
+          </a:p>
+        </p:txBody>
+      </p:sp>
+      <p:sp>
+        <p:nvSpPr>
+          <p:cNvPr id="12" name="Text 10">
+            <a:extLst>
+              <a:ext uri="{FF2B5EF4-FFF2-40B4-BE49-F238E27FC236}">
+                <a16:creationId xmlns:a16="http://schemas.microsoft.com/office/drawing/2014/main" id="{C96249A5-0C74-4E1A-9254-A03C07A9A17A}"/>
+              </a:ext>
+            </a:extLst>
+          </p:cNvPr>
+          <p:cNvSpPr>
+            <a:spLocks noGrp="1"/>
+          </p:cNvSpPr>
+          <p:nvPr/>
+        </p:nvSpPr>
+        <p:spPr>
+          <a:xfrm>
+            <a:off x="2971800" y="3310128"/>
+            <a:ext cx="274320" cy="164592"/>
+          </a:xfrm>
+          <a:prstGeom prst="rect">
+            <a:avLst/>
+          </a:prstGeom>
+          <a:noFill/>
+        </p:spPr>
+        <p:txBody>
+          <a:bodyPr wrap="square" lIns="0" tIns="0" rIns="0" bIns="0" anchor="t">
+            <a:normAutofit/>
+          </a:bodyPr>
+          <a:lstStyle/>
           <a:p>
             <a:pPr marL="0" indent="0" algn="ctr">
               <a:buNone/>
             </a:pPr>
             <a:r>
-              <a:rPr sz="1020" b="1">
-                <a:solidFill>
-                  <a:srgbClr val="F7FAFF"/>
-                </a:solidFill>
-                <a:latin typeface="Microsoft YaHei"/>
-                <a:ea typeface="Microsoft YaHei"/>
-                <a:cs typeface="Microsoft YaHei"/>
-              </a:rPr>
-              <a:t>IF/ID 与 ID/EX 清 valid</a:t>
-            </a:r>
-            <a:endParaRPr sz="1020"/>
+              <a:rPr sz="880">
+                <a:solidFill>
+                  <a:srgbClr val="8392B7"/>
+                </a:solidFill>
+                <a:latin typeface="Microsoft YaHei"/>
+                <a:ea typeface="Microsoft YaHei"/>
+                <a:cs typeface="Microsoft YaHei"/>
+              </a:rPr>
+              <a:t>2</a:t>
+            </a:r>
+            <a:endParaRPr sz="880"/>
+          </a:p>
+        </p:txBody>
+      </p:sp>
+      <p:sp>
+        <p:nvSpPr>
+          <p:cNvPr id="13" name="Text 11">
+            <a:extLst>
+              <a:ext uri="{FF2B5EF4-FFF2-40B4-BE49-F238E27FC236}">
+                <a16:creationId xmlns:a16="http://schemas.microsoft.com/office/drawing/2014/main" id="{5CBFEF2C-B6D9-46F2-A4AA-0A33AB2EAEF6}"/>
+              </a:ext>
+            </a:extLst>
+          </p:cNvPr>
+          <p:cNvSpPr>
+            <a:spLocks noGrp="1"/>
+          </p:cNvSpPr>
+          <p:nvPr/>
+        </p:nvSpPr>
+        <p:spPr>
+          <a:xfrm>
+            <a:off x="4069080" y="3310128"/>
+            <a:ext cx="274320" cy="164592"/>
+          </a:xfrm>
+          <a:prstGeom prst="rect">
+            <a:avLst/>
+          </a:prstGeom>
+          <a:noFill/>
+        </p:spPr>
+        <p:txBody>
+          <a:bodyPr wrap="square" lIns="0" tIns="0" rIns="0" bIns="0" anchor="t">
+            <a:normAutofit/>
+          </a:bodyPr>
+          <a:lstStyle/>
+          <a:p>
+            <a:pPr marL="0" indent="0" algn="ctr">
+              <a:buNone/>
+            </a:pPr>
+            <a:r>
+              <a:rPr sz="880">
+                <a:solidFill>
+                  <a:srgbClr val="8392B7"/>
+                </a:solidFill>
+                <a:latin typeface="Microsoft YaHei"/>
+                <a:ea typeface="Microsoft YaHei"/>
+                <a:cs typeface="Microsoft YaHei"/>
+              </a:rPr>
+              <a:t>3</a:t>
+            </a:r>
+            <a:endParaRPr sz="880"/>
           </a:p>
         </p:txBody>
       </p:sp>
@@ -22627,34 +23678,27 @@
           <p:cNvPr id="14" name="Text 12">
             <a:extLst>
               <a:ext uri="{FF2B5EF4-FFF2-40B4-BE49-F238E27FC236}">
-                <a16:creationId xmlns:a16="http://schemas.microsoft.com/office/drawing/2014/main" id="{B2EC0468-6FC9-4901-96FC-0287A3E93F73}"/>
-              </a:ext>
-            </a:extLst>
-          </p:cNvPr>
-          <p:cNvSpPr>
-            <a:spLocks noGrp="1"/>
-          </p:cNvSpPr>
-          <p:nvPr/>
-        </p:nvSpPr>
-        <p:spPr>
-          <a:xfrm>
-            <a:off x="8961120" y="1847088"/>
-            <a:ext cx="1828800" cy="658368"/>
-          </a:xfrm>
-          <a:prstGeom prst="rect">
-            <a:avLst/>
-          </a:prstGeom>
-          <a:solidFill>
-            <a:srgbClr val="19233B"/>
-          </a:solidFill>
-          <a:ln w="15240">
-            <a:solidFill>
-              <a:srgbClr val="22D3EE"/>
-            </a:solidFill>
-          </a:ln>
-        </p:spPr>
-        <p:txBody>
-          <a:bodyPr wrap="square" lIns="1270" tIns="1270" rIns="1270" bIns="1270" anchor="ctr">
+                <a16:creationId xmlns:a16="http://schemas.microsoft.com/office/drawing/2014/main" id="{4B2B9F0D-AFBE-4111-9E1F-D06EE42943FA}"/>
+              </a:ext>
+            </a:extLst>
+          </p:cNvPr>
+          <p:cNvSpPr>
+            <a:spLocks noGrp="1"/>
+          </p:cNvSpPr>
+          <p:nvPr/>
+        </p:nvSpPr>
+        <p:spPr>
+          <a:xfrm>
+            <a:off x="5166360" y="3310128"/>
+            <a:ext cx="274320" cy="164592"/>
+          </a:xfrm>
+          <a:prstGeom prst="rect">
+            <a:avLst/>
+          </a:prstGeom>
+          <a:noFill/>
+        </p:spPr>
+        <p:txBody>
+          <a:bodyPr wrap="square" lIns="0" tIns="0" rIns="0" bIns="0" anchor="t">
             <a:normAutofit/>
           </a:bodyPr>
           <a:lstStyle/>
@@ -22663,55 +23707,86 @@
               <a:buNone/>
             </a:pPr>
             <a:r>
-              <a:rPr sz="1020" b="1">
-                <a:solidFill>
-                  <a:srgbClr val="F7FAFF"/>
-                </a:solidFill>
-                <a:latin typeface="Microsoft YaHei"/>
-                <a:ea typeface="Microsoft YaHei"/>
-                <a:cs typeface="Microsoft YaHei"/>
-              </a:rPr>
-              <a:t>目标取指</a:t>
-            </a:r>
-            <a:endParaRPr sz="1020"/>
-          </a:p>
+              <a:rPr sz="880">
+                <a:solidFill>
+                  <a:srgbClr val="8392B7"/>
+                </a:solidFill>
+                <a:latin typeface="Microsoft YaHei"/>
+                <a:ea typeface="Microsoft YaHei"/>
+                <a:cs typeface="Microsoft YaHei"/>
+              </a:rPr>
+              <a:t>4</a:t>
+            </a:r>
+            <a:endParaRPr sz="880"/>
+          </a:p>
+        </p:txBody>
+      </p:sp>
+      <p:sp>
+        <p:nvSpPr>
+          <p:cNvPr id="15" name="Text 13">
+            <a:extLst>
+              <a:ext uri="{FF2B5EF4-FFF2-40B4-BE49-F238E27FC236}">
+                <a16:creationId xmlns:a16="http://schemas.microsoft.com/office/drawing/2014/main" id="{EE89C862-A5C3-4C39-8937-C9C406CCEFE5}"/>
+              </a:ext>
+            </a:extLst>
+          </p:cNvPr>
+          <p:cNvSpPr>
+            <a:spLocks noGrp="1"/>
+          </p:cNvSpPr>
+          <p:nvPr/>
+        </p:nvSpPr>
+        <p:spPr>
+          <a:xfrm>
+            <a:off x="6263640" y="3310128"/>
+            <a:ext cx="274320" cy="164592"/>
+          </a:xfrm>
+          <a:prstGeom prst="rect">
+            <a:avLst/>
+          </a:prstGeom>
+          <a:noFill/>
+        </p:spPr>
+        <p:txBody>
+          <a:bodyPr wrap="square" lIns="0" tIns="0" rIns="0" bIns="0" anchor="t">
+            <a:normAutofit/>
+          </a:bodyPr>
+          <a:lstStyle/>
           <a:p>
             <a:pPr marL="0" indent="0" algn="ctr">
               <a:buNone/>
             </a:pPr>
             <a:r>
-              <a:rPr sz="1020" b="1">
-                <a:solidFill>
-                  <a:srgbClr val="F7FAFF"/>
-                </a:solidFill>
-                <a:latin typeface="Microsoft YaHei"/>
-                <a:ea typeface="Microsoft YaHei"/>
-                <a:cs typeface="Microsoft YaHei"/>
-              </a:rPr>
-              <a:t>下一周期重新填充</a:t>
-            </a:r>
-            <a:endParaRPr sz="1020"/>
-          </a:p>
-        </p:txBody>
-      </p:sp>
-      <p:sp>
-        <p:nvSpPr>
-          <p:cNvPr id="15" name="Text 13">
-            <a:extLst>
-              <a:ext uri="{FF2B5EF4-FFF2-40B4-BE49-F238E27FC236}">
-                <a16:creationId xmlns:a16="http://schemas.microsoft.com/office/drawing/2014/main" id="{0A68C36D-400D-43EE-A7CA-A55AD4F252B8}"/>
-              </a:ext>
-            </a:extLst>
-          </p:cNvPr>
-          <p:cNvSpPr>
-            <a:spLocks noGrp="1"/>
-          </p:cNvSpPr>
-          <p:nvPr/>
-        </p:nvSpPr>
-        <p:spPr>
-          <a:xfrm>
-            <a:off x="841248" y="3218688"/>
-            <a:ext cx="1645920" cy="210312"/>
+              <a:rPr sz="880">
+                <a:solidFill>
+                  <a:srgbClr val="8392B7"/>
+                </a:solidFill>
+                <a:latin typeface="Microsoft YaHei"/>
+                <a:ea typeface="Microsoft YaHei"/>
+                <a:cs typeface="Microsoft YaHei"/>
+              </a:rPr>
+              <a:t>5</a:t>
+            </a:r>
+            <a:endParaRPr sz="880"/>
+          </a:p>
+        </p:txBody>
+      </p:sp>
+      <p:sp>
+        <p:nvSpPr>
+          <p:cNvPr id="16" name="Text 14">
+            <a:extLst>
+              <a:ext uri="{FF2B5EF4-FFF2-40B4-BE49-F238E27FC236}">
+                <a16:creationId xmlns:a16="http://schemas.microsoft.com/office/drawing/2014/main" id="{05EC5D6D-487A-4335-AC2B-2577F6AF5C2F}"/>
+              </a:ext>
+            </a:extLst>
+          </p:cNvPr>
+          <p:cNvSpPr>
+            <a:spLocks noGrp="1"/>
+          </p:cNvSpPr>
+          <p:nvPr/>
+        </p:nvSpPr>
+        <p:spPr>
+          <a:xfrm>
+            <a:off x="7360920" y="3310128"/>
+            <a:ext cx="274320" cy="164592"/>
           </a:xfrm>
           <a:prstGeom prst="rect">
             <a:avLst/>
@@ -22724,59 +23799,107 @@
           </a:bodyPr>
           <a:lstStyle/>
           <a:p>
+            <a:pPr marL="0" indent="0" algn="ctr">
+              <a:buNone/>
+            </a:pPr>
+            <a:r>
+              <a:rPr sz="880">
+                <a:solidFill>
+                  <a:srgbClr val="8392B7"/>
+                </a:solidFill>
+                <a:latin typeface="Microsoft YaHei"/>
+                <a:ea typeface="Microsoft YaHei"/>
+                <a:cs typeface="Microsoft YaHei"/>
+              </a:rPr>
+              <a:t>6</a:t>
+            </a:r>
+            <a:endParaRPr sz="880"/>
+          </a:p>
+        </p:txBody>
+      </p:sp>
+      <p:sp>
+        <p:nvSpPr>
+          <p:cNvPr id="17" name="Text 15">
+            <a:extLst>
+              <a:ext uri="{FF2B5EF4-FFF2-40B4-BE49-F238E27FC236}">
+                <a16:creationId xmlns:a16="http://schemas.microsoft.com/office/drawing/2014/main" id="{3A5CEE3A-3FF3-41B4-90DD-2D40B07CC68D}"/>
+              </a:ext>
+            </a:extLst>
+          </p:cNvPr>
+          <p:cNvSpPr>
+            <a:spLocks noGrp="1"/>
+          </p:cNvSpPr>
+          <p:nvPr/>
+        </p:nvSpPr>
+        <p:spPr>
+          <a:xfrm>
+            <a:off x="8458200" y="3310128"/>
+            <a:ext cx="274320" cy="164592"/>
+          </a:xfrm>
+          <a:prstGeom prst="rect">
+            <a:avLst/>
+          </a:prstGeom>
+          <a:noFill/>
+        </p:spPr>
+        <p:txBody>
+          <a:bodyPr wrap="square" lIns="0" tIns="0" rIns="0" bIns="0" anchor="t">
+            <a:normAutofit/>
+          </a:bodyPr>
+          <a:lstStyle/>
+          <a:p>
+            <a:pPr marL="0" indent="0" algn="ctr">
+              <a:buNone/>
+            </a:pPr>
+            <a:r>
+              <a:rPr sz="880">
+                <a:solidFill>
+                  <a:srgbClr val="8392B7"/>
+                </a:solidFill>
+                <a:latin typeface="Microsoft YaHei"/>
+                <a:ea typeface="Microsoft YaHei"/>
+                <a:cs typeface="Microsoft YaHei"/>
+              </a:rPr>
+              <a:t>7</a:t>
+            </a:r>
+            <a:endParaRPr sz="880"/>
+          </a:p>
+        </p:txBody>
+      </p:sp>
+      <p:sp>
+        <p:nvSpPr>
+          <p:cNvPr id="18" name="Text 16">
+            <a:extLst>
+              <a:ext uri="{FF2B5EF4-FFF2-40B4-BE49-F238E27FC236}">
+                <a16:creationId xmlns:a16="http://schemas.microsoft.com/office/drawing/2014/main" id="{254B7998-36A6-4E94-B7A2-E070F98B8733}"/>
+              </a:ext>
+            </a:extLst>
+          </p:cNvPr>
+          <p:cNvSpPr>
+            <a:spLocks noGrp="1"/>
+          </p:cNvSpPr>
+          <p:nvPr/>
+        </p:nvSpPr>
+        <p:spPr>
+          <a:xfrm>
+            <a:off x="841248" y="3675888"/>
+            <a:ext cx="731520" cy="182880"/>
+          </a:xfrm>
+          <a:prstGeom prst="rect">
+            <a:avLst/>
+          </a:prstGeom>
+          <a:noFill/>
+        </p:spPr>
+        <p:txBody>
+          <a:bodyPr wrap="square" lIns="0" tIns="0" rIns="0" bIns="0" anchor="t">
+            <a:normAutofit/>
+          </a:bodyPr>
+          <a:lstStyle/>
+          <a:p>
             <a:pPr marL="0" indent="0" algn="l">
               <a:buNone/>
             </a:pPr>
             <a:r>
-              <a:rPr sz="950" b="1">
-                <a:solidFill>
-                  <a:srgbClr val="22D3EE"/>
-                </a:solidFill>
-                <a:latin typeface="Microsoft YaHei"/>
-                <a:ea typeface="Microsoft YaHei"/>
-                <a:cs typeface="Microsoft YaHei"/>
-              </a:rPr>
-              <a:t>分支冲刷时序示意</a:t>
-            </a:r>
-            <a:endParaRPr sz="950"/>
-          </a:p>
-        </p:txBody>
-      </p:sp>
-      <p:sp>
-        <p:nvSpPr>
-          <p:cNvPr id="16" name="Text 14">
-            <a:extLst>
-              <a:ext uri="{FF2B5EF4-FFF2-40B4-BE49-F238E27FC236}">
-                <a16:creationId xmlns:a16="http://schemas.microsoft.com/office/drawing/2014/main" id="{A09A2EA1-B6B4-4002-BED5-161B4F97374E}"/>
-              </a:ext>
-            </a:extLst>
-          </p:cNvPr>
-          <p:cNvSpPr>
-            <a:spLocks noGrp="1"/>
-          </p:cNvSpPr>
-          <p:nvPr/>
-        </p:nvSpPr>
-        <p:spPr>
-          <a:xfrm>
-            <a:off x="822960" y="3611880"/>
-            <a:ext cx="1051560" cy="182880"/>
-          </a:xfrm>
-          <a:prstGeom prst="rect">
-            <a:avLst/>
-          </a:prstGeom>
-          <a:noFill/>
-        </p:spPr>
-        <p:txBody>
-          <a:bodyPr wrap="square" lIns="0" tIns="0" rIns="0" bIns="0" anchor="t">
-            <a:normAutofit/>
-          </a:bodyPr>
-          <a:lstStyle/>
-          <a:p>
-            <a:pPr marL="0" indent="0" algn="l">
-              <a:buNone/>
-            </a:pPr>
-            <a:r>
-              <a:rPr sz="900">
+              <a:rPr sz="920">
                 <a:solidFill>
                   <a:srgbClr val="B9C8E6"/>
                 </a:solidFill>
@@ -22784,29 +23907,29 @@
                 <a:ea typeface="Microsoft YaHei"/>
                 <a:cs typeface="Microsoft YaHei"/>
               </a:rPr>
-              <a:t>BEQ(taken)</a:t>
-            </a:r>
-            <a:endParaRPr sz="900"/>
-          </a:p>
-        </p:txBody>
-      </p:sp>
-      <p:sp>
-        <p:nvSpPr>
-          <p:cNvPr id="17" name="Text 15">
-            <a:extLst>
-              <a:ext uri="{FF2B5EF4-FFF2-40B4-BE49-F238E27FC236}">
-                <a16:creationId xmlns:a16="http://schemas.microsoft.com/office/drawing/2014/main" id="{E3C77CC2-0CC2-42A8-A9A9-6F01EF69686C}"/>
-              </a:ext>
-            </a:extLst>
-          </p:cNvPr>
-          <p:cNvSpPr>
-            <a:spLocks noGrp="1"/>
-          </p:cNvSpPr>
-          <p:nvPr/>
-        </p:nvSpPr>
-        <p:spPr>
-          <a:xfrm>
-            <a:off x="1920240" y="3566160"/>
+              <a:t>LW x1</a:t>
+            </a:r>
+            <a:endParaRPr sz="920"/>
+          </a:p>
+        </p:txBody>
+      </p:sp>
+      <p:sp>
+        <p:nvSpPr>
+          <p:cNvPr id="19" name="Text 17">
+            <a:extLst>
+              <a:ext uri="{FF2B5EF4-FFF2-40B4-BE49-F238E27FC236}">
+                <a16:creationId xmlns:a16="http://schemas.microsoft.com/office/drawing/2014/main" id="{51793C1A-64C5-4558-8DD3-7847BFB29D15}"/>
+              </a:ext>
+            </a:extLst>
+          </p:cNvPr>
+          <p:cNvSpPr>
+            <a:spLocks noGrp="1"/>
+          </p:cNvSpPr>
+          <p:nvPr/>
+        </p:nvSpPr>
+        <p:spPr>
+          <a:xfrm>
+            <a:off x="1737360" y="3639312"/>
             <a:ext cx="640080" cy="237744"/>
           </a:xfrm>
           <a:prstGeom prst="rect">
@@ -22847,21 +23970,21 @@
       </p:sp>
       <p:sp>
         <p:nvSpPr>
-          <p:cNvPr id="18" name="Text 16">
-            <a:extLst>
-              <a:ext uri="{FF2B5EF4-FFF2-40B4-BE49-F238E27FC236}">
-                <a16:creationId xmlns:a16="http://schemas.microsoft.com/office/drawing/2014/main" id="{3CC47474-B16D-40C3-B46D-797097001621}"/>
-              </a:ext>
-            </a:extLst>
-          </p:cNvPr>
-          <p:cNvSpPr>
-            <a:spLocks noGrp="1"/>
-          </p:cNvSpPr>
-          <p:nvPr/>
-        </p:nvSpPr>
-        <p:spPr>
-          <a:xfrm>
-            <a:off x="3154680" y="3566160"/>
+          <p:cNvPr id="20" name="Text 18">
+            <a:extLst>
+              <a:ext uri="{FF2B5EF4-FFF2-40B4-BE49-F238E27FC236}">
+                <a16:creationId xmlns:a16="http://schemas.microsoft.com/office/drawing/2014/main" id="{7390164D-80B3-4123-A8DF-5C87232B59A0}"/>
+              </a:ext>
+            </a:extLst>
+          </p:cNvPr>
+          <p:cNvSpPr>
+            <a:spLocks noGrp="1"/>
+          </p:cNvSpPr>
+          <p:nvPr/>
+        </p:nvSpPr>
+        <p:spPr>
+          <a:xfrm>
+            <a:off x="2834640" y="3639312"/>
             <a:ext cx="640080" cy="237744"/>
           </a:xfrm>
           <a:prstGeom prst="rect">
@@ -22902,21 +24025,21 @@
       </p:sp>
       <p:sp>
         <p:nvSpPr>
-          <p:cNvPr id="19" name="Text 17">
-            <a:extLst>
-              <a:ext uri="{FF2B5EF4-FFF2-40B4-BE49-F238E27FC236}">
-                <a16:creationId xmlns:a16="http://schemas.microsoft.com/office/drawing/2014/main" id="{9713BA38-DE5A-432F-B4DB-CE027E925CE8}"/>
-              </a:ext>
-            </a:extLst>
-          </p:cNvPr>
-          <p:cNvSpPr>
-            <a:spLocks noGrp="1"/>
-          </p:cNvSpPr>
-          <p:nvPr/>
-        </p:nvSpPr>
-        <p:spPr>
-          <a:xfrm>
-            <a:off x="4389120" y="3566160"/>
+          <p:cNvPr id="21" name="Text 19">
+            <a:extLst>
+              <a:ext uri="{FF2B5EF4-FFF2-40B4-BE49-F238E27FC236}">
+                <a16:creationId xmlns:a16="http://schemas.microsoft.com/office/drawing/2014/main" id="{95809595-0EA3-4B34-B20F-1FC046213552}"/>
+              </a:ext>
+            </a:extLst>
+          </p:cNvPr>
+          <p:cNvSpPr>
+            <a:spLocks noGrp="1"/>
+          </p:cNvSpPr>
+          <p:nvPr/>
+        </p:nvSpPr>
+        <p:spPr>
+          <a:xfrm>
+            <a:off x="3931920" y="3639312"/>
             <a:ext cx="640080" cy="237744"/>
           </a:xfrm>
           <a:prstGeom prst="rect">
@@ -22957,21 +24080,21 @@
       </p:sp>
       <p:sp>
         <p:nvSpPr>
-          <p:cNvPr id="20" name="Text 18">
-            <a:extLst>
-              <a:ext uri="{FF2B5EF4-FFF2-40B4-BE49-F238E27FC236}">
-                <a16:creationId xmlns:a16="http://schemas.microsoft.com/office/drawing/2014/main" id="{867A8C8B-9CB5-43DE-9798-2A6C94609AEC}"/>
-              </a:ext>
-            </a:extLst>
-          </p:cNvPr>
-          <p:cNvSpPr>
-            <a:spLocks noGrp="1"/>
-          </p:cNvSpPr>
-          <p:nvPr/>
-        </p:nvSpPr>
-        <p:spPr>
-          <a:xfrm>
-            <a:off x="5623560" y="3566160"/>
+          <p:cNvPr id="22" name="Text 20">
+            <a:extLst>
+              <a:ext uri="{FF2B5EF4-FFF2-40B4-BE49-F238E27FC236}">
+                <a16:creationId xmlns:a16="http://schemas.microsoft.com/office/drawing/2014/main" id="{B0106406-E44C-420C-BD08-F69945F07634}"/>
+              </a:ext>
+            </a:extLst>
+          </p:cNvPr>
+          <p:cNvSpPr>
+            <a:spLocks noGrp="1"/>
+          </p:cNvSpPr>
+          <p:nvPr/>
+        </p:nvSpPr>
+        <p:spPr>
+          <a:xfrm>
+            <a:off x="5029200" y="3639312"/>
             <a:ext cx="640080" cy="237744"/>
           </a:xfrm>
           <a:prstGeom prst="rect">
@@ -23012,21 +24135,21 @@
       </p:sp>
       <p:sp>
         <p:nvSpPr>
-          <p:cNvPr id="21" name="Text 19">
-            <a:extLst>
-              <a:ext uri="{FF2B5EF4-FFF2-40B4-BE49-F238E27FC236}">
-                <a16:creationId xmlns:a16="http://schemas.microsoft.com/office/drawing/2014/main" id="{D3613C2C-15A5-471E-96FD-A61643A9C2FB}"/>
-              </a:ext>
-            </a:extLst>
-          </p:cNvPr>
-          <p:cNvSpPr>
-            <a:spLocks noGrp="1"/>
-          </p:cNvSpPr>
-          <p:nvPr/>
-        </p:nvSpPr>
-        <p:spPr>
-          <a:xfrm>
-            <a:off x="6858000" y="3566160"/>
+          <p:cNvPr id="23" name="Text 21">
+            <a:extLst>
+              <a:ext uri="{FF2B5EF4-FFF2-40B4-BE49-F238E27FC236}">
+                <a16:creationId xmlns:a16="http://schemas.microsoft.com/office/drawing/2014/main" id="{613A0D00-0A4D-4351-84D8-8D83EB605017}"/>
+              </a:ext>
+            </a:extLst>
+          </p:cNvPr>
+          <p:cNvSpPr>
+            <a:spLocks noGrp="1"/>
+          </p:cNvSpPr>
+          <p:nvPr/>
+        </p:nvSpPr>
+        <p:spPr>
+          <a:xfrm>
+            <a:off x="6126480" y="3639312"/>
             <a:ext cx="640080" cy="237744"/>
           </a:xfrm>
           <a:prstGeom prst="rect">
@@ -23067,22 +24190,22 @@
       </p:sp>
       <p:sp>
         <p:nvSpPr>
-          <p:cNvPr id="22" name="Text 20">
-            <a:extLst>
-              <a:ext uri="{FF2B5EF4-FFF2-40B4-BE49-F238E27FC236}">
-                <a16:creationId xmlns:a16="http://schemas.microsoft.com/office/drawing/2014/main" id="{290F5FD0-B801-4F09-8B12-14CBEE14DCF7}"/>
-              </a:ext>
-            </a:extLst>
-          </p:cNvPr>
-          <p:cNvSpPr>
-            <a:spLocks noGrp="1"/>
-          </p:cNvSpPr>
-          <p:nvPr/>
-        </p:nvSpPr>
-        <p:spPr>
-          <a:xfrm>
-            <a:off x="822960" y="4050792"/>
-            <a:ext cx="1051560" cy="182880"/>
+          <p:cNvPr id="24" name="Text 22">
+            <a:extLst>
+              <a:ext uri="{FF2B5EF4-FFF2-40B4-BE49-F238E27FC236}">
+                <a16:creationId xmlns:a16="http://schemas.microsoft.com/office/drawing/2014/main" id="{1199976C-B6A0-4156-8254-673C4839AEF7}"/>
+              </a:ext>
+            </a:extLst>
+          </p:cNvPr>
+          <p:cNvSpPr>
+            <a:spLocks noGrp="1"/>
+          </p:cNvSpPr>
+          <p:nvPr/>
+        </p:nvSpPr>
+        <p:spPr>
+          <a:xfrm>
+            <a:off x="749808" y="4206240"/>
+            <a:ext cx="841248" cy="182880"/>
           </a:xfrm>
           <a:prstGeom prst="rect">
             <a:avLst/>
@@ -23099,7 +24222,7 @@
               <a:buNone/>
             </a:pPr>
             <a:r>
-              <a:rPr sz="900">
+              <a:rPr sz="920">
                 <a:solidFill>
                   <a:srgbClr val="B9C8E6"/>
                 </a:solidFill>
@@ -23107,29 +24230,29 @@
                 <a:ea typeface="Microsoft YaHei"/>
                 <a:cs typeface="Microsoft YaHei"/>
               </a:rPr>
-              <a:t>顺序指令 1</a:t>
-            </a:r>
-            <a:endParaRPr sz="900"/>
-          </a:p>
-        </p:txBody>
-      </p:sp>
-      <p:sp>
-        <p:nvSpPr>
-          <p:cNvPr id="23" name="Text 21">
-            <a:extLst>
-              <a:ext uri="{FF2B5EF4-FFF2-40B4-BE49-F238E27FC236}">
-                <a16:creationId xmlns:a16="http://schemas.microsoft.com/office/drawing/2014/main" id="{3537890B-75B4-4ED8-9FC5-CFC7949B03E9}"/>
-              </a:ext>
-            </a:extLst>
-          </p:cNvPr>
-          <p:cNvSpPr>
-            <a:spLocks noGrp="1"/>
-          </p:cNvSpPr>
-          <p:nvPr/>
-        </p:nvSpPr>
-        <p:spPr>
-          <a:xfrm>
-            <a:off x="1920240" y="4005072"/>
+              <a:t>ADD x2,x1</a:t>
+            </a:r>
+            <a:endParaRPr sz="920"/>
+          </a:p>
+        </p:txBody>
+      </p:sp>
+      <p:sp>
+        <p:nvSpPr>
+          <p:cNvPr id="25" name="Text 23">
+            <a:extLst>
+              <a:ext uri="{FF2B5EF4-FFF2-40B4-BE49-F238E27FC236}">
+                <a16:creationId xmlns:a16="http://schemas.microsoft.com/office/drawing/2014/main" id="{9D356109-818D-4AC7-A253-3D2751C0028B}"/>
+              </a:ext>
+            </a:extLst>
+          </p:cNvPr>
+          <p:cNvSpPr>
+            <a:spLocks noGrp="1"/>
+          </p:cNvSpPr>
+          <p:nvPr/>
+        </p:nvSpPr>
+        <p:spPr>
+          <a:xfrm>
+            <a:off x="2834640" y="4178808"/>
             <a:ext cx="640080" cy="237744"/>
           </a:xfrm>
           <a:prstGeom prst="rect">
@@ -23170,21 +24293,21 @@
       </p:sp>
       <p:sp>
         <p:nvSpPr>
-          <p:cNvPr id="24" name="Text 22">
-            <a:extLst>
-              <a:ext uri="{FF2B5EF4-FFF2-40B4-BE49-F238E27FC236}">
-                <a16:creationId xmlns:a16="http://schemas.microsoft.com/office/drawing/2014/main" id="{30BB64CF-DDB3-4DC6-BCE7-21FCAE34DA49}"/>
-              </a:ext>
-            </a:extLst>
-          </p:cNvPr>
-          <p:cNvSpPr>
-            <a:spLocks noGrp="1"/>
-          </p:cNvSpPr>
-          <p:nvPr/>
-        </p:nvSpPr>
-        <p:spPr>
-          <a:xfrm>
-            <a:off x="3154680" y="4005072"/>
+          <p:cNvPr id="26" name="Text 24">
+            <a:extLst>
+              <a:ext uri="{FF2B5EF4-FFF2-40B4-BE49-F238E27FC236}">
+                <a16:creationId xmlns:a16="http://schemas.microsoft.com/office/drawing/2014/main" id="{ACC1B1FE-242C-4666-8723-0062A6F06309}"/>
+              </a:ext>
+            </a:extLst>
+          </p:cNvPr>
+          <p:cNvSpPr>
+            <a:spLocks noGrp="1"/>
+          </p:cNvSpPr>
+          <p:nvPr/>
+        </p:nvSpPr>
+        <p:spPr>
+          <a:xfrm>
+            <a:off x="3931920" y="4178808"/>
             <a:ext cx="640080" cy="237744"/>
           </a:xfrm>
           <a:prstGeom prst="rect">
@@ -23225,392 +24348,21 @@
       </p:sp>
       <p:sp>
         <p:nvSpPr>
-          <p:cNvPr id="25" name="Text 23">
-            <a:extLst>
-              <a:ext uri="{FF2B5EF4-FFF2-40B4-BE49-F238E27FC236}">
-                <a16:creationId xmlns:a16="http://schemas.microsoft.com/office/drawing/2014/main" id="{FB784BC1-9C2B-47A7-B0F2-59A4B84C917E}"/>
-              </a:ext>
-            </a:extLst>
-          </p:cNvPr>
-          <p:cNvSpPr>
-            <a:spLocks noGrp="1"/>
-          </p:cNvSpPr>
-          <p:nvPr/>
-        </p:nvSpPr>
-        <p:spPr>
-          <a:xfrm>
-            <a:off x="4389120" y="4005072"/>
-            <a:ext cx="640080" cy="237744"/>
-          </a:xfrm>
-          <a:prstGeom prst="rect">
-            <a:avLst/>
-          </a:prstGeom>
-          <a:solidFill>
-            <a:srgbClr val="F87171"/>
-          </a:solidFill>
-          <a:ln>
-            <a:solidFill>
-              <a:srgbClr val="F87171"/>
-            </a:solidFill>
-          </a:ln>
-        </p:spPr>
-        <p:txBody>
-          <a:bodyPr wrap="square" lIns="0" tIns="0" rIns="0" bIns="0" anchor="ctr">
-            <a:normAutofit/>
-          </a:bodyPr>
-          <a:lstStyle/>
-          <a:p>
-            <a:pPr marL="0" indent="0" algn="ctr">
-              <a:buNone/>
-            </a:pPr>
-            <a:r>
-              <a:rPr sz="900" b="1">
-                <a:solidFill>
-                  <a:srgbClr val="0B1020"/>
-                </a:solidFill>
-                <a:latin typeface="Microsoft YaHei"/>
-                <a:ea typeface="Microsoft YaHei"/>
-                <a:cs typeface="Microsoft YaHei"/>
-              </a:rPr>
-              <a:t>XX</a:t>
-            </a:r>
-            <a:endParaRPr sz="900"/>
-          </a:p>
-        </p:txBody>
-      </p:sp>
-      <p:sp>
-        <p:nvSpPr>
-          <p:cNvPr id="26" name="Text 24">
-            <a:extLst>
-              <a:ext uri="{FF2B5EF4-FFF2-40B4-BE49-F238E27FC236}">
-                <a16:creationId xmlns:a16="http://schemas.microsoft.com/office/drawing/2014/main" id="{2B504534-32F6-4817-9A92-DABF0FBB8D08}"/>
-              </a:ext>
-            </a:extLst>
-          </p:cNvPr>
-          <p:cNvSpPr>
-            <a:spLocks noGrp="1"/>
-          </p:cNvSpPr>
-          <p:nvPr/>
-        </p:nvSpPr>
-        <p:spPr>
-          <a:xfrm>
-            <a:off x="822960" y="4489704"/>
-            <a:ext cx="1051560" cy="182880"/>
-          </a:xfrm>
-          <a:prstGeom prst="rect">
-            <a:avLst/>
-          </a:prstGeom>
-          <a:noFill/>
-        </p:spPr>
-        <p:txBody>
-          <a:bodyPr wrap="square" lIns="0" tIns="0" rIns="0" bIns="0" anchor="t">
-            <a:normAutofit/>
-          </a:bodyPr>
-          <a:lstStyle/>
-          <a:p>
-            <a:pPr marL="0" indent="0" algn="l">
-              <a:buNone/>
-            </a:pPr>
-            <a:r>
-              <a:rPr sz="900">
-                <a:solidFill>
-                  <a:srgbClr val="B9C8E6"/>
-                </a:solidFill>
-                <a:latin typeface="Microsoft YaHei"/>
-                <a:ea typeface="Microsoft YaHei"/>
-                <a:cs typeface="Microsoft YaHei"/>
-              </a:rPr>
-              <a:t>顺序指令 2</a:t>
-            </a:r>
-            <a:endParaRPr sz="900"/>
-          </a:p>
-        </p:txBody>
-      </p:sp>
-      <p:sp>
-        <p:nvSpPr>
           <p:cNvPr id="27" name="Text 25">
             <a:extLst>
               <a:ext uri="{FF2B5EF4-FFF2-40B4-BE49-F238E27FC236}">
-                <a16:creationId xmlns:a16="http://schemas.microsoft.com/office/drawing/2014/main" id="{16CBFE09-C1AE-4090-BB92-5AC1193C9FDE}"/>
-              </a:ext>
-            </a:extLst>
-          </p:cNvPr>
-          <p:cNvSpPr>
-            <a:spLocks noGrp="1"/>
-          </p:cNvSpPr>
-          <p:nvPr/>
-        </p:nvSpPr>
-        <p:spPr>
-          <a:xfrm>
-            <a:off x="1920240" y="4443984"/>
-            <a:ext cx="640080" cy="237744"/>
-          </a:xfrm>
-          <a:prstGeom prst="rect">
-            <a:avLst/>
-          </a:prstGeom>
-          <a:solidFill>
-            <a:srgbClr val="3B82F6"/>
-          </a:solidFill>
-          <a:ln>
-            <a:solidFill>
-              <a:srgbClr val="3B82F6"/>
-            </a:solidFill>
-          </a:ln>
-        </p:spPr>
-        <p:txBody>
-          <a:bodyPr wrap="square" lIns="0" tIns="0" rIns="0" bIns="0" anchor="ctr">
-            <a:normAutofit/>
-          </a:bodyPr>
-          <a:lstStyle/>
-          <a:p>
-            <a:pPr marL="0" indent="0" algn="ctr">
-              <a:buNone/>
-            </a:pPr>
-            <a:r>
-              <a:rPr sz="900" b="1">
-                <a:solidFill>
-                  <a:srgbClr val="0B1020"/>
-                </a:solidFill>
-                <a:latin typeface="Microsoft YaHei"/>
-                <a:ea typeface="Microsoft YaHei"/>
-                <a:cs typeface="Microsoft YaHei"/>
-              </a:rPr>
-              <a:t>IF</a:t>
-            </a:r>
-            <a:endParaRPr sz="900"/>
-          </a:p>
-        </p:txBody>
-      </p:sp>
-      <p:sp>
-        <p:nvSpPr>
-          <p:cNvPr id="28" name="Text 26">
-            <a:extLst>
-              <a:ext uri="{FF2B5EF4-FFF2-40B4-BE49-F238E27FC236}">
-                <a16:creationId xmlns:a16="http://schemas.microsoft.com/office/drawing/2014/main" id="{DA565CC3-C114-42C8-B4A6-FB60CB1A161A}"/>
-              </a:ext>
-            </a:extLst>
-          </p:cNvPr>
-          <p:cNvSpPr>
-            <a:spLocks noGrp="1"/>
-          </p:cNvSpPr>
-          <p:nvPr/>
-        </p:nvSpPr>
-        <p:spPr>
-          <a:xfrm>
-            <a:off x="3154680" y="4443984"/>
-            <a:ext cx="640080" cy="237744"/>
-          </a:xfrm>
-          <a:prstGeom prst="rect">
-            <a:avLst/>
-          </a:prstGeom>
-          <a:solidFill>
-            <a:srgbClr val="F87171"/>
-          </a:solidFill>
-          <a:ln>
-            <a:solidFill>
-              <a:srgbClr val="F87171"/>
-            </a:solidFill>
-          </a:ln>
-        </p:spPr>
-        <p:txBody>
-          <a:bodyPr wrap="square" lIns="0" tIns="0" rIns="0" bIns="0" anchor="ctr">
-            <a:normAutofit/>
-          </a:bodyPr>
-          <a:lstStyle/>
-          <a:p>
-            <a:pPr marL="0" indent="0" algn="ctr">
-              <a:buNone/>
-            </a:pPr>
-            <a:r>
-              <a:rPr sz="900" b="1">
-                <a:solidFill>
-                  <a:srgbClr val="0B1020"/>
-                </a:solidFill>
-                <a:latin typeface="Microsoft YaHei"/>
-                <a:ea typeface="Microsoft YaHei"/>
-                <a:cs typeface="Microsoft YaHei"/>
-              </a:rPr>
-              <a:t>XX</a:t>
-            </a:r>
-            <a:endParaRPr sz="900"/>
-          </a:p>
-        </p:txBody>
-      </p:sp>
-      <p:sp>
-        <p:nvSpPr>
-          <p:cNvPr id="29" name="Text 27">
-            <a:extLst>
-              <a:ext uri="{FF2B5EF4-FFF2-40B4-BE49-F238E27FC236}">
-                <a16:creationId xmlns:a16="http://schemas.microsoft.com/office/drawing/2014/main" id="{7E35B574-E95D-4A86-880D-C8BEB5DF03C9}"/>
-              </a:ext>
-            </a:extLst>
-          </p:cNvPr>
-          <p:cNvSpPr>
-            <a:spLocks noGrp="1"/>
-          </p:cNvSpPr>
-          <p:nvPr/>
-        </p:nvSpPr>
-        <p:spPr>
-          <a:xfrm>
-            <a:off x="822960" y="4928616"/>
-            <a:ext cx="1051560" cy="182880"/>
-          </a:xfrm>
-          <a:prstGeom prst="rect">
-            <a:avLst/>
-          </a:prstGeom>
-          <a:noFill/>
-        </p:spPr>
-        <p:txBody>
-          <a:bodyPr wrap="square" lIns="0" tIns="0" rIns="0" bIns="0" anchor="t">
-            <a:normAutofit/>
-          </a:bodyPr>
-          <a:lstStyle/>
-          <a:p>
-            <a:pPr marL="0" indent="0" algn="l">
-              <a:buNone/>
-            </a:pPr>
-            <a:r>
-              <a:rPr sz="900">
-                <a:solidFill>
-                  <a:srgbClr val="B9C8E6"/>
-                </a:solidFill>
-                <a:latin typeface="Microsoft YaHei"/>
-                <a:ea typeface="Microsoft YaHei"/>
-                <a:cs typeface="Microsoft YaHei"/>
-              </a:rPr>
-              <a:t>目标指令</a:t>
-            </a:r>
-            <a:endParaRPr sz="900"/>
-          </a:p>
-        </p:txBody>
-      </p:sp>
-      <p:sp>
-        <p:nvSpPr>
-          <p:cNvPr id="30" name="Text 28">
-            <a:extLst>
-              <a:ext uri="{FF2B5EF4-FFF2-40B4-BE49-F238E27FC236}">
-                <a16:creationId xmlns:a16="http://schemas.microsoft.com/office/drawing/2014/main" id="{1843B6C6-8654-44E6-B0F8-5788A4B0D8B1}"/>
-              </a:ext>
-            </a:extLst>
-          </p:cNvPr>
-          <p:cNvSpPr>
-            <a:spLocks noGrp="1"/>
-          </p:cNvSpPr>
-          <p:nvPr/>
-        </p:nvSpPr>
-        <p:spPr>
-          <a:xfrm>
-            <a:off x="4389120" y="4882896"/>
-            <a:ext cx="640080" cy="237744"/>
-          </a:xfrm>
-          <a:prstGeom prst="rect">
-            <a:avLst/>
-          </a:prstGeom>
-          <a:solidFill>
-            <a:srgbClr val="3B82F6"/>
-          </a:solidFill>
-          <a:ln>
-            <a:solidFill>
-              <a:srgbClr val="3B82F6"/>
-            </a:solidFill>
-          </a:ln>
-        </p:spPr>
-        <p:txBody>
-          <a:bodyPr wrap="square" lIns="0" tIns="0" rIns="0" bIns="0" anchor="ctr">
-            <a:normAutofit/>
-          </a:bodyPr>
-          <a:lstStyle/>
-          <a:p>
-            <a:pPr marL="0" indent="0" algn="ctr">
-              <a:buNone/>
-            </a:pPr>
-            <a:r>
-              <a:rPr sz="900" b="1">
-                <a:solidFill>
-                  <a:srgbClr val="0B1020"/>
-                </a:solidFill>
-                <a:latin typeface="Microsoft YaHei"/>
-                <a:ea typeface="Microsoft YaHei"/>
-                <a:cs typeface="Microsoft YaHei"/>
-              </a:rPr>
-              <a:t>IF</a:t>
-            </a:r>
-            <a:endParaRPr sz="900"/>
-          </a:p>
-        </p:txBody>
-      </p:sp>
-      <p:sp>
-        <p:nvSpPr>
-          <p:cNvPr id="31" name="Text 29">
-            <a:extLst>
-              <a:ext uri="{FF2B5EF4-FFF2-40B4-BE49-F238E27FC236}">
-                <a16:creationId xmlns:a16="http://schemas.microsoft.com/office/drawing/2014/main" id="{DA1718B8-A3E0-45EE-936E-3B15F80E3992}"/>
-              </a:ext>
-            </a:extLst>
-          </p:cNvPr>
-          <p:cNvSpPr>
-            <a:spLocks noGrp="1"/>
-          </p:cNvSpPr>
-          <p:nvPr/>
-        </p:nvSpPr>
-        <p:spPr>
-          <a:xfrm>
-            <a:off x="5623560" y="4882896"/>
-            <a:ext cx="640080" cy="237744"/>
-          </a:xfrm>
-          <a:prstGeom prst="rect">
-            <a:avLst/>
-          </a:prstGeom>
-          <a:solidFill>
-            <a:srgbClr val="34D399"/>
-          </a:solidFill>
-          <a:ln>
-            <a:solidFill>
-              <a:srgbClr val="34D399"/>
-            </a:solidFill>
-          </a:ln>
-        </p:spPr>
-        <p:txBody>
-          <a:bodyPr wrap="square" lIns="0" tIns="0" rIns="0" bIns="0" anchor="ctr">
-            <a:normAutofit/>
-          </a:bodyPr>
-          <a:lstStyle/>
-          <a:p>
-            <a:pPr marL="0" indent="0" algn="ctr">
-              <a:buNone/>
-            </a:pPr>
-            <a:r>
-              <a:rPr sz="900" b="1">
-                <a:solidFill>
-                  <a:srgbClr val="0B1020"/>
-                </a:solidFill>
-                <a:latin typeface="Microsoft YaHei"/>
-                <a:ea typeface="Microsoft YaHei"/>
-                <a:cs typeface="Microsoft YaHei"/>
-              </a:rPr>
-              <a:t>ID</a:t>
-            </a:r>
-            <a:endParaRPr sz="900"/>
-          </a:p>
-        </p:txBody>
-      </p:sp>
-      <p:sp>
-        <p:nvSpPr>
-          <p:cNvPr id="32" name="Text 30">
-            <a:extLst>
-              <a:ext uri="{FF2B5EF4-FFF2-40B4-BE49-F238E27FC236}">
-                <a16:creationId xmlns:a16="http://schemas.microsoft.com/office/drawing/2014/main" id="{37E4DC29-45D2-4DBC-94B0-73D6244D2379}"/>
-              </a:ext>
-            </a:extLst>
-          </p:cNvPr>
-          <p:cNvSpPr>
-            <a:spLocks noGrp="1"/>
-          </p:cNvSpPr>
-          <p:nvPr/>
-        </p:nvSpPr>
-        <p:spPr>
-          <a:xfrm>
-            <a:off x="6858000" y="4882896"/>
+                <a16:creationId xmlns:a16="http://schemas.microsoft.com/office/drawing/2014/main" id="{EF996091-748C-477E-AD00-9859AAF218C9}"/>
+              </a:ext>
+            </a:extLst>
+          </p:cNvPr>
+          <p:cNvSpPr>
+            <a:spLocks noGrp="1"/>
+          </p:cNvSpPr>
+          <p:nvPr/>
+        </p:nvSpPr>
+        <p:spPr>
+          <a:xfrm>
+            <a:off x="5029200" y="4178808"/>
             <a:ext cx="640080" cy="237744"/>
           </a:xfrm>
           <a:prstGeom prst="rect">
@@ -23643,6 +24395,61 @@
                 <a:ea typeface="Microsoft YaHei"/>
                 <a:cs typeface="Microsoft YaHei"/>
               </a:rPr>
+              <a:t>气泡</a:t>
+            </a:r>
+            <a:endParaRPr sz="900"/>
+          </a:p>
+        </p:txBody>
+      </p:sp>
+      <p:sp>
+        <p:nvSpPr>
+          <p:cNvPr id="28" name="Text 26">
+            <a:extLst>
+              <a:ext uri="{FF2B5EF4-FFF2-40B4-BE49-F238E27FC236}">
+                <a16:creationId xmlns:a16="http://schemas.microsoft.com/office/drawing/2014/main" id="{0A72A9CE-050D-4C2A-BD20-69F3A32B40BE}"/>
+              </a:ext>
+            </a:extLst>
+          </p:cNvPr>
+          <p:cNvSpPr>
+            <a:spLocks noGrp="1"/>
+          </p:cNvSpPr>
+          <p:nvPr/>
+        </p:nvSpPr>
+        <p:spPr>
+          <a:xfrm>
+            <a:off x="6126480" y="4178808"/>
+            <a:ext cx="640080" cy="237744"/>
+          </a:xfrm>
+          <a:prstGeom prst="rect">
+            <a:avLst/>
+          </a:prstGeom>
+          <a:solidFill>
+            <a:srgbClr val="F59E0B"/>
+          </a:solidFill>
+          <a:ln>
+            <a:solidFill>
+              <a:srgbClr val="F59E0B"/>
+            </a:solidFill>
+          </a:ln>
+        </p:spPr>
+        <p:txBody>
+          <a:bodyPr wrap="square" lIns="0" tIns="0" rIns="0" bIns="0" anchor="ctr">
+            <a:normAutofit/>
+          </a:bodyPr>
+          <a:lstStyle/>
+          <a:p>
+            <a:pPr marL="0" indent="0" algn="ctr">
+              <a:buNone/>
+            </a:pPr>
+            <a:r>
+              <a:rPr sz="900" b="1">
+                <a:solidFill>
+                  <a:srgbClr val="0B1020"/>
+                </a:solidFill>
+                <a:latin typeface="Microsoft YaHei"/>
+                <a:ea typeface="Microsoft YaHei"/>
+                <a:cs typeface="Microsoft YaHei"/>
+              </a:rPr>
               <a:t>EX</a:t>
             </a:r>
             <a:endParaRPr sz="900"/>
@@ -23651,32 +24458,142 @@
       </p:sp>
       <p:sp>
         <p:nvSpPr>
-          <p:cNvPr id="33" name="Text 31">
-            <a:extLst>
-              <a:ext uri="{FF2B5EF4-FFF2-40B4-BE49-F238E27FC236}">
-                <a16:creationId xmlns:a16="http://schemas.microsoft.com/office/drawing/2014/main" id="{6CEC96D7-C93F-4B2E-AA22-9B13E2FC5848}"/>
-              </a:ext>
-            </a:extLst>
-          </p:cNvPr>
-          <p:cNvSpPr>
-            <a:spLocks noGrp="1"/>
-          </p:cNvSpPr>
-          <p:nvPr/>
-        </p:nvSpPr>
-        <p:spPr>
-          <a:xfrm>
-            <a:off x="1828800" y="5559552"/>
-            <a:ext cx="8503920" cy="402336"/>
+          <p:cNvPr id="29" name="Text 27">
+            <a:extLst>
+              <a:ext uri="{FF2B5EF4-FFF2-40B4-BE49-F238E27FC236}">
+                <a16:creationId xmlns:a16="http://schemas.microsoft.com/office/drawing/2014/main" id="{622CDF23-C06F-41B0-99D5-F3DB7D83270B}"/>
+              </a:ext>
+            </a:extLst>
+          </p:cNvPr>
+          <p:cNvSpPr>
+            <a:spLocks noGrp="1"/>
+          </p:cNvSpPr>
+          <p:nvPr/>
+        </p:nvSpPr>
+        <p:spPr>
+          <a:xfrm>
+            <a:off x="7223760" y="4178808"/>
+            <a:ext cx="640080" cy="237744"/>
           </a:xfrm>
           <a:prstGeom prst="rect">
             <a:avLst/>
           </a:prstGeom>
           <a:solidFill>
-            <a:srgbClr val="2B1018"/>
+            <a:srgbClr val="A78BFA"/>
+          </a:solidFill>
+          <a:ln>
+            <a:solidFill>
+              <a:srgbClr val="A78BFA"/>
+            </a:solidFill>
+          </a:ln>
+        </p:spPr>
+        <p:txBody>
+          <a:bodyPr wrap="square" lIns="0" tIns="0" rIns="0" bIns="0" anchor="ctr">
+            <a:normAutofit/>
+          </a:bodyPr>
+          <a:lstStyle/>
+          <a:p>
+            <a:pPr marL="0" indent="0" algn="ctr">
+              <a:buNone/>
+            </a:pPr>
+            <a:r>
+              <a:rPr sz="900" b="1">
+                <a:solidFill>
+                  <a:srgbClr val="0B1020"/>
+                </a:solidFill>
+                <a:latin typeface="Microsoft YaHei"/>
+                <a:ea typeface="Microsoft YaHei"/>
+                <a:cs typeface="Microsoft YaHei"/>
+              </a:rPr>
+              <a:t>MEM</a:t>
+            </a:r>
+            <a:endParaRPr sz="900"/>
+          </a:p>
+        </p:txBody>
+      </p:sp>
+      <p:sp>
+        <p:nvSpPr>
+          <p:cNvPr id="30" name="Text 28">
+            <a:extLst>
+              <a:ext uri="{FF2B5EF4-FFF2-40B4-BE49-F238E27FC236}">
+                <a16:creationId xmlns:a16="http://schemas.microsoft.com/office/drawing/2014/main" id="{9647198A-CCDA-41C2-96C9-8184C5A6A7FE}"/>
+              </a:ext>
+            </a:extLst>
+          </p:cNvPr>
+          <p:cNvSpPr>
+            <a:spLocks noGrp="1"/>
+          </p:cNvSpPr>
+          <p:nvPr/>
+        </p:nvSpPr>
+        <p:spPr>
+          <a:xfrm>
+            <a:off x="8321040" y="4178808"/>
+            <a:ext cx="640080" cy="237744"/>
+          </a:xfrm>
+          <a:prstGeom prst="rect">
+            <a:avLst/>
+          </a:prstGeom>
+          <a:solidFill>
+            <a:srgbClr val="22D3EE"/>
+          </a:solidFill>
+          <a:ln>
+            <a:solidFill>
+              <a:srgbClr val="22D3EE"/>
+            </a:solidFill>
+          </a:ln>
+        </p:spPr>
+        <p:txBody>
+          <a:bodyPr wrap="square" lIns="0" tIns="0" rIns="0" bIns="0" anchor="ctr">
+            <a:normAutofit/>
+          </a:bodyPr>
+          <a:lstStyle/>
+          <a:p>
+            <a:pPr marL="0" indent="0" algn="ctr">
+              <a:buNone/>
+            </a:pPr>
+            <a:r>
+              <a:rPr sz="900" b="1">
+                <a:solidFill>
+                  <a:srgbClr val="0B1020"/>
+                </a:solidFill>
+                <a:latin typeface="Microsoft YaHei"/>
+                <a:ea typeface="Microsoft YaHei"/>
+                <a:cs typeface="Microsoft YaHei"/>
+              </a:rPr>
+              <a:t>WB</a:t>
+            </a:r>
+            <a:endParaRPr sz="900"/>
+          </a:p>
+        </p:txBody>
+      </p:sp>
+      <p:sp>
+        <p:nvSpPr>
+          <p:cNvPr id="31" name="Text 29">
+            <a:extLst>
+              <a:ext uri="{FF2B5EF4-FFF2-40B4-BE49-F238E27FC236}">
+                <a16:creationId xmlns:a16="http://schemas.microsoft.com/office/drawing/2014/main" id="{70AAF364-8203-4E35-B988-BE4EC79195C8}"/>
+              </a:ext>
+            </a:extLst>
+          </p:cNvPr>
+          <p:cNvSpPr>
+            <a:spLocks noGrp="1"/>
+          </p:cNvSpPr>
+          <p:nvPr/>
+        </p:nvSpPr>
+        <p:spPr>
+          <a:xfrm>
+            <a:off x="1280160" y="5010912"/>
+            <a:ext cx="6858000" cy="384048"/>
+          </a:xfrm>
+          <a:prstGeom prst="rect">
+            <a:avLst/>
+          </a:prstGeom>
+          <a:solidFill>
+            <a:srgbClr val="102033"/>
           </a:solidFill>
           <a:ln w="12700">
             <a:solidFill>
-              <a:srgbClr val="F87171"/>
+              <a:srgbClr val="1F5E6E"/>
             </a:solidFill>
           </a:ln>
         </p:spPr>
@@ -23690,17 +24607,127 @@
               <a:buNone/>
             </a:pPr>
             <a:r>
-              <a:rPr sz="1230" b="1">
-                <a:solidFill>
-                  <a:srgbClr val="FFD6DD"/>
-                </a:solidFill>
-                <a:latin typeface="Microsoft YaHei"/>
-                <a:ea typeface="Microsoft YaHei"/>
-                <a:cs typeface="Microsoft YaHei"/>
-              </a:rPr>
-              <a:t>错误路径指令 valid 清零，因此不能写寄存器、存储器或 MMIO</a:t>
-            </a:r>
-            <a:endParaRPr sz="1230"/>
+              <a:rPr sz="1160" b="1">
+                <a:solidFill>
+                  <a:srgbClr val="E5FBFF"/>
+                </a:solidFill>
+                <a:latin typeface="Microsoft YaHei"/>
+                <a:ea typeface="Microsoft YaHei"/>
+                <a:cs typeface="Microsoft YaHei"/>
+              </a:rPr>
+              <a:t>时序示意：第 4 周期保持前端，并让消费者延后进入 EX</a:t>
+            </a:r>
+            <a:endParaRPr sz="1160"/>
+          </a:p>
+        </p:txBody>
+      </p:sp>
+      <p:sp>
+        <p:nvSpPr>
+          <p:cNvPr id="32" name="Text 30">
+            <a:extLst>
+              <a:ext uri="{FF2B5EF4-FFF2-40B4-BE49-F238E27FC236}">
+                <a16:creationId xmlns:a16="http://schemas.microsoft.com/office/drawing/2014/main" id="{3C677FEF-BA03-48AC-B1E1-DED978D6B5BD}"/>
+              </a:ext>
+            </a:extLst>
+          </p:cNvPr>
+          <p:cNvSpPr>
+            <a:spLocks noGrp="1"/>
+          </p:cNvSpPr>
+          <p:nvPr/>
+        </p:nvSpPr>
+        <p:spPr>
+          <a:xfrm>
+            <a:off x="8458200" y="5010912"/>
+            <a:ext cx="1234440" cy="310896"/>
+          </a:xfrm>
+          <a:prstGeom prst="rect">
+            <a:avLst/>
+          </a:prstGeom>
+          <a:solidFill>
+            <a:srgbClr val="2C1D0C"/>
+          </a:solidFill>
+          <a:ln w="12700">
+            <a:solidFill>
+              <a:srgbClr val="F59E0B"/>
+            </a:solidFill>
+          </a:ln>
+        </p:spPr>
+        <p:txBody>
+          <a:bodyPr wrap="square" lIns="254" tIns="254" rIns="254" bIns="254" anchor="ctr">
+            <a:normAutofit/>
+          </a:bodyPr>
+          <a:lstStyle/>
+          <a:p>
+            <a:pPr marL="0" indent="0" algn="ctr">
+              <a:buNone/>
+            </a:pPr>
+            <a:r>
+              <a:rPr sz="980" b="1">
+                <a:solidFill>
+                  <a:srgbClr val="FFF2D2"/>
+                </a:solidFill>
+                <a:latin typeface="Microsoft YaHei"/>
+                <a:ea typeface="Microsoft YaHei"/>
+                <a:cs typeface="Microsoft YaHei"/>
+              </a:rPr>
+              <a:t>请求保持</a:t>
+            </a:r>
+            <a:endParaRPr sz="980"/>
+          </a:p>
+        </p:txBody>
+      </p:sp>
+      <p:sp>
+        <p:nvSpPr>
+          <p:cNvPr id="33" name="Text 31">
+            <a:extLst>
+              <a:ext uri="{FF2B5EF4-FFF2-40B4-BE49-F238E27FC236}">
+                <a16:creationId xmlns:a16="http://schemas.microsoft.com/office/drawing/2014/main" id="{610A4EE0-FAF3-4E28-B5D8-8263BD9BD627}"/>
+              </a:ext>
+            </a:extLst>
+          </p:cNvPr>
+          <p:cNvSpPr>
+            <a:spLocks noGrp="1"/>
+          </p:cNvSpPr>
+          <p:nvPr/>
+        </p:nvSpPr>
+        <p:spPr>
+          <a:xfrm>
+            <a:off x="9875520" y="5010912"/>
+            <a:ext cx="1234440" cy="310896"/>
+          </a:xfrm>
+          <a:prstGeom prst="rect">
+            <a:avLst/>
+          </a:prstGeom>
+          <a:solidFill>
+            <a:srgbClr val="0F2C20"/>
+          </a:solidFill>
+          <a:ln w="12700">
+            <a:solidFill>
+              <a:srgbClr val="34D399"/>
+            </a:solidFill>
+          </a:ln>
+        </p:spPr>
+        <p:txBody>
+          <a:bodyPr wrap="square" lIns="254" tIns="254" rIns="254" bIns="254" anchor="ctr">
+            <a:normAutofit/>
+          </a:bodyPr>
+          <a:lstStyle/>
+          <a:p>
+            <a:pPr marL="0" indent="0" algn="ctr">
+              <a:buNone/>
+            </a:pPr>
+            <a:r>
+              <a:rPr sz="980" b="1">
+                <a:solidFill>
+                  <a:srgbClr val="DBFBEA"/>
+                </a:solidFill>
+                <a:latin typeface="Microsoft YaHei"/>
+                <a:ea typeface="Microsoft YaHei"/>
+                <a:cs typeface="Microsoft YaHei"/>
+              </a:rPr>
+              <a:t>单次提交</a:t>
+            </a:r>
+            <a:endParaRPr sz="980"/>
           </a:p>
         </p:txBody>
       </p:sp>
@@ -23709,7 +24736,7 @@
           <p:cNvPr id="34" name="Text 32">
             <a:extLst>
               <a:ext uri="{FF2B5EF4-FFF2-40B4-BE49-F238E27FC236}">
-                <a16:creationId xmlns:a16="http://schemas.microsoft.com/office/drawing/2014/main" id="{F3D0AD5C-23D9-42F2-B7A1-C1013E7D4539}"/>
+                <a16:creationId xmlns:a16="http://schemas.microsoft.com/office/drawing/2014/main" id="{19F1BD46-A0C9-412B-87F1-CDCD56487DC6}"/>
               </a:ext>
             </a:extLst>
           </p:cNvPr>
@@ -23755,7 +24782,7 @@
     </p:spTree>
     <p:extLst>
       <p:ext uri="{BB962C8B-B14F-4D97-AF65-F5344CB8AC3E}">
-        <p14:creationId xmlns:p14="http://schemas.microsoft.com/office/powerpoint/2010/main" val="1076890114"/>
+        <p14:creationId xmlns:p14="http://schemas.microsoft.com/office/powerpoint/2010/main" val="2109804027"/>
       </p:ext>
     </p:extLst>
   </p:cSld>
